--- a/presentation/Uski.pptx
+++ b/presentation/Uski.pptx
@@ -5,7 +5,7 @@
     <p:sldMasterId id="2147483724" r:id="rId1"/>
   </p:sldMasterIdLst>
   <p:notesMasterIdLst>
-    <p:notesMasterId r:id="rId12"/>
+    <p:notesMasterId r:id="rId13"/>
   </p:notesMasterIdLst>
   <p:sldIdLst>
     <p:sldId id="256" r:id="rId2"/>
@@ -15,9 +15,10 @@
     <p:sldId id="260" r:id="rId6"/>
     <p:sldId id="261" r:id="rId7"/>
     <p:sldId id="262" r:id="rId8"/>
-    <p:sldId id="265" r:id="rId9"/>
-    <p:sldId id="263" r:id="rId10"/>
-    <p:sldId id="264" r:id="rId11"/>
+    <p:sldId id="267" r:id="rId9"/>
+    <p:sldId id="265" r:id="rId10"/>
+    <p:sldId id="263" r:id="rId11"/>
+    <p:sldId id="264" r:id="rId12"/>
   </p:sldIdLst>
   <p:sldSz cx="12192000" cy="6858000"/>
   <p:notesSz cx="6858000" cy="9144000"/>
@@ -122,7 +123,7 @@
 <file path=ppt/revisionInfo.xml><?xml version="1.0" encoding="utf-8"?>
 <p1510:revInfo xmlns:a="http://schemas.openxmlformats.org/drawingml/2006/main" xmlns:r="http://schemas.openxmlformats.org/officeDocument/2006/relationships" xmlns:p1510="http://schemas.microsoft.com/office/powerpoint/2015/10/main">
   <p1510:revLst>
-    <p1510:client id="{03A36A31-AF41-4E06-9416-300A8E994CF9}" v="67" dt="2026-06-22T23:32:51.015"/>
+    <p1510:client id="{03A36A31-AF41-4E06-9416-300A8E994CF9}" v="70" dt="2026-06-22T23:48:37.961"/>
   </p1510:revLst>
 </p1510:revInfo>
 </file>
@@ -132,7 +133,7 @@
   <pc:docChgLst>
     <pc:chgData name="Huber Leon" userId="be83c947-4ae9-4fa9-80b3-c723d02a087b" providerId="ADAL" clId="{3372AF06-5843-43D2-954F-808DC0B168C3}"/>
     <pc:docChg chg="undo redo custSel addSld delSld modSld sldOrd addMainMaster delMainMaster">
-      <pc:chgData name="Huber Leon" userId="be83c947-4ae9-4fa9-80b3-c723d02a087b" providerId="ADAL" clId="{3372AF06-5843-43D2-954F-808DC0B168C3}" dt="2026-06-22T23:33:05.075" v="4009" actId="732"/>
+      <pc:chgData name="Huber Leon" userId="be83c947-4ae9-4fa9-80b3-c723d02a087b" providerId="ADAL" clId="{3372AF06-5843-43D2-954F-808DC0B168C3}" dt="2026-06-23T00:06:32.413" v="4065" actId="478"/>
       <pc:docMkLst>
         <pc:docMk/>
       </pc:docMkLst>
@@ -990,7 +991,7 @@
         </pc:picChg>
       </pc:sldChg>
       <pc:sldChg chg="addSp delSp modSp add mod modTransition modNotesTx">
-        <pc:chgData name="Huber Leon" userId="be83c947-4ae9-4fa9-80b3-c723d02a087b" providerId="ADAL" clId="{3372AF06-5843-43D2-954F-808DC0B168C3}" dt="2026-06-22T21:05:45.226" v="2545" actId="14826"/>
+        <pc:chgData name="Huber Leon" userId="be83c947-4ae9-4fa9-80b3-c723d02a087b" providerId="ADAL" clId="{3372AF06-5843-43D2-954F-808DC0B168C3}" dt="2026-06-23T00:03:26.415" v="4058" actId="478"/>
         <pc:sldMkLst>
           <pc:docMk/>
           <pc:sldMk cId="3796974777" sldId="262"/>
@@ -1011,6 +1012,14 @@
             <ac:spMk id="4" creationId="{B25B6028-A585-3C7C-E2D0-9C3E3B658646}"/>
           </ac:spMkLst>
         </pc:spChg>
+        <pc:picChg chg="add del mod">
+          <ac:chgData name="Huber Leon" userId="be83c947-4ae9-4fa9-80b3-c723d02a087b" providerId="ADAL" clId="{3372AF06-5843-43D2-954F-808DC0B168C3}" dt="2026-06-23T00:03:26.415" v="4058" actId="478"/>
+          <ac:picMkLst>
+            <pc:docMk/>
+            <pc:sldMk cId="3796974777" sldId="262"/>
+            <ac:picMk id="6" creationId="{05281EFC-7BE2-6725-CE97-CCB620BB38A2}"/>
+          </ac:picMkLst>
+        </pc:picChg>
         <pc:picChg chg="mod">
           <ac:chgData name="Huber Leon" userId="be83c947-4ae9-4fa9-80b3-c723d02a087b" providerId="ADAL" clId="{3372AF06-5843-43D2-954F-808DC0B168C3}" dt="2026-06-22T21:05:45.226" v="2545" actId="14826"/>
           <ac:picMkLst>
@@ -1169,13 +1178,13 @@
         </pc:picChg>
       </pc:sldChg>
       <pc:sldChg chg="addSp delSp modSp add mod setBg delAnim delDesignElem modNotesTx">
-        <pc:chgData name="Huber Leon" userId="be83c947-4ae9-4fa9-80b3-c723d02a087b" providerId="ADAL" clId="{3372AF06-5843-43D2-954F-808DC0B168C3}" dt="2026-06-22T23:32:57.201" v="4008" actId="20577"/>
+        <pc:chgData name="Huber Leon" userId="be83c947-4ae9-4fa9-80b3-c723d02a087b" providerId="ADAL" clId="{3372AF06-5843-43D2-954F-808DC0B168C3}" dt="2026-06-22T23:49:10.368" v="4053" actId="113"/>
         <pc:sldMkLst>
           <pc:docMk/>
           <pc:sldMk cId="3040855508" sldId="266"/>
         </pc:sldMkLst>
         <pc:spChg chg="mod">
-          <ac:chgData name="Huber Leon" userId="be83c947-4ae9-4fa9-80b3-c723d02a087b" providerId="ADAL" clId="{3372AF06-5843-43D2-954F-808DC0B168C3}" dt="2026-06-22T23:25:02.985" v="3322" actId="20577"/>
+          <ac:chgData name="Huber Leon" userId="be83c947-4ae9-4fa9-80b3-c723d02a087b" providerId="ADAL" clId="{3372AF06-5843-43D2-954F-808DC0B168C3}" dt="2026-06-22T23:48:29.194" v="4033" actId="403"/>
           <ac:spMkLst>
             <pc:docMk/>
             <pc:sldMk cId="3040855508" sldId="266"/>
@@ -1183,11 +1192,75 @@
           </ac:spMkLst>
         </pc:spChg>
         <pc:spChg chg="add del mod">
-          <ac:chgData name="Huber Leon" userId="be83c947-4ae9-4fa9-80b3-c723d02a087b" providerId="ADAL" clId="{3372AF06-5843-43D2-954F-808DC0B168C3}" dt="2026-06-22T23:32:57.201" v="4008" actId="20577"/>
+          <ac:chgData name="Huber Leon" userId="be83c947-4ae9-4fa9-80b3-c723d02a087b" providerId="ADAL" clId="{3372AF06-5843-43D2-954F-808DC0B168C3}" dt="2026-06-22T23:48:00.209" v="4023" actId="26606"/>
           <ac:spMkLst>
             <pc:docMk/>
             <pc:sldMk cId="3040855508" sldId="266"/>
             <ac:spMk id="4" creationId="{3FF8607D-81FB-3495-9CC3-CAA5B05571EB}"/>
+          </ac:spMkLst>
+        </pc:spChg>
+        <pc:spChg chg="add del">
+          <ac:chgData name="Huber Leon" userId="be83c947-4ae9-4fa9-80b3-c723d02a087b" providerId="ADAL" clId="{3372AF06-5843-43D2-954F-808DC0B168C3}" dt="2026-06-22T23:47:55.113" v="4012" actId="26606"/>
+          <ac:spMkLst>
+            <pc:docMk/>
+            <pc:sldMk cId="3040855508" sldId="266"/>
+            <ac:spMk id="10" creationId="{60B7752B-728D-4CA3-8923-C4F7F77029E3}"/>
+          </ac:spMkLst>
+        </pc:spChg>
+        <pc:spChg chg="add del">
+          <ac:chgData name="Huber Leon" userId="be83c947-4ae9-4fa9-80b3-c723d02a087b" providerId="ADAL" clId="{3372AF06-5843-43D2-954F-808DC0B168C3}" dt="2026-06-22T23:47:55.113" v="4012" actId="26606"/>
+          <ac:spMkLst>
+            <pc:docMk/>
+            <pc:sldMk cId="3040855508" sldId="266"/>
+            <ac:spMk id="12" creationId="{429899A3-416E-4DB5-846D-023526052013}"/>
+          </ac:spMkLst>
+        </pc:spChg>
+        <pc:spChg chg="add del">
+          <ac:chgData name="Huber Leon" userId="be83c947-4ae9-4fa9-80b3-c723d02a087b" providerId="ADAL" clId="{3372AF06-5843-43D2-954F-808DC0B168C3}" dt="2026-06-22T23:47:55.710" v="4014" actId="26606"/>
+          <ac:spMkLst>
+            <pc:docMk/>
+            <pc:sldMk cId="3040855508" sldId="266"/>
+            <ac:spMk id="14" creationId="{60B7752B-728D-4CA3-8923-C4F7F77029E3}"/>
+          </ac:spMkLst>
+        </pc:spChg>
+        <pc:spChg chg="add del">
+          <ac:chgData name="Huber Leon" userId="be83c947-4ae9-4fa9-80b3-c723d02a087b" providerId="ADAL" clId="{3372AF06-5843-43D2-954F-808DC0B168C3}" dt="2026-06-22T23:47:55.710" v="4014" actId="26606"/>
+          <ac:spMkLst>
+            <pc:docMk/>
+            <pc:sldMk cId="3040855508" sldId="266"/>
+            <ac:spMk id="15" creationId="{429899A3-416E-4DB5-846D-023526052013}"/>
+          </ac:spMkLst>
+        </pc:spChg>
+        <pc:spChg chg="add del">
+          <ac:chgData name="Huber Leon" userId="be83c947-4ae9-4fa9-80b3-c723d02a087b" providerId="ADAL" clId="{3372AF06-5843-43D2-954F-808DC0B168C3}" dt="2026-06-22T23:47:57.507" v="4016" actId="26606"/>
+          <ac:spMkLst>
+            <pc:docMk/>
+            <pc:sldMk cId="3040855508" sldId="266"/>
+            <ac:spMk id="18" creationId="{60B7752B-728D-4CA3-8923-C4F7F77029E3}"/>
+          </ac:spMkLst>
+        </pc:spChg>
+        <pc:spChg chg="add del">
+          <ac:chgData name="Huber Leon" userId="be83c947-4ae9-4fa9-80b3-c723d02a087b" providerId="ADAL" clId="{3372AF06-5843-43D2-954F-808DC0B168C3}" dt="2026-06-22T23:47:57.507" v="4016" actId="26606"/>
+          <ac:spMkLst>
+            <pc:docMk/>
+            <pc:sldMk cId="3040855508" sldId="266"/>
+            <ac:spMk id="19" creationId="{88392DC7-0988-443B-A0D0-E726C7DB622B}"/>
+          </ac:spMkLst>
+        </pc:spChg>
+        <pc:spChg chg="add del">
+          <ac:chgData name="Huber Leon" userId="be83c947-4ae9-4fa9-80b3-c723d02a087b" providerId="ADAL" clId="{3372AF06-5843-43D2-954F-808DC0B168C3}" dt="2026-06-22T23:47:57.941" v="4018" actId="26606"/>
+          <ac:spMkLst>
+            <pc:docMk/>
+            <pc:sldMk cId="3040855508" sldId="266"/>
+            <ac:spMk id="22" creationId="{60B7752B-728D-4CA3-8923-C4F7F77029E3}"/>
+          </ac:spMkLst>
+        </pc:spChg>
+        <pc:spChg chg="add del">
+          <ac:chgData name="Huber Leon" userId="be83c947-4ae9-4fa9-80b3-c723d02a087b" providerId="ADAL" clId="{3372AF06-5843-43D2-954F-808DC0B168C3}" dt="2026-06-22T23:47:57.941" v="4018" actId="26606"/>
+          <ac:spMkLst>
+            <pc:docMk/>
+            <pc:sldMk cId="3040855508" sldId="266"/>
+            <ac:spMk id="23" creationId="{88392DC7-0988-443B-A0D0-E726C7DB622B}"/>
           </ac:spMkLst>
         </pc:spChg>
         <pc:spChg chg="del">
@@ -1206,12 +1279,148 @@
             <ac:spMk id="25" creationId="{36BF67FD-6D79-F8DE-3E85-F9CE0FBACB46}"/>
           </ac:spMkLst>
         </pc:spChg>
+        <pc:spChg chg="add del">
+          <ac:chgData name="Huber Leon" userId="be83c947-4ae9-4fa9-80b3-c723d02a087b" providerId="ADAL" clId="{3372AF06-5843-43D2-954F-808DC0B168C3}" dt="2026-06-22T23:47:59.112" v="4020" actId="26606"/>
+          <ac:spMkLst>
+            <pc:docMk/>
+            <pc:sldMk cId="3040855508" sldId="266"/>
+            <ac:spMk id="29" creationId="{60B7752B-728D-4CA3-8923-C4F7F77029E3}"/>
+          </ac:spMkLst>
+        </pc:spChg>
+        <pc:spChg chg="add del">
+          <ac:chgData name="Huber Leon" userId="be83c947-4ae9-4fa9-80b3-c723d02a087b" providerId="ADAL" clId="{3372AF06-5843-43D2-954F-808DC0B168C3}" dt="2026-06-22T23:47:59.112" v="4020" actId="26606"/>
+          <ac:spMkLst>
+            <pc:docMk/>
+            <pc:sldMk cId="3040855508" sldId="266"/>
+            <ac:spMk id="30" creationId="{429899A3-416E-4DB5-846D-023526052013}"/>
+          </ac:spMkLst>
+        </pc:spChg>
+        <pc:spChg chg="add del">
+          <ac:chgData name="Huber Leon" userId="be83c947-4ae9-4fa9-80b3-c723d02a087b" providerId="ADAL" clId="{3372AF06-5843-43D2-954F-808DC0B168C3}" dt="2026-06-22T23:48:00.195" v="4022" actId="26606"/>
+          <ac:spMkLst>
+            <pc:docMk/>
+            <pc:sldMk cId="3040855508" sldId="266"/>
+            <ac:spMk id="33" creationId="{60B7752B-728D-4CA3-8923-C4F7F77029E3}"/>
+          </ac:spMkLst>
+        </pc:spChg>
+        <pc:spChg chg="add del">
+          <ac:chgData name="Huber Leon" userId="be83c947-4ae9-4fa9-80b3-c723d02a087b" providerId="ADAL" clId="{3372AF06-5843-43D2-954F-808DC0B168C3}" dt="2026-06-22T23:48:00.195" v="4022" actId="26606"/>
+          <ac:spMkLst>
+            <pc:docMk/>
+            <pc:sldMk cId="3040855508" sldId="266"/>
+            <ac:spMk id="34" creationId="{429899A3-416E-4DB5-846D-023526052013}"/>
+          </ac:spMkLst>
+        </pc:spChg>
+        <pc:spChg chg="add">
+          <ac:chgData name="Huber Leon" userId="be83c947-4ae9-4fa9-80b3-c723d02a087b" providerId="ADAL" clId="{3372AF06-5843-43D2-954F-808DC0B168C3}" dt="2026-06-22T23:48:00.209" v="4023" actId="26606"/>
+          <ac:spMkLst>
+            <pc:docMk/>
+            <pc:sldMk cId="3040855508" sldId="266"/>
+            <ac:spMk id="37" creationId="{60B7752B-728D-4CA3-8923-C4F7F77029E3}"/>
+          </ac:spMkLst>
+        </pc:spChg>
+        <pc:spChg chg="add">
+          <ac:chgData name="Huber Leon" userId="be83c947-4ae9-4fa9-80b3-c723d02a087b" providerId="ADAL" clId="{3372AF06-5843-43D2-954F-808DC0B168C3}" dt="2026-06-22T23:48:00.209" v="4023" actId="26606"/>
+          <ac:spMkLst>
+            <pc:docMk/>
+            <pc:sldMk cId="3040855508" sldId="266"/>
+            <ac:spMk id="40" creationId="{52D58DC7-20C8-4471-BAA7-B296A2AEC3F6}"/>
+          </ac:spMkLst>
+        </pc:spChg>
+        <pc:spChg chg="add">
+          <ac:chgData name="Huber Leon" userId="be83c947-4ae9-4fa9-80b3-c723d02a087b" providerId="ADAL" clId="{3372AF06-5843-43D2-954F-808DC0B168C3}" dt="2026-06-22T23:48:00.209" v="4023" actId="26606"/>
+          <ac:spMkLst>
+            <pc:docMk/>
+            <pc:sldMk cId="3040855508" sldId="266"/>
+            <ac:spMk id="41" creationId="{8E4AABAC-100B-437F-86D3-981412859411}"/>
+          </ac:spMkLst>
+        </pc:spChg>
+        <pc:spChg chg="add">
+          <ac:chgData name="Huber Leon" userId="be83c947-4ae9-4fa9-80b3-c723d02a087b" providerId="ADAL" clId="{3372AF06-5843-43D2-954F-808DC0B168C3}" dt="2026-06-22T23:48:00.209" v="4023" actId="26606"/>
+          <ac:spMkLst>
+            <pc:docMk/>
+            <pc:sldMk cId="3040855508" sldId="266"/>
+            <ac:spMk id="42" creationId="{1DFD33E0-4D46-4176-BAE2-6AED15231C59}"/>
+          </ac:spMkLst>
+        </pc:spChg>
+        <pc:spChg chg="add">
+          <ac:chgData name="Huber Leon" userId="be83c947-4ae9-4fa9-80b3-c723d02a087b" providerId="ADAL" clId="{3372AF06-5843-43D2-954F-808DC0B168C3}" dt="2026-06-22T23:48:00.209" v="4023" actId="26606"/>
+          <ac:spMkLst>
+            <pc:docMk/>
+            <pc:sldMk cId="3040855508" sldId="266"/>
+            <ac:spMk id="43" creationId="{022B5D87-7689-4E7F-B03A-7F803B5DF799}"/>
+          </ac:spMkLst>
+        </pc:spChg>
+        <pc:grpChg chg="add">
+          <ac:chgData name="Huber Leon" userId="be83c947-4ae9-4fa9-80b3-c723d02a087b" providerId="ADAL" clId="{3372AF06-5843-43D2-954F-808DC0B168C3}" dt="2026-06-22T23:48:00.209" v="4023" actId="26606"/>
+          <ac:grpSpMkLst>
+            <pc:docMk/>
+            <pc:sldMk cId="3040855508" sldId="266"/>
+            <ac:grpSpMk id="38" creationId="{20205E53-D75C-4F15-A4A3-21DA0826FCE9}"/>
+          </ac:grpSpMkLst>
+        </pc:grpChg>
+        <pc:graphicFrameChg chg="add del">
+          <ac:chgData name="Huber Leon" userId="be83c947-4ae9-4fa9-80b3-c723d02a087b" providerId="ADAL" clId="{3372AF06-5843-43D2-954F-808DC0B168C3}" dt="2026-06-22T23:47:55.113" v="4012" actId="26606"/>
+          <ac:graphicFrameMkLst>
+            <pc:docMk/>
+            <pc:sldMk cId="3040855508" sldId="266"/>
+            <ac:graphicFrameMk id="6" creationId="{4F5618F6-808A-C763-7633-D9FEB50E0182}"/>
+          </ac:graphicFrameMkLst>
+        </pc:graphicFrameChg>
+        <pc:graphicFrameChg chg="add del">
+          <ac:chgData name="Huber Leon" userId="be83c947-4ae9-4fa9-80b3-c723d02a087b" providerId="ADAL" clId="{3372AF06-5843-43D2-954F-808DC0B168C3}" dt="2026-06-22T23:47:55.710" v="4014" actId="26606"/>
+          <ac:graphicFrameMkLst>
+            <pc:docMk/>
+            <pc:sldMk cId="3040855508" sldId="266"/>
+            <ac:graphicFrameMk id="16" creationId="{63BFDADE-47C0-C9ED-BF7F-827827C67334}"/>
+          </ac:graphicFrameMkLst>
+        </pc:graphicFrameChg>
+        <pc:graphicFrameChg chg="add del">
+          <ac:chgData name="Huber Leon" userId="be83c947-4ae9-4fa9-80b3-c723d02a087b" providerId="ADAL" clId="{3372AF06-5843-43D2-954F-808DC0B168C3}" dt="2026-06-22T23:47:57.507" v="4016" actId="26606"/>
+          <ac:graphicFrameMkLst>
+            <pc:docMk/>
+            <pc:sldMk cId="3040855508" sldId="266"/>
+            <ac:graphicFrameMk id="20" creationId="{FC975111-FB74-2D2E-403D-8F071AAA1184}"/>
+          </ac:graphicFrameMkLst>
+        </pc:graphicFrameChg>
         <pc:graphicFrameChg chg="del">
           <ac:chgData name="Huber Leon" userId="be83c947-4ae9-4fa9-80b3-c723d02a087b" providerId="ADAL" clId="{3372AF06-5843-43D2-954F-808DC0B168C3}" dt="2026-06-22T23:25:04.406" v="3323" actId="478"/>
           <ac:graphicFrameMkLst>
             <pc:docMk/>
             <pc:sldMk cId="3040855508" sldId="266"/>
             <ac:graphicFrameMk id="26" creationId="{C204AD5D-DCDF-A8B6-D9B3-E6ABD057177C}"/>
+          </ac:graphicFrameMkLst>
+        </pc:graphicFrameChg>
+        <pc:graphicFrameChg chg="add del">
+          <ac:chgData name="Huber Leon" userId="be83c947-4ae9-4fa9-80b3-c723d02a087b" providerId="ADAL" clId="{3372AF06-5843-43D2-954F-808DC0B168C3}" dt="2026-06-22T23:47:57.941" v="4018" actId="26606"/>
+          <ac:graphicFrameMkLst>
+            <pc:docMk/>
+            <pc:sldMk cId="3040855508" sldId="266"/>
+            <ac:graphicFrameMk id="27" creationId="{C85CEFCE-033A-0E6F-49A9-D78810B0B463}"/>
+          </ac:graphicFrameMkLst>
+        </pc:graphicFrameChg>
+        <pc:graphicFrameChg chg="add del">
+          <ac:chgData name="Huber Leon" userId="be83c947-4ae9-4fa9-80b3-c723d02a087b" providerId="ADAL" clId="{3372AF06-5843-43D2-954F-808DC0B168C3}" dt="2026-06-22T23:47:59.112" v="4020" actId="26606"/>
+          <ac:graphicFrameMkLst>
+            <pc:docMk/>
+            <pc:sldMk cId="3040855508" sldId="266"/>
+            <ac:graphicFrameMk id="31" creationId="{63BFDADE-47C0-C9ED-BF7F-827827C67334}"/>
+          </ac:graphicFrameMkLst>
+        </pc:graphicFrameChg>
+        <pc:graphicFrameChg chg="add del">
+          <ac:chgData name="Huber Leon" userId="be83c947-4ae9-4fa9-80b3-c723d02a087b" providerId="ADAL" clId="{3372AF06-5843-43D2-954F-808DC0B168C3}" dt="2026-06-22T23:48:00.195" v="4022" actId="26606"/>
+          <ac:graphicFrameMkLst>
+            <pc:docMk/>
+            <pc:sldMk cId="3040855508" sldId="266"/>
+            <ac:graphicFrameMk id="35" creationId="{4F5618F6-808A-C763-7633-D9FEB50E0182}"/>
+          </ac:graphicFrameMkLst>
+        </pc:graphicFrameChg>
+        <pc:graphicFrameChg chg="add modGraphic">
+          <ac:chgData name="Huber Leon" userId="be83c947-4ae9-4fa9-80b3-c723d02a087b" providerId="ADAL" clId="{3372AF06-5843-43D2-954F-808DC0B168C3}" dt="2026-06-22T23:48:23.833" v="4031" actId="20577"/>
+          <ac:graphicFrameMkLst>
+            <pc:docMk/>
+            <pc:sldMk cId="3040855508" sldId="266"/>
+            <ac:graphicFrameMk id="44" creationId="{3F355FAA-1B27-3F6B-6CC6-309A84DB2FE7}"/>
           </ac:graphicFrameMkLst>
         </pc:graphicFrameChg>
         <pc:picChg chg="add del mod ord">
@@ -1228,6 +1437,29 @@
             <pc:docMk/>
             <pc:sldMk cId="3040855508" sldId="266"/>
             <ac:picMk id="36" creationId="{33FDAC05-A1EF-915A-8BE2-5BCFB99B4484}"/>
+          </ac:picMkLst>
+        </pc:picChg>
+      </pc:sldChg>
+      <pc:sldChg chg="addSp delSp modSp add mod ord modNotesTx">
+        <pc:chgData name="Huber Leon" userId="be83c947-4ae9-4fa9-80b3-c723d02a087b" providerId="ADAL" clId="{3372AF06-5843-43D2-954F-808DC0B168C3}" dt="2026-06-23T00:06:32.413" v="4065" actId="478"/>
+        <pc:sldMkLst>
+          <pc:docMk/>
+          <pc:sldMk cId="3340542771" sldId="267"/>
+        </pc:sldMkLst>
+        <pc:spChg chg="add mod">
+          <ac:chgData name="Huber Leon" userId="be83c947-4ae9-4fa9-80b3-c723d02a087b" providerId="ADAL" clId="{3372AF06-5843-43D2-954F-808DC0B168C3}" dt="2026-06-23T00:06:32.413" v="4065" actId="478"/>
+          <ac:spMkLst>
+            <pc:docMk/>
+            <pc:sldMk cId="3340542771" sldId="267"/>
+            <ac:spMk id="4" creationId="{1CC5B2BC-57FF-C5D1-C016-91AB7359AB7A}"/>
+          </ac:spMkLst>
+        </pc:spChg>
+        <pc:picChg chg="del mod">
+          <ac:chgData name="Huber Leon" userId="be83c947-4ae9-4fa9-80b3-c723d02a087b" providerId="ADAL" clId="{3372AF06-5843-43D2-954F-808DC0B168C3}" dt="2026-06-23T00:06:32.413" v="4065" actId="478"/>
+          <ac:picMkLst>
+            <pc:docMk/>
+            <pc:sldMk cId="3340542771" sldId="267"/>
+            <ac:picMk id="9" creationId="{E3E83198-FFBE-503D-005D-AE4AD4E04E21}"/>
           </ac:picMkLst>
         </pc:picChg>
       </pc:sldChg>
@@ -3012,6 +3244,925 @@
 </dgm:colorsDef>
 </file>
 
+<file path=ppt/diagrams/colors2.xml><?xml version="1.0" encoding="utf-8"?>
+<dgm:colorsDef xmlns:dgm="http://schemas.openxmlformats.org/drawingml/2006/diagram" xmlns:a="http://schemas.openxmlformats.org/drawingml/2006/main" uniqueId="urn:microsoft.com/office/officeart/2005/8/colors/colorful1">
+  <dgm:title val=""/>
+  <dgm:desc val=""/>
+  <dgm:catLst>
+    <dgm:cat type="colorful" pri="10100"/>
+  </dgm:catLst>
+  <dgm:styleLbl name="node0">
+    <dgm:fillClrLst meth="repeat">
+      <a:schemeClr val="accent1"/>
+    </dgm:fillClrLst>
+    <dgm:linClrLst meth="repeat">
+      <a:schemeClr val="lt1"/>
+    </dgm:linClrLst>
+    <dgm:effectClrLst/>
+    <dgm:txLinClrLst/>
+    <dgm:txFillClrLst/>
+    <dgm:txEffectClrLst/>
+  </dgm:styleLbl>
+  <dgm:styleLbl name="node1">
+    <dgm:fillClrLst meth="repeat">
+      <a:schemeClr val="accent2"/>
+      <a:schemeClr val="accent3"/>
+      <a:schemeClr val="accent4"/>
+      <a:schemeClr val="accent5"/>
+      <a:schemeClr val="accent6"/>
+    </dgm:fillClrLst>
+    <dgm:linClrLst meth="repeat">
+      <a:schemeClr val="lt1"/>
+    </dgm:linClrLst>
+    <dgm:effectClrLst/>
+    <dgm:txLinClrLst/>
+    <dgm:txFillClrLst/>
+    <dgm:txEffectClrLst/>
+  </dgm:styleLbl>
+  <dgm:styleLbl name="alignNode1">
+    <dgm:fillClrLst meth="repeat">
+      <a:schemeClr val="accent2"/>
+      <a:schemeClr val="accent3"/>
+      <a:schemeClr val="accent4"/>
+      <a:schemeClr val="accent5"/>
+      <a:schemeClr val="accent6"/>
+    </dgm:fillClrLst>
+    <dgm:linClrLst meth="repeat">
+      <a:schemeClr val="accent2"/>
+      <a:schemeClr val="accent3"/>
+      <a:schemeClr val="accent4"/>
+      <a:schemeClr val="accent5"/>
+      <a:schemeClr val="accent6"/>
+    </dgm:linClrLst>
+    <dgm:effectClrLst/>
+    <dgm:txLinClrLst/>
+    <dgm:txFillClrLst/>
+    <dgm:txEffectClrLst/>
+  </dgm:styleLbl>
+  <dgm:styleLbl name="lnNode1">
+    <dgm:fillClrLst meth="repeat">
+      <a:schemeClr val="accent2"/>
+      <a:schemeClr val="accent3"/>
+      <a:schemeClr val="accent4"/>
+      <a:schemeClr val="accent5"/>
+      <a:schemeClr val="accent6"/>
+    </dgm:fillClrLst>
+    <dgm:linClrLst meth="repeat">
+      <a:schemeClr val="lt1"/>
+    </dgm:linClrLst>
+    <dgm:effectClrLst/>
+    <dgm:txLinClrLst/>
+    <dgm:txFillClrLst/>
+    <dgm:txEffectClrLst/>
+  </dgm:styleLbl>
+  <dgm:styleLbl name="vennNode1">
+    <dgm:fillClrLst meth="repeat">
+      <a:schemeClr val="accent2">
+        <a:alpha val="50000"/>
+      </a:schemeClr>
+      <a:schemeClr val="accent3">
+        <a:alpha val="50000"/>
+      </a:schemeClr>
+      <a:schemeClr val="accent4">
+        <a:alpha val="50000"/>
+      </a:schemeClr>
+      <a:schemeClr val="accent5">
+        <a:alpha val="50000"/>
+      </a:schemeClr>
+      <a:schemeClr val="accent6">
+        <a:alpha val="50000"/>
+      </a:schemeClr>
+    </dgm:fillClrLst>
+    <dgm:linClrLst meth="repeat">
+      <a:schemeClr val="lt1"/>
+    </dgm:linClrLst>
+    <dgm:effectClrLst/>
+    <dgm:txLinClrLst/>
+    <dgm:txFillClrLst/>
+    <dgm:txEffectClrLst/>
+  </dgm:styleLbl>
+  <dgm:styleLbl name="node2">
+    <dgm:fillClrLst>
+      <a:schemeClr val="accent2"/>
+    </dgm:fillClrLst>
+    <dgm:linClrLst meth="repeat">
+      <a:schemeClr val="lt1"/>
+    </dgm:linClrLst>
+    <dgm:effectClrLst/>
+    <dgm:txLinClrLst/>
+    <dgm:txFillClrLst/>
+    <dgm:txEffectClrLst/>
+  </dgm:styleLbl>
+  <dgm:styleLbl name="node3">
+    <dgm:fillClrLst>
+      <a:schemeClr val="accent3"/>
+    </dgm:fillClrLst>
+    <dgm:linClrLst meth="repeat">
+      <a:schemeClr val="lt1"/>
+    </dgm:linClrLst>
+    <dgm:effectClrLst/>
+    <dgm:txLinClrLst/>
+    <dgm:txFillClrLst/>
+    <dgm:txEffectClrLst/>
+  </dgm:styleLbl>
+  <dgm:styleLbl name="node4">
+    <dgm:fillClrLst>
+      <a:schemeClr val="accent4"/>
+    </dgm:fillClrLst>
+    <dgm:linClrLst meth="repeat">
+      <a:schemeClr val="lt1"/>
+    </dgm:linClrLst>
+    <dgm:effectClrLst/>
+    <dgm:txLinClrLst/>
+    <dgm:txFillClrLst/>
+    <dgm:txEffectClrLst/>
+  </dgm:styleLbl>
+  <dgm:styleLbl name="fgImgPlace1">
+    <dgm:fillClrLst meth="repeat">
+      <a:schemeClr val="accent2">
+        <a:tint val="50000"/>
+      </a:schemeClr>
+      <a:schemeClr val="accent3">
+        <a:tint val="50000"/>
+      </a:schemeClr>
+      <a:schemeClr val="accent4">
+        <a:tint val="50000"/>
+      </a:schemeClr>
+      <a:schemeClr val="accent5">
+        <a:tint val="50000"/>
+      </a:schemeClr>
+      <a:schemeClr val="accent6">
+        <a:tint val="50000"/>
+      </a:schemeClr>
+    </dgm:fillClrLst>
+    <dgm:linClrLst meth="repeat">
+      <a:schemeClr val="lt1"/>
+    </dgm:linClrLst>
+    <dgm:effectClrLst/>
+    <dgm:txLinClrLst/>
+    <dgm:txFillClrLst meth="repeat">
+      <a:schemeClr val="lt1"/>
+    </dgm:txFillClrLst>
+    <dgm:txEffectClrLst/>
+  </dgm:styleLbl>
+  <dgm:styleLbl name="alignImgPlace1">
+    <dgm:fillClrLst>
+      <a:schemeClr val="accent1">
+        <a:tint val="50000"/>
+      </a:schemeClr>
+      <a:schemeClr val="accent2">
+        <a:tint val="20000"/>
+      </a:schemeClr>
+    </dgm:fillClrLst>
+    <dgm:linClrLst meth="repeat">
+      <a:schemeClr val="lt1"/>
+    </dgm:linClrLst>
+    <dgm:effectClrLst/>
+    <dgm:txLinClrLst/>
+    <dgm:txFillClrLst meth="repeat">
+      <a:schemeClr val="lt1"/>
+    </dgm:txFillClrLst>
+    <dgm:txEffectClrLst/>
+  </dgm:styleLbl>
+  <dgm:styleLbl name="bgImgPlace1">
+    <dgm:fillClrLst>
+      <a:schemeClr val="accent1">
+        <a:tint val="50000"/>
+      </a:schemeClr>
+      <a:schemeClr val="accent2">
+        <a:tint val="20000"/>
+      </a:schemeClr>
+    </dgm:fillClrLst>
+    <dgm:linClrLst meth="repeat">
+      <a:schemeClr val="lt1"/>
+    </dgm:linClrLst>
+    <dgm:effectClrLst/>
+    <dgm:txLinClrLst/>
+    <dgm:txFillClrLst meth="repeat">
+      <a:schemeClr val="lt1"/>
+    </dgm:txFillClrLst>
+    <dgm:txEffectClrLst/>
+  </dgm:styleLbl>
+  <dgm:styleLbl name="sibTrans2D1">
+    <dgm:fillClrLst meth="repeat">
+      <a:schemeClr val="accent2"/>
+      <a:schemeClr val="accent3"/>
+      <a:schemeClr val="accent4"/>
+      <a:schemeClr val="accent5"/>
+      <a:schemeClr val="accent6"/>
+    </dgm:fillClrLst>
+    <dgm:linClrLst meth="cycle">
+      <a:schemeClr val="lt1"/>
+    </dgm:linClrLst>
+    <dgm:effectClrLst/>
+    <dgm:txLinClrLst/>
+    <dgm:txFillClrLst/>
+    <dgm:txEffectClrLst/>
+  </dgm:styleLbl>
+  <dgm:styleLbl name="fgSibTrans2D1">
+    <dgm:fillClrLst meth="repeat">
+      <a:schemeClr val="accent2"/>
+      <a:schemeClr val="accent3"/>
+      <a:schemeClr val="accent4"/>
+      <a:schemeClr val="accent5"/>
+      <a:schemeClr val="accent6"/>
+    </dgm:fillClrLst>
+    <dgm:linClrLst meth="cycle">
+      <a:schemeClr val="lt1"/>
+    </dgm:linClrLst>
+    <dgm:effectClrLst/>
+    <dgm:txLinClrLst/>
+    <dgm:txFillClrLst meth="repeat">
+      <a:schemeClr val="lt1"/>
+    </dgm:txFillClrLst>
+    <dgm:txEffectClrLst/>
+  </dgm:styleLbl>
+  <dgm:styleLbl name="bgSibTrans2D1">
+    <dgm:fillClrLst meth="repeat">
+      <a:schemeClr val="accent2"/>
+      <a:schemeClr val="accent3"/>
+      <a:schemeClr val="accent4"/>
+      <a:schemeClr val="accent5"/>
+      <a:schemeClr val="accent6"/>
+    </dgm:fillClrLst>
+    <dgm:linClrLst meth="cycle">
+      <a:schemeClr val="lt1"/>
+    </dgm:linClrLst>
+    <dgm:effectClrLst/>
+    <dgm:txLinClrLst/>
+    <dgm:txFillClrLst meth="repeat">
+      <a:schemeClr val="lt1"/>
+    </dgm:txFillClrLst>
+    <dgm:txEffectClrLst/>
+  </dgm:styleLbl>
+  <dgm:styleLbl name="sibTrans1D1">
+    <dgm:fillClrLst meth="repeat">
+      <a:schemeClr val="accent2"/>
+      <a:schemeClr val="accent3"/>
+      <a:schemeClr val="accent4"/>
+      <a:schemeClr val="accent5"/>
+      <a:schemeClr val="accent6"/>
+    </dgm:fillClrLst>
+    <dgm:linClrLst meth="repeat">
+      <a:schemeClr val="accent2"/>
+      <a:schemeClr val="accent3"/>
+      <a:schemeClr val="accent4"/>
+      <a:schemeClr val="accent5"/>
+      <a:schemeClr val="accent6"/>
+    </dgm:linClrLst>
+    <dgm:effectClrLst/>
+    <dgm:txLinClrLst/>
+    <dgm:txFillClrLst meth="repeat">
+      <a:schemeClr val="tx1"/>
+    </dgm:txFillClrLst>
+    <dgm:txEffectClrLst/>
+  </dgm:styleLbl>
+  <dgm:styleLbl name="callout">
+    <dgm:fillClrLst meth="repeat">
+      <a:schemeClr val="accent2"/>
+    </dgm:fillClrLst>
+    <dgm:linClrLst meth="repeat">
+      <a:schemeClr val="accent2">
+        <a:tint val="50000"/>
+      </a:schemeClr>
+    </dgm:linClrLst>
+    <dgm:effectClrLst/>
+    <dgm:txLinClrLst/>
+    <dgm:txFillClrLst meth="repeat">
+      <a:schemeClr val="tx1"/>
+    </dgm:txFillClrLst>
+    <dgm:txEffectClrLst/>
+  </dgm:styleLbl>
+  <dgm:styleLbl name="asst0">
+    <dgm:fillClrLst meth="repeat">
+      <a:schemeClr val="accent1"/>
+    </dgm:fillClrLst>
+    <dgm:linClrLst meth="repeat">
+      <a:schemeClr val="lt1"/>
+    </dgm:linClrLst>
+    <dgm:effectClrLst/>
+    <dgm:txLinClrLst/>
+    <dgm:txFillClrLst/>
+    <dgm:txEffectClrLst/>
+  </dgm:styleLbl>
+  <dgm:styleLbl name="asst1">
+    <dgm:fillClrLst meth="repeat">
+      <a:schemeClr val="accent2"/>
+    </dgm:fillClrLst>
+    <dgm:linClrLst meth="repeat">
+      <a:schemeClr val="lt1"/>
+    </dgm:linClrLst>
+    <dgm:effectClrLst/>
+    <dgm:txLinClrLst/>
+    <dgm:txFillClrLst/>
+    <dgm:txEffectClrLst/>
+  </dgm:styleLbl>
+  <dgm:styleLbl name="asst2">
+    <dgm:fillClrLst>
+      <a:schemeClr val="accent3"/>
+    </dgm:fillClrLst>
+    <dgm:linClrLst meth="repeat">
+      <a:schemeClr val="lt1"/>
+    </dgm:linClrLst>
+    <dgm:effectClrLst/>
+    <dgm:txLinClrLst/>
+    <dgm:txFillClrLst/>
+    <dgm:txEffectClrLst/>
+  </dgm:styleLbl>
+  <dgm:styleLbl name="asst3">
+    <dgm:fillClrLst>
+      <a:schemeClr val="accent4"/>
+    </dgm:fillClrLst>
+    <dgm:linClrLst meth="repeat">
+      <a:schemeClr val="lt1"/>
+    </dgm:linClrLst>
+    <dgm:effectClrLst/>
+    <dgm:txLinClrLst/>
+    <dgm:txFillClrLst/>
+    <dgm:txEffectClrLst/>
+  </dgm:styleLbl>
+  <dgm:styleLbl name="asst4">
+    <dgm:fillClrLst>
+      <a:schemeClr val="accent5"/>
+    </dgm:fillClrLst>
+    <dgm:linClrLst meth="repeat">
+      <a:schemeClr val="lt1"/>
+    </dgm:linClrLst>
+    <dgm:effectClrLst/>
+    <dgm:txLinClrLst/>
+    <dgm:txFillClrLst/>
+    <dgm:txEffectClrLst/>
+  </dgm:styleLbl>
+  <dgm:styleLbl name="parChTrans2D1">
+    <dgm:fillClrLst meth="repeat">
+      <a:schemeClr val="accent2"/>
+    </dgm:fillClrLst>
+    <dgm:linClrLst meth="repeat">
+      <a:schemeClr val="lt1"/>
+    </dgm:linClrLst>
+    <dgm:effectClrLst/>
+    <dgm:txLinClrLst/>
+    <dgm:txFillClrLst meth="repeat">
+      <a:schemeClr val="lt1"/>
+    </dgm:txFillClrLst>
+    <dgm:txEffectClrLst/>
+  </dgm:styleLbl>
+  <dgm:styleLbl name="parChTrans2D2">
+    <dgm:fillClrLst meth="repeat">
+      <a:schemeClr val="accent3"/>
+    </dgm:fillClrLst>
+    <dgm:linClrLst meth="repeat">
+      <a:schemeClr val="lt1"/>
+    </dgm:linClrLst>
+    <dgm:effectClrLst/>
+    <dgm:txLinClrLst/>
+    <dgm:txFillClrLst/>
+    <dgm:txEffectClrLst/>
+  </dgm:styleLbl>
+  <dgm:styleLbl name="parChTrans2D3">
+    <dgm:fillClrLst meth="repeat">
+      <a:schemeClr val="accent4"/>
+    </dgm:fillClrLst>
+    <dgm:linClrLst meth="repeat">
+      <a:schemeClr val="lt1"/>
+    </dgm:linClrLst>
+    <dgm:effectClrLst/>
+    <dgm:txLinClrLst/>
+    <dgm:txFillClrLst/>
+    <dgm:txEffectClrLst/>
+  </dgm:styleLbl>
+  <dgm:styleLbl name="parChTrans2D4">
+    <dgm:fillClrLst meth="repeat">
+      <a:schemeClr val="accent5"/>
+    </dgm:fillClrLst>
+    <dgm:linClrLst meth="repeat">
+      <a:schemeClr val="lt1"/>
+    </dgm:linClrLst>
+    <dgm:effectClrLst/>
+    <dgm:txLinClrLst/>
+    <dgm:txFillClrLst meth="repeat">
+      <a:schemeClr val="lt1"/>
+    </dgm:txFillClrLst>
+    <dgm:txEffectClrLst/>
+  </dgm:styleLbl>
+  <dgm:styleLbl name="parChTrans1D1">
+    <dgm:fillClrLst meth="repeat">
+      <a:schemeClr val="accent2"/>
+    </dgm:fillClrLst>
+    <dgm:linClrLst meth="repeat">
+      <a:schemeClr val="accent1"/>
+    </dgm:linClrLst>
+    <dgm:effectClrLst/>
+    <dgm:txLinClrLst/>
+    <dgm:txFillClrLst meth="repeat">
+      <a:schemeClr val="tx1"/>
+    </dgm:txFillClrLst>
+    <dgm:txEffectClrLst/>
+  </dgm:styleLbl>
+  <dgm:styleLbl name="parChTrans1D2">
+    <dgm:fillClrLst meth="repeat">
+      <a:schemeClr val="accent3">
+        <a:tint val="90000"/>
+      </a:schemeClr>
+    </dgm:fillClrLst>
+    <dgm:linClrLst meth="repeat">
+      <a:schemeClr val="accent2"/>
+    </dgm:linClrLst>
+    <dgm:effectClrLst/>
+    <dgm:txLinClrLst/>
+    <dgm:txFillClrLst meth="repeat">
+      <a:schemeClr val="tx1"/>
+    </dgm:txFillClrLst>
+    <dgm:txEffectClrLst/>
+  </dgm:styleLbl>
+  <dgm:styleLbl name="parChTrans1D3">
+    <dgm:fillClrLst meth="repeat">
+      <a:schemeClr val="accent4">
+        <a:tint val="70000"/>
+      </a:schemeClr>
+    </dgm:fillClrLst>
+    <dgm:linClrLst meth="repeat">
+      <a:schemeClr val="accent3"/>
+    </dgm:linClrLst>
+    <dgm:effectClrLst/>
+    <dgm:txLinClrLst/>
+    <dgm:txFillClrLst meth="repeat">
+      <a:schemeClr val="tx1"/>
+    </dgm:txFillClrLst>
+    <dgm:txEffectClrLst/>
+  </dgm:styleLbl>
+  <dgm:styleLbl name="parChTrans1D4">
+    <dgm:fillClrLst meth="repeat">
+      <a:schemeClr val="accent5">
+        <a:tint val="50000"/>
+      </a:schemeClr>
+    </dgm:fillClrLst>
+    <dgm:linClrLst meth="repeat">
+      <a:schemeClr val="accent4"/>
+    </dgm:linClrLst>
+    <dgm:effectClrLst/>
+    <dgm:txLinClrLst/>
+    <dgm:txFillClrLst meth="repeat">
+      <a:schemeClr val="tx1"/>
+    </dgm:txFillClrLst>
+    <dgm:txEffectClrLst/>
+  </dgm:styleLbl>
+  <dgm:styleLbl name="fgAcc1">
+    <dgm:fillClrLst meth="repeat">
+      <a:schemeClr val="lt1">
+        <a:alpha val="90000"/>
+      </a:schemeClr>
+    </dgm:fillClrLst>
+    <dgm:linClrLst meth="repeat">
+      <a:schemeClr val="accent2"/>
+      <a:schemeClr val="accent3"/>
+      <a:schemeClr val="accent4"/>
+      <a:schemeClr val="accent5"/>
+      <a:schemeClr val="accent6"/>
+    </dgm:linClrLst>
+    <dgm:effectClrLst/>
+    <dgm:txLinClrLst/>
+    <dgm:txFillClrLst meth="repeat">
+      <a:schemeClr val="dk1"/>
+    </dgm:txFillClrLst>
+    <dgm:txEffectClrLst/>
+  </dgm:styleLbl>
+  <dgm:styleLbl name="conFgAcc1">
+    <dgm:fillClrLst meth="repeat">
+      <a:schemeClr val="lt1">
+        <a:alpha val="90000"/>
+      </a:schemeClr>
+    </dgm:fillClrLst>
+    <dgm:linClrLst meth="repeat">
+      <a:schemeClr val="accent2"/>
+      <a:schemeClr val="accent3"/>
+      <a:schemeClr val="accent4"/>
+      <a:schemeClr val="accent5"/>
+      <a:schemeClr val="accent6"/>
+    </dgm:linClrLst>
+    <dgm:effectClrLst/>
+    <dgm:txLinClrLst/>
+    <dgm:txFillClrLst meth="repeat">
+      <a:schemeClr val="dk1"/>
+    </dgm:txFillClrLst>
+    <dgm:txEffectClrLst/>
+  </dgm:styleLbl>
+  <dgm:styleLbl name="alignAcc1">
+    <dgm:fillClrLst meth="repeat">
+      <a:schemeClr val="lt1">
+        <a:alpha val="90000"/>
+      </a:schemeClr>
+    </dgm:fillClrLst>
+    <dgm:linClrLst meth="repeat">
+      <a:schemeClr val="accent2"/>
+      <a:schemeClr val="accent3"/>
+      <a:schemeClr val="accent4"/>
+      <a:schemeClr val="accent5"/>
+      <a:schemeClr val="accent6"/>
+    </dgm:linClrLst>
+    <dgm:effectClrLst/>
+    <dgm:txLinClrLst/>
+    <dgm:txFillClrLst meth="repeat">
+      <a:schemeClr val="dk1"/>
+    </dgm:txFillClrLst>
+    <dgm:txEffectClrLst/>
+  </dgm:styleLbl>
+  <dgm:styleLbl name="trAlignAcc1">
+    <dgm:fillClrLst meth="repeat">
+      <a:schemeClr val="lt1">
+        <a:alpha val="40000"/>
+      </a:schemeClr>
+    </dgm:fillClrLst>
+    <dgm:linClrLst meth="repeat">
+      <a:schemeClr val="accent1"/>
+    </dgm:linClrLst>
+    <dgm:effectClrLst/>
+    <dgm:txLinClrLst/>
+    <dgm:txFillClrLst meth="repeat">
+      <a:schemeClr val="dk1"/>
+    </dgm:txFillClrLst>
+    <dgm:txEffectClrLst/>
+  </dgm:styleLbl>
+  <dgm:styleLbl name="bgAcc1">
+    <dgm:fillClrLst meth="repeat">
+      <a:schemeClr val="lt1">
+        <a:alpha val="90000"/>
+      </a:schemeClr>
+    </dgm:fillClrLst>
+    <dgm:linClrLst meth="repeat">
+      <a:schemeClr val="accent2"/>
+      <a:schemeClr val="accent3"/>
+      <a:schemeClr val="accent4"/>
+      <a:schemeClr val="accent5"/>
+      <a:schemeClr val="accent6"/>
+    </dgm:linClrLst>
+    <dgm:effectClrLst/>
+    <dgm:txLinClrLst/>
+    <dgm:txFillClrLst meth="repeat">
+      <a:schemeClr val="dk1"/>
+    </dgm:txFillClrLst>
+    <dgm:txEffectClrLst/>
+  </dgm:styleLbl>
+  <dgm:styleLbl name="solidFgAcc1">
+    <dgm:fillClrLst meth="repeat">
+      <a:schemeClr val="lt1"/>
+    </dgm:fillClrLst>
+    <dgm:linClrLst meth="repeat">
+      <a:schemeClr val="accent2"/>
+      <a:schemeClr val="accent3"/>
+      <a:schemeClr val="accent4"/>
+      <a:schemeClr val="accent5"/>
+      <a:schemeClr val="accent6"/>
+    </dgm:linClrLst>
+    <dgm:effectClrLst/>
+    <dgm:txLinClrLst/>
+    <dgm:txFillClrLst meth="repeat">
+      <a:schemeClr val="dk1"/>
+    </dgm:txFillClrLst>
+    <dgm:txEffectClrLst/>
+  </dgm:styleLbl>
+  <dgm:styleLbl name="solidAlignAcc1">
+    <dgm:fillClrLst meth="repeat">
+      <a:schemeClr val="lt1"/>
+    </dgm:fillClrLst>
+    <dgm:linClrLst meth="repeat">
+      <a:schemeClr val="accent2"/>
+      <a:schemeClr val="accent3"/>
+      <a:schemeClr val="accent4"/>
+      <a:schemeClr val="accent5"/>
+      <a:schemeClr val="accent6"/>
+    </dgm:linClrLst>
+    <dgm:effectClrLst/>
+    <dgm:txLinClrLst/>
+    <dgm:txFillClrLst meth="repeat">
+      <a:schemeClr val="dk1"/>
+    </dgm:txFillClrLst>
+    <dgm:txEffectClrLst/>
+  </dgm:styleLbl>
+  <dgm:styleLbl name="solidBgAcc1">
+    <dgm:fillClrLst meth="repeat">
+      <a:schemeClr val="lt1"/>
+    </dgm:fillClrLst>
+    <dgm:linClrLst meth="repeat">
+      <a:schemeClr val="accent2"/>
+      <a:schemeClr val="accent3"/>
+      <a:schemeClr val="accent4"/>
+      <a:schemeClr val="accent5"/>
+      <a:schemeClr val="accent6"/>
+    </dgm:linClrLst>
+    <dgm:effectClrLst/>
+    <dgm:txLinClrLst/>
+    <dgm:txFillClrLst meth="repeat">
+      <a:schemeClr val="dk1"/>
+    </dgm:txFillClrLst>
+    <dgm:txEffectClrLst/>
+  </dgm:styleLbl>
+  <dgm:styleLbl name="fgAccFollowNode1">
+    <dgm:fillClrLst meth="repeat">
+      <a:schemeClr val="accent2">
+        <a:tint val="40000"/>
+        <a:alpha val="90000"/>
+      </a:schemeClr>
+      <a:schemeClr val="accent3">
+        <a:tint val="40000"/>
+        <a:alpha val="90000"/>
+      </a:schemeClr>
+      <a:schemeClr val="accent4">
+        <a:tint val="40000"/>
+        <a:alpha val="90000"/>
+      </a:schemeClr>
+      <a:schemeClr val="accent5">
+        <a:tint val="40000"/>
+        <a:alpha val="90000"/>
+      </a:schemeClr>
+      <a:schemeClr val="accent6">
+        <a:tint val="40000"/>
+        <a:alpha val="90000"/>
+      </a:schemeClr>
+    </dgm:fillClrLst>
+    <dgm:linClrLst meth="repeat">
+      <a:schemeClr val="accent2">
+        <a:tint val="40000"/>
+        <a:alpha val="90000"/>
+      </a:schemeClr>
+      <a:schemeClr val="accent3">
+        <a:tint val="40000"/>
+        <a:alpha val="90000"/>
+      </a:schemeClr>
+      <a:schemeClr val="accent4">
+        <a:tint val="40000"/>
+        <a:alpha val="90000"/>
+      </a:schemeClr>
+      <a:schemeClr val="accent5">
+        <a:tint val="40000"/>
+        <a:alpha val="90000"/>
+      </a:schemeClr>
+      <a:schemeClr val="accent6">
+        <a:tint val="40000"/>
+        <a:alpha val="90000"/>
+      </a:schemeClr>
+    </dgm:linClrLst>
+    <dgm:effectClrLst/>
+    <dgm:txLinClrLst/>
+    <dgm:txFillClrLst meth="repeat">
+      <a:schemeClr val="dk1"/>
+    </dgm:txFillClrLst>
+    <dgm:txEffectClrLst/>
+  </dgm:styleLbl>
+  <dgm:styleLbl name="alignAccFollowNode1">
+    <dgm:fillClrLst meth="repeat">
+      <a:schemeClr val="accent2">
+        <a:tint val="40000"/>
+        <a:alpha val="90000"/>
+      </a:schemeClr>
+      <a:schemeClr val="accent3">
+        <a:tint val="40000"/>
+        <a:alpha val="90000"/>
+      </a:schemeClr>
+      <a:schemeClr val="accent4">
+        <a:tint val="40000"/>
+        <a:alpha val="90000"/>
+      </a:schemeClr>
+      <a:schemeClr val="accent5">
+        <a:tint val="40000"/>
+        <a:alpha val="90000"/>
+      </a:schemeClr>
+      <a:schemeClr val="accent6">
+        <a:tint val="40000"/>
+        <a:alpha val="90000"/>
+      </a:schemeClr>
+    </dgm:fillClrLst>
+    <dgm:linClrLst meth="repeat">
+      <a:schemeClr val="accent2">
+        <a:tint val="40000"/>
+        <a:alpha val="90000"/>
+      </a:schemeClr>
+      <a:schemeClr val="accent3">
+        <a:tint val="40000"/>
+        <a:alpha val="90000"/>
+      </a:schemeClr>
+      <a:schemeClr val="accent4">
+        <a:tint val="40000"/>
+        <a:alpha val="90000"/>
+      </a:schemeClr>
+      <a:schemeClr val="accent5">
+        <a:tint val="40000"/>
+        <a:alpha val="90000"/>
+      </a:schemeClr>
+      <a:schemeClr val="accent6">
+        <a:tint val="40000"/>
+        <a:alpha val="90000"/>
+      </a:schemeClr>
+    </dgm:linClrLst>
+    <dgm:effectClrLst/>
+    <dgm:txLinClrLst/>
+    <dgm:txFillClrLst meth="repeat">
+      <a:schemeClr val="dk1"/>
+    </dgm:txFillClrLst>
+    <dgm:txEffectClrLst/>
+  </dgm:styleLbl>
+  <dgm:styleLbl name="bgAccFollowNode1">
+    <dgm:fillClrLst meth="repeat">
+      <a:schemeClr val="accent2">
+        <a:tint val="40000"/>
+        <a:alpha val="90000"/>
+      </a:schemeClr>
+      <a:schemeClr val="accent3">
+        <a:tint val="40000"/>
+        <a:alpha val="90000"/>
+      </a:schemeClr>
+      <a:schemeClr val="accent4">
+        <a:tint val="40000"/>
+        <a:alpha val="90000"/>
+      </a:schemeClr>
+      <a:schemeClr val="accent5">
+        <a:tint val="40000"/>
+        <a:alpha val="90000"/>
+      </a:schemeClr>
+      <a:schemeClr val="accent6">
+        <a:tint val="40000"/>
+        <a:alpha val="90000"/>
+      </a:schemeClr>
+    </dgm:fillClrLst>
+    <dgm:linClrLst meth="repeat">
+      <a:schemeClr val="accent2">
+        <a:tint val="40000"/>
+        <a:alpha val="90000"/>
+      </a:schemeClr>
+      <a:schemeClr val="accent3">
+        <a:tint val="40000"/>
+        <a:alpha val="90000"/>
+      </a:schemeClr>
+      <a:schemeClr val="accent4">
+        <a:tint val="40000"/>
+        <a:alpha val="90000"/>
+      </a:schemeClr>
+      <a:schemeClr val="accent5">
+        <a:tint val="40000"/>
+        <a:alpha val="90000"/>
+      </a:schemeClr>
+      <a:schemeClr val="accent6">
+        <a:tint val="40000"/>
+        <a:alpha val="90000"/>
+      </a:schemeClr>
+    </dgm:linClrLst>
+    <dgm:effectClrLst/>
+    <dgm:txLinClrLst/>
+    <dgm:txFillClrLst meth="repeat">
+      <a:schemeClr val="dk1"/>
+    </dgm:txFillClrLst>
+    <dgm:txEffectClrLst/>
+  </dgm:styleLbl>
+  <dgm:styleLbl name="fgAcc0">
+    <dgm:fillClrLst meth="repeat">
+      <a:schemeClr val="lt1">
+        <a:alpha val="90000"/>
+      </a:schemeClr>
+    </dgm:fillClrLst>
+    <dgm:linClrLst>
+      <a:schemeClr val="accent1"/>
+    </dgm:linClrLst>
+    <dgm:effectClrLst/>
+    <dgm:txLinClrLst/>
+    <dgm:txFillClrLst meth="repeat">
+      <a:schemeClr val="dk1"/>
+    </dgm:txFillClrLst>
+    <dgm:txEffectClrLst/>
+  </dgm:styleLbl>
+  <dgm:styleLbl name="fgAcc2">
+    <dgm:fillClrLst meth="repeat">
+      <a:schemeClr val="lt1">
+        <a:alpha val="90000"/>
+      </a:schemeClr>
+    </dgm:fillClrLst>
+    <dgm:linClrLst>
+      <a:schemeClr val="accent2"/>
+    </dgm:linClrLst>
+    <dgm:effectClrLst/>
+    <dgm:txLinClrLst/>
+    <dgm:txFillClrLst meth="repeat">
+      <a:schemeClr val="dk1"/>
+    </dgm:txFillClrLst>
+    <dgm:txEffectClrLst/>
+  </dgm:styleLbl>
+  <dgm:styleLbl name="fgAcc3">
+    <dgm:fillClrLst meth="repeat">
+      <a:schemeClr val="lt1">
+        <a:alpha val="90000"/>
+      </a:schemeClr>
+    </dgm:fillClrLst>
+    <dgm:linClrLst>
+      <a:schemeClr val="accent3"/>
+    </dgm:linClrLst>
+    <dgm:effectClrLst/>
+    <dgm:txLinClrLst/>
+    <dgm:txFillClrLst meth="repeat">
+      <a:schemeClr val="dk1"/>
+    </dgm:txFillClrLst>
+    <dgm:txEffectClrLst/>
+  </dgm:styleLbl>
+  <dgm:styleLbl name="fgAcc4">
+    <dgm:fillClrLst meth="repeat">
+      <a:schemeClr val="lt1">
+        <a:alpha val="90000"/>
+      </a:schemeClr>
+    </dgm:fillClrLst>
+    <dgm:linClrLst>
+      <a:schemeClr val="accent4"/>
+    </dgm:linClrLst>
+    <dgm:effectClrLst/>
+    <dgm:txLinClrLst/>
+    <dgm:txFillClrLst meth="repeat">
+      <a:schemeClr val="dk1"/>
+    </dgm:txFillClrLst>
+    <dgm:txEffectClrLst/>
+  </dgm:styleLbl>
+  <dgm:styleLbl name="bgShp">
+    <dgm:fillClrLst meth="repeat">
+      <a:schemeClr val="accent2">
+        <a:tint val="40000"/>
+      </a:schemeClr>
+    </dgm:fillClrLst>
+    <dgm:linClrLst meth="repeat">
+      <a:schemeClr val="dk1"/>
+    </dgm:linClrLst>
+    <dgm:effectClrLst/>
+    <dgm:txLinClrLst/>
+    <dgm:txFillClrLst meth="repeat">
+      <a:schemeClr val="dk1"/>
+    </dgm:txFillClrLst>
+    <dgm:txEffectClrLst/>
+  </dgm:styleLbl>
+  <dgm:styleLbl name="dkBgShp">
+    <dgm:fillClrLst meth="repeat">
+      <a:schemeClr val="accent2">
+        <a:shade val="90000"/>
+      </a:schemeClr>
+    </dgm:fillClrLst>
+    <dgm:linClrLst meth="repeat">
+      <a:schemeClr val="dk1"/>
+    </dgm:linClrLst>
+    <dgm:effectClrLst/>
+    <dgm:txLinClrLst/>
+    <dgm:txFillClrLst meth="repeat">
+      <a:schemeClr val="lt1"/>
+    </dgm:txFillClrLst>
+    <dgm:txEffectClrLst/>
+  </dgm:styleLbl>
+  <dgm:styleLbl name="trBgShp">
+    <dgm:fillClrLst meth="repeat">
+      <a:schemeClr val="accent1">
+        <a:tint val="50000"/>
+        <a:alpha val="40000"/>
+      </a:schemeClr>
+    </dgm:fillClrLst>
+    <dgm:linClrLst meth="repeat">
+      <a:schemeClr val="accent2"/>
+    </dgm:linClrLst>
+    <dgm:effectClrLst/>
+    <dgm:txLinClrLst/>
+    <dgm:txFillClrLst meth="repeat">
+      <a:schemeClr val="lt1"/>
+    </dgm:txFillClrLst>
+    <dgm:txEffectClrLst/>
+  </dgm:styleLbl>
+  <dgm:styleLbl name="fgShp">
+    <dgm:fillClrLst meth="repeat">
+      <a:schemeClr val="accent2">
+        <a:tint val="40000"/>
+      </a:schemeClr>
+    </dgm:fillClrLst>
+    <dgm:linClrLst meth="repeat">
+      <a:schemeClr val="lt1"/>
+    </dgm:linClrLst>
+    <dgm:effectClrLst/>
+    <dgm:txLinClrLst/>
+    <dgm:txFillClrLst meth="repeat">
+      <a:schemeClr val="dk1"/>
+    </dgm:txFillClrLst>
+    <dgm:txEffectClrLst/>
+  </dgm:styleLbl>
+  <dgm:styleLbl name="revTx">
+    <dgm:fillClrLst meth="repeat">
+      <a:schemeClr val="lt1">
+        <a:alpha val="0"/>
+      </a:schemeClr>
+    </dgm:fillClrLst>
+    <dgm:linClrLst meth="repeat">
+      <a:schemeClr val="dk1">
+        <a:alpha val="0"/>
+      </a:schemeClr>
+    </dgm:linClrLst>
+    <dgm:effectClrLst/>
+    <dgm:txLinClrLst/>
+    <dgm:txFillClrLst meth="repeat">
+      <a:schemeClr val="tx1"/>
+    </dgm:txFillClrLst>
+    <dgm:txEffectClrLst/>
+  </dgm:styleLbl>
+</dgm:colorsDef>
+</file>
+
 <file path=ppt/diagrams/data1.xml><?xml version="1.0" encoding="utf-8"?>
 <dgm:dataModel xmlns:dgm="http://schemas.openxmlformats.org/drawingml/2006/diagram" xmlns:a="http://schemas.openxmlformats.org/drawingml/2006/main">
   <dgm:ptLst>
@@ -3293,6 +4444,308 @@
     <dgm:cxn modelId="{5EA7FA56-0CEA-4F6E-94C3-A73D83FB5178}" type="presParOf" srcId="{D0945DF3-1C0A-4AE6-97C5-3BE724F21622}" destId="{46616E46-4EA0-400D-B42A-DC6889941D16}" srcOrd="0" destOrd="0" presId="urn:microsoft.com/office/officeart/2018/2/layout/IconLabelList"/>
     <dgm:cxn modelId="{80D60A6A-90A4-4B93-B7A3-28701D67F8C3}" type="presParOf" srcId="{D0945DF3-1C0A-4AE6-97C5-3BE724F21622}" destId="{E9E6E744-6C43-40D9-9355-73C19D76A086}" srcOrd="1" destOrd="0" presId="urn:microsoft.com/office/officeart/2018/2/layout/IconLabelList"/>
     <dgm:cxn modelId="{D2CB640D-5924-4BEC-85A3-ADA771AF1AA6}" type="presParOf" srcId="{D0945DF3-1C0A-4AE6-97C5-3BE724F21622}" destId="{67AD9183-7DAF-4F26-8A9D-13C7D7A96F09}" srcOrd="2" destOrd="0" presId="urn:microsoft.com/office/officeart/2018/2/layout/IconLabelList"/>
+  </dgm:cxnLst>
+  <dgm:bg/>
+  <dgm:whole/>
+  <dgm:extLst>
+    <a:ext uri="http://schemas.microsoft.com/office/drawing/2008/diagram">
+      <dsp:dataModelExt xmlns:dsp="http://schemas.microsoft.com/office/drawing/2008/diagram" relId="rId7" minVer="http://schemas.openxmlformats.org/drawingml/2006/diagram"/>
+    </a:ext>
+  </dgm:extLst>
+</dgm:dataModel>
+</file>
+
+<file path=ppt/diagrams/data2.xml><?xml version="1.0" encoding="utf-8"?>
+<dgm:dataModel xmlns:dgm="http://schemas.openxmlformats.org/drawingml/2006/diagram" xmlns:a="http://schemas.openxmlformats.org/drawingml/2006/main">
+  <dgm:ptLst>
+    <dgm:pt modelId="{3BD0889E-4236-4011-B377-A523AF8DFFC2}" type="doc">
+      <dgm:prSet loTypeId="urn:microsoft.com/office/officeart/2005/8/layout/vList2" loCatId="list" qsTypeId="urn:microsoft.com/office/officeart/2005/8/quickstyle/simple1" qsCatId="simple" csTypeId="urn:microsoft.com/office/officeart/2005/8/colors/colorful1" csCatId="colorful" phldr="1"/>
+      <dgm:spPr/>
+      <dgm:t>
+        <a:bodyPr/>
+        <a:lstStyle/>
+        <a:p>
+          <a:endParaRPr lang="en-US"/>
+        </a:p>
+      </dgm:t>
+    </dgm:pt>
+    <dgm:pt modelId="{D10A6F63-3661-43DC-8A67-6E278DD1A3C0}">
+      <dgm:prSet custT="1"/>
+      <dgm:spPr/>
+      <dgm:t>
+        <a:bodyPr/>
+        <a:lstStyle/>
+        <a:p>
+          <a:r>
+            <a:rPr lang="de-AT" sz="3200" dirty="0"/>
+            <a:t>React Router, TypeScript, Tailwind</a:t>
+          </a:r>
+          <a:endParaRPr lang="en-US" sz="3200" dirty="0"/>
+        </a:p>
+      </dgm:t>
+    </dgm:pt>
+    <dgm:pt modelId="{E9C46358-5567-45A4-8B88-A02EBA132F51}" type="parTrans" cxnId="{464F86CB-D0FD-40FF-8A33-35427CD5AA43}">
+      <dgm:prSet/>
+      <dgm:spPr/>
+      <dgm:t>
+        <a:bodyPr/>
+        <a:lstStyle/>
+        <a:p>
+          <a:endParaRPr lang="en-US" sz="2000"/>
+        </a:p>
+      </dgm:t>
+    </dgm:pt>
+    <dgm:pt modelId="{53B6BDE9-24C4-4B0A-A91D-F82B44CBB6E1}" type="sibTrans" cxnId="{464F86CB-D0FD-40FF-8A33-35427CD5AA43}">
+      <dgm:prSet/>
+      <dgm:spPr/>
+      <dgm:t>
+        <a:bodyPr/>
+        <a:lstStyle/>
+        <a:p>
+          <a:endParaRPr lang="en-US" sz="2000"/>
+        </a:p>
+      </dgm:t>
+    </dgm:pt>
+    <dgm:pt modelId="{4DB02317-9552-458A-8F7D-FE29DF5FA952}">
+      <dgm:prSet custT="1"/>
+      <dgm:spPr/>
+      <dgm:t>
+        <a:bodyPr/>
+        <a:lstStyle/>
+        <a:p>
+          <a:r>
+            <a:rPr lang="de-AT" sz="3200" dirty="0"/>
+            <a:t>Python, FastAPI, Pydantic, Loguru</a:t>
+          </a:r>
+          <a:endParaRPr lang="en-US" sz="3200" dirty="0"/>
+        </a:p>
+      </dgm:t>
+    </dgm:pt>
+    <dgm:pt modelId="{507044CC-4D47-4290-9DC0-EBB26BDA5801}" type="parTrans" cxnId="{32C9A55D-0C5D-4D60-95CF-670C7969D652}">
+      <dgm:prSet/>
+      <dgm:spPr/>
+      <dgm:t>
+        <a:bodyPr/>
+        <a:lstStyle/>
+        <a:p>
+          <a:endParaRPr lang="en-US" sz="2000"/>
+        </a:p>
+      </dgm:t>
+    </dgm:pt>
+    <dgm:pt modelId="{792AAE5A-527C-4A9F-9DDE-6FC339738F72}" type="sibTrans" cxnId="{32C9A55D-0C5D-4D60-95CF-670C7969D652}">
+      <dgm:prSet/>
+      <dgm:spPr/>
+      <dgm:t>
+        <a:bodyPr/>
+        <a:lstStyle/>
+        <a:p>
+          <a:endParaRPr lang="en-US" sz="2000"/>
+        </a:p>
+      </dgm:t>
+    </dgm:pt>
+    <dgm:pt modelId="{09F2F44E-5593-4CE9-A476-CA9EB4A3C339}">
+      <dgm:prSet custT="1"/>
+      <dgm:spPr/>
+      <dgm:t>
+        <a:bodyPr/>
+        <a:lstStyle/>
+        <a:p>
+          <a:r>
+            <a:rPr lang="de-AT" sz="3200"/>
+            <a:t>Supabase (Cloud / Lokal)</a:t>
+          </a:r>
+          <a:endParaRPr lang="en-US" sz="3200"/>
+        </a:p>
+      </dgm:t>
+    </dgm:pt>
+    <dgm:pt modelId="{CC9FA6A4-421A-4B7E-BD64-51CD01C1A2EE}" type="parTrans" cxnId="{7E24A1DF-E9E9-444A-A099-D640E6099E57}">
+      <dgm:prSet/>
+      <dgm:spPr/>
+      <dgm:t>
+        <a:bodyPr/>
+        <a:lstStyle/>
+        <a:p>
+          <a:endParaRPr lang="en-US" sz="2000"/>
+        </a:p>
+      </dgm:t>
+    </dgm:pt>
+    <dgm:pt modelId="{521DDA75-B6A8-45EB-807A-2511D9A2470B}" type="sibTrans" cxnId="{7E24A1DF-E9E9-444A-A099-D640E6099E57}">
+      <dgm:prSet/>
+      <dgm:spPr/>
+      <dgm:t>
+        <a:bodyPr/>
+        <a:lstStyle/>
+        <a:p>
+          <a:endParaRPr lang="en-US" sz="2000"/>
+        </a:p>
+      </dgm:t>
+    </dgm:pt>
+    <dgm:pt modelId="{C923C1C7-19B0-4D19-9FC4-EEDEBCD72F56}">
+      <dgm:prSet custT="1"/>
+      <dgm:spPr/>
+      <dgm:t>
+        <a:bodyPr/>
+        <a:lstStyle/>
+        <a:p>
+          <a:r>
+            <a:rPr lang="de-AT" sz="3200" dirty="0"/>
+            <a:t>Resend SMTP, Redis</a:t>
+          </a:r>
+          <a:endParaRPr lang="en-US" sz="3200" dirty="0"/>
+        </a:p>
+      </dgm:t>
+    </dgm:pt>
+    <dgm:pt modelId="{857A7B98-D94D-4DDE-A4E1-5E792E4C3C3D}" type="parTrans" cxnId="{A29A4164-0C0A-48A8-86C2-7444BCDE665E}">
+      <dgm:prSet/>
+      <dgm:spPr/>
+      <dgm:t>
+        <a:bodyPr/>
+        <a:lstStyle/>
+        <a:p>
+          <a:endParaRPr lang="en-US" sz="2000"/>
+        </a:p>
+      </dgm:t>
+    </dgm:pt>
+    <dgm:pt modelId="{58489A5C-1878-4006-B65F-8203FB460CE5}" type="sibTrans" cxnId="{A29A4164-0C0A-48A8-86C2-7444BCDE665E}">
+      <dgm:prSet/>
+      <dgm:spPr/>
+      <dgm:t>
+        <a:bodyPr/>
+        <a:lstStyle/>
+        <a:p>
+          <a:endParaRPr lang="en-US" sz="2000"/>
+        </a:p>
+      </dgm:t>
+    </dgm:pt>
+    <dgm:pt modelId="{12891104-DA09-46D9-9638-7DE220646AE8}">
+      <dgm:prSet custT="1"/>
+      <dgm:spPr/>
+      <dgm:t>
+        <a:bodyPr/>
+        <a:lstStyle/>
+        <a:p>
+          <a:r>
+            <a:rPr lang="de-AT" sz="3200"/>
+            <a:t>Dockerisiert</a:t>
+          </a:r>
+          <a:endParaRPr lang="en-US" sz="3200"/>
+        </a:p>
+      </dgm:t>
+    </dgm:pt>
+    <dgm:pt modelId="{F7698940-C1D5-4EE6-A2D8-DE75FC10B807}" type="parTrans" cxnId="{6C9C7465-D742-4587-B1FD-BE26517BE782}">
+      <dgm:prSet/>
+      <dgm:spPr/>
+      <dgm:t>
+        <a:bodyPr/>
+        <a:lstStyle/>
+        <a:p>
+          <a:endParaRPr lang="en-US" sz="2000"/>
+        </a:p>
+      </dgm:t>
+    </dgm:pt>
+    <dgm:pt modelId="{164B6C4B-2DEF-4878-91F8-42807A990F13}" type="sibTrans" cxnId="{6C9C7465-D742-4587-B1FD-BE26517BE782}">
+      <dgm:prSet/>
+      <dgm:spPr/>
+      <dgm:t>
+        <a:bodyPr/>
+        <a:lstStyle/>
+        <a:p>
+          <a:endParaRPr lang="en-US" sz="2000"/>
+        </a:p>
+      </dgm:t>
+    </dgm:pt>
+    <dgm:pt modelId="{DC0A78AE-B52D-4982-AACD-1639415DB18F}" type="pres">
+      <dgm:prSet presAssocID="{3BD0889E-4236-4011-B377-A523AF8DFFC2}" presName="linear" presStyleCnt="0">
+        <dgm:presLayoutVars>
+          <dgm:animLvl val="lvl"/>
+          <dgm:resizeHandles val="exact"/>
+        </dgm:presLayoutVars>
+      </dgm:prSet>
+      <dgm:spPr/>
+    </dgm:pt>
+    <dgm:pt modelId="{AC5434DA-F358-4905-BD6A-FC19331A63B1}" type="pres">
+      <dgm:prSet presAssocID="{D10A6F63-3661-43DC-8A67-6E278DD1A3C0}" presName="parentText" presStyleLbl="node1" presStyleIdx="0" presStyleCnt="5">
+        <dgm:presLayoutVars>
+          <dgm:chMax val="0"/>
+          <dgm:bulletEnabled val="1"/>
+        </dgm:presLayoutVars>
+      </dgm:prSet>
+      <dgm:spPr/>
+    </dgm:pt>
+    <dgm:pt modelId="{BD53EF26-4A41-479A-AEB1-A421461D3A2F}" type="pres">
+      <dgm:prSet presAssocID="{53B6BDE9-24C4-4B0A-A91D-F82B44CBB6E1}" presName="spacer" presStyleCnt="0"/>
+      <dgm:spPr/>
+    </dgm:pt>
+    <dgm:pt modelId="{454E9228-5EA5-4714-9F6D-BDDE11132AA8}" type="pres">
+      <dgm:prSet presAssocID="{4DB02317-9552-458A-8F7D-FE29DF5FA952}" presName="parentText" presStyleLbl="node1" presStyleIdx="1" presStyleCnt="5">
+        <dgm:presLayoutVars>
+          <dgm:chMax val="0"/>
+          <dgm:bulletEnabled val="1"/>
+        </dgm:presLayoutVars>
+      </dgm:prSet>
+      <dgm:spPr/>
+    </dgm:pt>
+    <dgm:pt modelId="{E49B172C-9951-42D3-A05E-3F7EB27BAF1F}" type="pres">
+      <dgm:prSet presAssocID="{792AAE5A-527C-4A9F-9DDE-6FC339738F72}" presName="spacer" presStyleCnt="0"/>
+      <dgm:spPr/>
+    </dgm:pt>
+    <dgm:pt modelId="{7F0B39A5-B329-43E1-B84C-23FAF01DBD3E}" type="pres">
+      <dgm:prSet presAssocID="{09F2F44E-5593-4CE9-A476-CA9EB4A3C339}" presName="parentText" presStyleLbl="node1" presStyleIdx="2" presStyleCnt="5">
+        <dgm:presLayoutVars>
+          <dgm:chMax val="0"/>
+          <dgm:bulletEnabled val="1"/>
+        </dgm:presLayoutVars>
+      </dgm:prSet>
+      <dgm:spPr/>
+    </dgm:pt>
+    <dgm:pt modelId="{373CF1E1-CE34-4634-BFA2-A8A1ACEDBD2A}" type="pres">
+      <dgm:prSet presAssocID="{521DDA75-B6A8-45EB-807A-2511D9A2470B}" presName="spacer" presStyleCnt="0"/>
+      <dgm:spPr/>
+    </dgm:pt>
+    <dgm:pt modelId="{BCBB898A-07B3-4B55-B360-0D00EBFA3599}" type="pres">
+      <dgm:prSet presAssocID="{C923C1C7-19B0-4D19-9FC4-EEDEBCD72F56}" presName="parentText" presStyleLbl="node1" presStyleIdx="3" presStyleCnt="5">
+        <dgm:presLayoutVars>
+          <dgm:chMax val="0"/>
+          <dgm:bulletEnabled val="1"/>
+        </dgm:presLayoutVars>
+      </dgm:prSet>
+      <dgm:spPr/>
+    </dgm:pt>
+    <dgm:pt modelId="{6A9B212A-67DE-4304-AA1F-6C1AD1624A5F}" type="pres">
+      <dgm:prSet presAssocID="{58489A5C-1878-4006-B65F-8203FB460CE5}" presName="spacer" presStyleCnt="0"/>
+      <dgm:spPr/>
+    </dgm:pt>
+    <dgm:pt modelId="{5C436FEE-7E42-43D8-917F-36DF46A2C58B}" type="pres">
+      <dgm:prSet presAssocID="{12891104-DA09-46D9-9638-7DE220646AE8}" presName="parentText" presStyleLbl="node1" presStyleIdx="4" presStyleCnt="5">
+        <dgm:presLayoutVars>
+          <dgm:chMax val="0"/>
+          <dgm:bulletEnabled val="1"/>
+        </dgm:presLayoutVars>
+      </dgm:prSet>
+      <dgm:spPr/>
+    </dgm:pt>
+  </dgm:ptLst>
+  <dgm:cxnLst>
+    <dgm:cxn modelId="{B1D0F002-8DD3-47FB-8B44-231738921359}" type="presOf" srcId="{D10A6F63-3661-43DC-8A67-6E278DD1A3C0}" destId="{AC5434DA-F358-4905-BD6A-FC19331A63B1}" srcOrd="0" destOrd="0" presId="urn:microsoft.com/office/officeart/2005/8/layout/vList2"/>
+    <dgm:cxn modelId="{52BBFB39-FCBB-45F4-B975-FA86B0C195C2}" type="presOf" srcId="{09F2F44E-5593-4CE9-A476-CA9EB4A3C339}" destId="{7F0B39A5-B329-43E1-B84C-23FAF01DBD3E}" srcOrd="0" destOrd="0" presId="urn:microsoft.com/office/officeart/2005/8/layout/vList2"/>
+    <dgm:cxn modelId="{32C9A55D-0C5D-4D60-95CF-670C7969D652}" srcId="{3BD0889E-4236-4011-B377-A523AF8DFFC2}" destId="{4DB02317-9552-458A-8F7D-FE29DF5FA952}" srcOrd="1" destOrd="0" parTransId="{507044CC-4D47-4290-9DC0-EBB26BDA5801}" sibTransId="{792AAE5A-527C-4A9F-9DDE-6FC339738F72}"/>
+    <dgm:cxn modelId="{A29A4164-0C0A-48A8-86C2-7444BCDE665E}" srcId="{3BD0889E-4236-4011-B377-A523AF8DFFC2}" destId="{C923C1C7-19B0-4D19-9FC4-EEDEBCD72F56}" srcOrd="3" destOrd="0" parTransId="{857A7B98-D94D-4DDE-A4E1-5E792E4C3C3D}" sibTransId="{58489A5C-1878-4006-B65F-8203FB460CE5}"/>
+    <dgm:cxn modelId="{6C9C7465-D742-4587-B1FD-BE26517BE782}" srcId="{3BD0889E-4236-4011-B377-A523AF8DFFC2}" destId="{12891104-DA09-46D9-9638-7DE220646AE8}" srcOrd="4" destOrd="0" parTransId="{F7698940-C1D5-4EE6-A2D8-DE75FC10B807}" sibTransId="{164B6C4B-2DEF-4878-91F8-42807A990F13}"/>
+    <dgm:cxn modelId="{AD2EDA8D-D23D-4593-B0F1-69389DBBFB2F}" type="presOf" srcId="{12891104-DA09-46D9-9638-7DE220646AE8}" destId="{5C436FEE-7E42-43D8-917F-36DF46A2C58B}" srcOrd="0" destOrd="0" presId="urn:microsoft.com/office/officeart/2005/8/layout/vList2"/>
+    <dgm:cxn modelId="{A9EE4B9F-F297-4ABC-A65C-E31E688E1FD8}" type="presOf" srcId="{3BD0889E-4236-4011-B377-A523AF8DFFC2}" destId="{DC0A78AE-B52D-4982-AACD-1639415DB18F}" srcOrd="0" destOrd="0" presId="urn:microsoft.com/office/officeart/2005/8/layout/vList2"/>
+    <dgm:cxn modelId="{1C5AD9AA-DAC9-42E4-A7A6-9B2C1725A367}" type="presOf" srcId="{C923C1C7-19B0-4D19-9FC4-EEDEBCD72F56}" destId="{BCBB898A-07B3-4B55-B360-0D00EBFA3599}" srcOrd="0" destOrd="0" presId="urn:microsoft.com/office/officeart/2005/8/layout/vList2"/>
+    <dgm:cxn modelId="{464F86CB-D0FD-40FF-8A33-35427CD5AA43}" srcId="{3BD0889E-4236-4011-B377-A523AF8DFFC2}" destId="{D10A6F63-3661-43DC-8A67-6E278DD1A3C0}" srcOrd="0" destOrd="0" parTransId="{E9C46358-5567-45A4-8B88-A02EBA132F51}" sibTransId="{53B6BDE9-24C4-4B0A-A91D-F82B44CBB6E1}"/>
+    <dgm:cxn modelId="{7E24A1DF-E9E9-444A-A099-D640E6099E57}" srcId="{3BD0889E-4236-4011-B377-A523AF8DFFC2}" destId="{09F2F44E-5593-4CE9-A476-CA9EB4A3C339}" srcOrd="2" destOrd="0" parTransId="{CC9FA6A4-421A-4B7E-BD64-51CD01C1A2EE}" sibTransId="{521DDA75-B6A8-45EB-807A-2511D9A2470B}"/>
+    <dgm:cxn modelId="{E7C1D9F7-22FC-4C7F-8A1D-7C77F783766B}" type="presOf" srcId="{4DB02317-9552-458A-8F7D-FE29DF5FA952}" destId="{454E9228-5EA5-4714-9F6D-BDDE11132AA8}" srcOrd="0" destOrd="0" presId="urn:microsoft.com/office/officeart/2005/8/layout/vList2"/>
+    <dgm:cxn modelId="{23B62DBE-FE86-41A4-9A70-DB37D9D44BB3}" type="presParOf" srcId="{DC0A78AE-B52D-4982-AACD-1639415DB18F}" destId="{AC5434DA-F358-4905-BD6A-FC19331A63B1}" srcOrd="0" destOrd="0" presId="urn:microsoft.com/office/officeart/2005/8/layout/vList2"/>
+    <dgm:cxn modelId="{8DFC7AC0-A6D1-49E7-9F2E-8DEE91A8C075}" type="presParOf" srcId="{DC0A78AE-B52D-4982-AACD-1639415DB18F}" destId="{BD53EF26-4A41-479A-AEB1-A421461D3A2F}" srcOrd="1" destOrd="0" presId="urn:microsoft.com/office/officeart/2005/8/layout/vList2"/>
+    <dgm:cxn modelId="{B4A34503-E831-4F74-AB46-D6269188C56D}" type="presParOf" srcId="{DC0A78AE-B52D-4982-AACD-1639415DB18F}" destId="{454E9228-5EA5-4714-9F6D-BDDE11132AA8}" srcOrd="2" destOrd="0" presId="urn:microsoft.com/office/officeart/2005/8/layout/vList2"/>
+    <dgm:cxn modelId="{A334A89A-C064-4478-9DA8-8DD481B8D0D2}" type="presParOf" srcId="{DC0A78AE-B52D-4982-AACD-1639415DB18F}" destId="{E49B172C-9951-42D3-A05E-3F7EB27BAF1F}" srcOrd="3" destOrd="0" presId="urn:microsoft.com/office/officeart/2005/8/layout/vList2"/>
+    <dgm:cxn modelId="{52AB3D72-3F6C-4F2C-BAB0-F6DD4D7A7501}" type="presParOf" srcId="{DC0A78AE-B52D-4982-AACD-1639415DB18F}" destId="{7F0B39A5-B329-43E1-B84C-23FAF01DBD3E}" srcOrd="4" destOrd="0" presId="urn:microsoft.com/office/officeart/2005/8/layout/vList2"/>
+    <dgm:cxn modelId="{471B420B-4756-40A3-8310-F2E2C8B201D7}" type="presParOf" srcId="{DC0A78AE-B52D-4982-AACD-1639415DB18F}" destId="{373CF1E1-CE34-4634-BFA2-A8A1ACEDBD2A}" srcOrd="5" destOrd="0" presId="urn:microsoft.com/office/officeart/2005/8/layout/vList2"/>
+    <dgm:cxn modelId="{C9A88FFB-71C7-4CD3-81A6-2E782DBEB56F}" type="presParOf" srcId="{DC0A78AE-B52D-4982-AACD-1639415DB18F}" destId="{BCBB898A-07B3-4B55-B360-0D00EBFA3599}" srcOrd="6" destOrd="0" presId="urn:microsoft.com/office/officeart/2005/8/layout/vList2"/>
+    <dgm:cxn modelId="{DD9D5FB7-1FDF-474D-AE70-9E6B0BF61628}" type="presParOf" srcId="{DC0A78AE-B52D-4982-AACD-1639415DB18F}" destId="{6A9B212A-67DE-4304-AA1F-6C1AD1624A5F}" srcOrd="7" destOrd="0" presId="urn:microsoft.com/office/officeart/2005/8/layout/vList2"/>
+    <dgm:cxn modelId="{3AA19FE4-FDE3-4CAD-8939-7F08A3356F32}" type="presParOf" srcId="{DC0A78AE-B52D-4982-AACD-1639415DB18F}" destId="{5C436FEE-7E42-43D8-917F-36DF46A2C58B}" srcOrd="8" destOrd="0" presId="urn:microsoft.com/office/officeart/2005/8/layout/vList2"/>
   </dgm:cxnLst>
   <dgm:bg/>
   <dgm:whole/>
@@ -3640,6 +5093,413 @@
 </dsp:drawing>
 </file>
 
+<file path=ppt/diagrams/drawing2.xml><?xml version="1.0" encoding="utf-8"?>
+<dsp:drawing xmlns:dgm="http://schemas.openxmlformats.org/drawingml/2006/diagram" xmlns:dsp="http://schemas.microsoft.com/office/drawing/2008/diagram" xmlns:a="http://schemas.openxmlformats.org/drawingml/2006/main">
+  <dsp:spTree>
+    <dsp:nvGrpSpPr>
+      <dsp:cNvPr id="0" name=""/>
+      <dsp:cNvGrpSpPr/>
+    </dsp:nvGrpSpPr>
+    <dsp:grpSpPr/>
+    <dsp:sp modelId="{AC5434DA-F358-4905-BD6A-FC19331A63B1}">
+      <dsp:nvSpPr>
+        <dsp:cNvPr id="0" name=""/>
+        <dsp:cNvSpPr/>
+      </dsp:nvSpPr>
+      <dsp:spPr>
+        <a:xfrm>
+          <a:off x="0" y="41484"/>
+          <a:ext cx="6373813" cy="1010880"/>
+        </a:xfrm>
+        <a:prstGeom prst="roundRect">
+          <a:avLst/>
+        </a:prstGeom>
+        <a:solidFill>
+          <a:schemeClr val="accent2">
+            <a:hueOff val="0"/>
+            <a:satOff val="0"/>
+            <a:lumOff val="0"/>
+            <a:alphaOff val="0"/>
+          </a:schemeClr>
+        </a:solidFill>
+        <a:ln w="12700" cap="flat" cmpd="sng" algn="ctr">
+          <a:solidFill>
+            <a:schemeClr val="lt1">
+              <a:hueOff val="0"/>
+              <a:satOff val="0"/>
+              <a:lumOff val="0"/>
+              <a:alphaOff val="0"/>
+            </a:schemeClr>
+          </a:solidFill>
+          <a:prstDash val="solid"/>
+          <a:miter lim="800000"/>
+        </a:ln>
+        <a:effectLst/>
+      </dsp:spPr>
+      <dsp:style>
+        <a:lnRef idx="2">
+          <a:scrgbClr r="0" g="0" b="0"/>
+        </a:lnRef>
+        <a:fillRef idx="1">
+          <a:scrgbClr r="0" g="0" b="0"/>
+        </a:fillRef>
+        <a:effectRef idx="0">
+          <a:scrgbClr r="0" g="0" b="0"/>
+        </a:effectRef>
+        <a:fontRef idx="minor">
+          <a:schemeClr val="lt1"/>
+        </a:fontRef>
+      </dsp:style>
+      <dsp:txBody>
+        <a:bodyPr spcFirstLastPara="0" vert="horz" wrap="square" lIns="121920" tIns="121920" rIns="121920" bIns="121920" numCol="1" spcCol="1270" anchor="ctr" anchorCtr="0">
+          <a:noAutofit/>
+        </a:bodyPr>
+        <a:lstStyle/>
+        <a:p>
+          <a:pPr marL="0" lvl="0" indent="0" algn="l" defTabSz="1422400">
+            <a:lnSpc>
+              <a:spcPct val="90000"/>
+            </a:lnSpc>
+            <a:spcBef>
+              <a:spcPct val="0"/>
+            </a:spcBef>
+            <a:spcAft>
+              <a:spcPct val="35000"/>
+            </a:spcAft>
+            <a:buNone/>
+          </a:pPr>
+          <a:r>
+            <a:rPr lang="de-AT" sz="3200" kern="1200" dirty="0"/>
+            <a:t>React Router, TypeScript, Tailwind</a:t>
+          </a:r>
+          <a:endParaRPr lang="en-US" sz="3200" kern="1200" dirty="0"/>
+        </a:p>
+      </dsp:txBody>
+      <dsp:txXfrm>
+        <a:off x="49347" y="90831"/>
+        <a:ext cx="6275119" cy="912186"/>
+      </dsp:txXfrm>
+    </dsp:sp>
+    <dsp:sp modelId="{454E9228-5EA5-4714-9F6D-BDDE11132AA8}">
+      <dsp:nvSpPr>
+        <dsp:cNvPr id="0" name=""/>
+        <dsp:cNvSpPr/>
+      </dsp:nvSpPr>
+      <dsp:spPr>
+        <a:xfrm>
+          <a:off x="0" y="1207884"/>
+          <a:ext cx="6373813" cy="1010880"/>
+        </a:xfrm>
+        <a:prstGeom prst="roundRect">
+          <a:avLst/>
+        </a:prstGeom>
+        <a:solidFill>
+          <a:schemeClr val="accent3">
+            <a:hueOff val="0"/>
+            <a:satOff val="0"/>
+            <a:lumOff val="0"/>
+            <a:alphaOff val="0"/>
+          </a:schemeClr>
+        </a:solidFill>
+        <a:ln w="12700" cap="flat" cmpd="sng" algn="ctr">
+          <a:solidFill>
+            <a:schemeClr val="lt1">
+              <a:hueOff val="0"/>
+              <a:satOff val="0"/>
+              <a:lumOff val="0"/>
+              <a:alphaOff val="0"/>
+            </a:schemeClr>
+          </a:solidFill>
+          <a:prstDash val="solid"/>
+          <a:miter lim="800000"/>
+        </a:ln>
+        <a:effectLst/>
+      </dsp:spPr>
+      <dsp:style>
+        <a:lnRef idx="2">
+          <a:scrgbClr r="0" g="0" b="0"/>
+        </a:lnRef>
+        <a:fillRef idx="1">
+          <a:scrgbClr r="0" g="0" b="0"/>
+        </a:fillRef>
+        <a:effectRef idx="0">
+          <a:scrgbClr r="0" g="0" b="0"/>
+        </a:effectRef>
+        <a:fontRef idx="minor">
+          <a:schemeClr val="lt1"/>
+        </a:fontRef>
+      </dsp:style>
+      <dsp:txBody>
+        <a:bodyPr spcFirstLastPara="0" vert="horz" wrap="square" lIns="121920" tIns="121920" rIns="121920" bIns="121920" numCol="1" spcCol="1270" anchor="ctr" anchorCtr="0">
+          <a:noAutofit/>
+        </a:bodyPr>
+        <a:lstStyle/>
+        <a:p>
+          <a:pPr marL="0" lvl="0" indent="0" algn="l" defTabSz="1422400">
+            <a:lnSpc>
+              <a:spcPct val="90000"/>
+            </a:lnSpc>
+            <a:spcBef>
+              <a:spcPct val="0"/>
+            </a:spcBef>
+            <a:spcAft>
+              <a:spcPct val="35000"/>
+            </a:spcAft>
+            <a:buNone/>
+          </a:pPr>
+          <a:r>
+            <a:rPr lang="de-AT" sz="3200" kern="1200" dirty="0"/>
+            <a:t>Python, FastAPI, Pydantic, Loguru</a:t>
+          </a:r>
+          <a:endParaRPr lang="en-US" sz="3200" kern="1200" dirty="0"/>
+        </a:p>
+      </dsp:txBody>
+      <dsp:txXfrm>
+        <a:off x="49347" y="1257231"/>
+        <a:ext cx="6275119" cy="912186"/>
+      </dsp:txXfrm>
+    </dsp:sp>
+    <dsp:sp modelId="{7F0B39A5-B329-43E1-B84C-23FAF01DBD3E}">
+      <dsp:nvSpPr>
+        <dsp:cNvPr id="0" name=""/>
+        <dsp:cNvSpPr/>
+      </dsp:nvSpPr>
+      <dsp:spPr>
+        <a:xfrm>
+          <a:off x="0" y="2374284"/>
+          <a:ext cx="6373813" cy="1010880"/>
+        </a:xfrm>
+        <a:prstGeom prst="roundRect">
+          <a:avLst/>
+        </a:prstGeom>
+        <a:solidFill>
+          <a:schemeClr val="accent4">
+            <a:hueOff val="0"/>
+            <a:satOff val="0"/>
+            <a:lumOff val="0"/>
+            <a:alphaOff val="0"/>
+          </a:schemeClr>
+        </a:solidFill>
+        <a:ln w="12700" cap="flat" cmpd="sng" algn="ctr">
+          <a:solidFill>
+            <a:schemeClr val="lt1">
+              <a:hueOff val="0"/>
+              <a:satOff val="0"/>
+              <a:lumOff val="0"/>
+              <a:alphaOff val="0"/>
+            </a:schemeClr>
+          </a:solidFill>
+          <a:prstDash val="solid"/>
+          <a:miter lim="800000"/>
+        </a:ln>
+        <a:effectLst/>
+      </dsp:spPr>
+      <dsp:style>
+        <a:lnRef idx="2">
+          <a:scrgbClr r="0" g="0" b="0"/>
+        </a:lnRef>
+        <a:fillRef idx="1">
+          <a:scrgbClr r="0" g="0" b="0"/>
+        </a:fillRef>
+        <a:effectRef idx="0">
+          <a:scrgbClr r="0" g="0" b="0"/>
+        </a:effectRef>
+        <a:fontRef idx="minor">
+          <a:schemeClr val="lt1"/>
+        </a:fontRef>
+      </dsp:style>
+      <dsp:txBody>
+        <a:bodyPr spcFirstLastPara="0" vert="horz" wrap="square" lIns="121920" tIns="121920" rIns="121920" bIns="121920" numCol="1" spcCol="1270" anchor="ctr" anchorCtr="0">
+          <a:noAutofit/>
+        </a:bodyPr>
+        <a:lstStyle/>
+        <a:p>
+          <a:pPr marL="0" lvl="0" indent="0" algn="l" defTabSz="1422400">
+            <a:lnSpc>
+              <a:spcPct val="90000"/>
+            </a:lnSpc>
+            <a:spcBef>
+              <a:spcPct val="0"/>
+            </a:spcBef>
+            <a:spcAft>
+              <a:spcPct val="35000"/>
+            </a:spcAft>
+            <a:buNone/>
+          </a:pPr>
+          <a:r>
+            <a:rPr lang="de-AT" sz="3200" kern="1200"/>
+            <a:t>Supabase (Cloud / Lokal)</a:t>
+          </a:r>
+          <a:endParaRPr lang="en-US" sz="3200" kern="1200"/>
+        </a:p>
+      </dsp:txBody>
+      <dsp:txXfrm>
+        <a:off x="49347" y="2423631"/>
+        <a:ext cx="6275119" cy="912186"/>
+      </dsp:txXfrm>
+    </dsp:sp>
+    <dsp:sp modelId="{BCBB898A-07B3-4B55-B360-0D00EBFA3599}">
+      <dsp:nvSpPr>
+        <dsp:cNvPr id="0" name=""/>
+        <dsp:cNvSpPr/>
+      </dsp:nvSpPr>
+      <dsp:spPr>
+        <a:xfrm>
+          <a:off x="0" y="3540685"/>
+          <a:ext cx="6373813" cy="1010880"/>
+        </a:xfrm>
+        <a:prstGeom prst="roundRect">
+          <a:avLst/>
+        </a:prstGeom>
+        <a:solidFill>
+          <a:schemeClr val="accent5">
+            <a:hueOff val="0"/>
+            <a:satOff val="0"/>
+            <a:lumOff val="0"/>
+            <a:alphaOff val="0"/>
+          </a:schemeClr>
+        </a:solidFill>
+        <a:ln w="12700" cap="flat" cmpd="sng" algn="ctr">
+          <a:solidFill>
+            <a:schemeClr val="lt1">
+              <a:hueOff val="0"/>
+              <a:satOff val="0"/>
+              <a:lumOff val="0"/>
+              <a:alphaOff val="0"/>
+            </a:schemeClr>
+          </a:solidFill>
+          <a:prstDash val="solid"/>
+          <a:miter lim="800000"/>
+        </a:ln>
+        <a:effectLst/>
+      </dsp:spPr>
+      <dsp:style>
+        <a:lnRef idx="2">
+          <a:scrgbClr r="0" g="0" b="0"/>
+        </a:lnRef>
+        <a:fillRef idx="1">
+          <a:scrgbClr r="0" g="0" b="0"/>
+        </a:fillRef>
+        <a:effectRef idx="0">
+          <a:scrgbClr r="0" g="0" b="0"/>
+        </a:effectRef>
+        <a:fontRef idx="minor">
+          <a:schemeClr val="lt1"/>
+        </a:fontRef>
+      </dsp:style>
+      <dsp:txBody>
+        <a:bodyPr spcFirstLastPara="0" vert="horz" wrap="square" lIns="121920" tIns="121920" rIns="121920" bIns="121920" numCol="1" spcCol="1270" anchor="ctr" anchorCtr="0">
+          <a:noAutofit/>
+        </a:bodyPr>
+        <a:lstStyle/>
+        <a:p>
+          <a:pPr marL="0" lvl="0" indent="0" algn="l" defTabSz="1422400">
+            <a:lnSpc>
+              <a:spcPct val="90000"/>
+            </a:lnSpc>
+            <a:spcBef>
+              <a:spcPct val="0"/>
+            </a:spcBef>
+            <a:spcAft>
+              <a:spcPct val="35000"/>
+            </a:spcAft>
+            <a:buNone/>
+          </a:pPr>
+          <a:r>
+            <a:rPr lang="de-AT" sz="3200" kern="1200" dirty="0"/>
+            <a:t>Resend SMTP, Redis</a:t>
+          </a:r>
+          <a:endParaRPr lang="en-US" sz="3200" kern="1200" dirty="0"/>
+        </a:p>
+      </dsp:txBody>
+      <dsp:txXfrm>
+        <a:off x="49347" y="3590032"/>
+        <a:ext cx="6275119" cy="912186"/>
+      </dsp:txXfrm>
+    </dsp:sp>
+    <dsp:sp modelId="{5C436FEE-7E42-43D8-917F-36DF46A2C58B}">
+      <dsp:nvSpPr>
+        <dsp:cNvPr id="0" name=""/>
+        <dsp:cNvSpPr/>
+      </dsp:nvSpPr>
+      <dsp:spPr>
+        <a:xfrm>
+          <a:off x="0" y="4707084"/>
+          <a:ext cx="6373813" cy="1010880"/>
+        </a:xfrm>
+        <a:prstGeom prst="roundRect">
+          <a:avLst/>
+        </a:prstGeom>
+        <a:solidFill>
+          <a:schemeClr val="accent6">
+            <a:hueOff val="0"/>
+            <a:satOff val="0"/>
+            <a:lumOff val="0"/>
+            <a:alphaOff val="0"/>
+          </a:schemeClr>
+        </a:solidFill>
+        <a:ln w="12700" cap="flat" cmpd="sng" algn="ctr">
+          <a:solidFill>
+            <a:schemeClr val="lt1">
+              <a:hueOff val="0"/>
+              <a:satOff val="0"/>
+              <a:lumOff val="0"/>
+              <a:alphaOff val="0"/>
+            </a:schemeClr>
+          </a:solidFill>
+          <a:prstDash val="solid"/>
+          <a:miter lim="800000"/>
+        </a:ln>
+        <a:effectLst/>
+      </dsp:spPr>
+      <dsp:style>
+        <a:lnRef idx="2">
+          <a:scrgbClr r="0" g="0" b="0"/>
+        </a:lnRef>
+        <a:fillRef idx="1">
+          <a:scrgbClr r="0" g="0" b="0"/>
+        </a:fillRef>
+        <a:effectRef idx="0">
+          <a:scrgbClr r="0" g="0" b="0"/>
+        </a:effectRef>
+        <a:fontRef idx="minor">
+          <a:schemeClr val="lt1"/>
+        </a:fontRef>
+      </dsp:style>
+      <dsp:txBody>
+        <a:bodyPr spcFirstLastPara="0" vert="horz" wrap="square" lIns="121920" tIns="121920" rIns="121920" bIns="121920" numCol="1" spcCol="1270" anchor="ctr" anchorCtr="0">
+          <a:noAutofit/>
+        </a:bodyPr>
+        <a:lstStyle/>
+        <a:p>
+          <a:pPr marL="0" lvl="0" indent="0" algn="l" defTabSz="1422400">
+            <a:lnSpc>
+              <a:spcPct val="90000"/>
+            </a:lnSpc>
+            <a:spcBef>
+              <a:spcPct val="0"/>
+            </a:spcBef>
+            <a:spcAft>
+              <a:spcPct val="35000"/>
+            </a:spcAft>
+            <a:buNone/>
+          </a:pPr>
+          <a:r>
+            <a:rPr lang="de-AT" sz="3200" kern="1200"/>
+            <a:t>Dockerisiert</a:t>
+          </a:r>
+          <a:endParaRPr lang="en-US" sz="3200" kern="1200"/>
+        </a:p>
+      </dsp:txBody>
+      <dsp:txXfrm>
+        <a:off x="49347" y="4756431"/>
+        <a:ext cx="6275119" cy="912186"/>
+      </dsp:txXfrm>
+    </dsp:sp>
+  </dsp:spTree>
+</dsp:drawing>
+</file>
+
 <file path=ppt/diagrams/layout1.xml><?xml version="1.0" encoding="utf-8"?>
 <dgm:layoutDef xmlns:dgm="http://schemas.openxmlformats.org/drawingml/2006/diagram" xmlns:a="http://schemas.openxmlformats.org/drawingml/2006/main" uniqueId="urn:microsoft.com/office/officeart/2018/2/layout/IconLabelList">
   <dgm:title val="Icon Label List"/>
@@ -3830,7 +5690,1208 @@
 </dgm:layoutDef>
 </file>
 
+<file path=ppt/diagrams/layout2.xml><?xml version="1.0" encoding="utf-8"?>
+<dgm:layoutDef xmlns:dgm="http://schemas.openxmlformats.org/drawingml/2006/diagram" xmlns:a="http://schemas.openxmlformats.org/drawingml/2006/main" uniqueId="urn:microsoft.com/office/officeart/2005/8/layout/vList2">
+  <dgm:title val=""/>
+  <dgm:desc val=""/>
+  <dgm:catLst>
+    <dgm:cat type="list" pri="3000"/>
+    <dgm:cat type="convert" pri="1000"/>
+  </dgm:catLst>
+  <dgm:sampData>
+    <dgm:dataModel>
+      <dgm:ptLst>
+        <dgm:pt modelId="0" type="doc"/>
+        <dgm:pt modelId="1">
+          <dgm:prSet phldr="1"/>
+        </dgm:pt>
+        <dgm:pt modelId="11">
+          <dgm:prSet phldr="1"/>
+        </dgm:pt>
+        <dgm:pt modelId="2">
+          <dgm:prSet phldr="1"/>
+        </dgm:pt>
+        <dgm:pt modelId="21">
+          <dgm:prSet phldr="1"/>
+        </dgm:pt>
+      </dgm:ptLst>
+      <dgm:cxnLst>
+        <dgm:cxn modelId="4" srcId="0" destId="1" srcOrd="0" destOrd="0"/>
+        <dgm:cxn modelId="5" srcId="0" destId="2" srcOrd="1" destOrd="0"/>
+        <dgm:cxn modelId="12" srcId="1" destId="11" srcOrd="0" destOrd="0"/>
+        <dgm:cxn modelId="23" srcId="2" destId="21" srcOrd="0" destOrd="0"/>
+      </dgm:cxnLst>
+      <dgm:bg/>
+      <dgm:whole/>
+    </dgm:dataModel>
+  </dgm:sampData>
+  <dgm:styleData>
+    <dgm:dataModel>
+      <dgm:ptLst>
+        <dgm:pt modelId="0" type="doc"/>
+        <dgm:pt modelId="1"/>
+        <dgm:pt modelId="2"/>
+      </dgm:ptLst>
+      <dgm:cxnLst>
+        <dgm:cxn modelId="3" srcId="0" destId="1" srcOrd="0" destOrd="0"/>
+        <dgm:cxn modelId="4" srcId="0" destId="2" srcOrd="1" destOrd="0"/>
+      </dgm:cxnLst>
+      <dgm:bg/>
+      <dgm:whole/>
+    </dgm:dataModel>
+  </dgm:styleData>
+  <dgm:clrData>
+    <dgm:dataModel>
+      <dgm:ptLst>
+        <dgm:pt modelId="0" type="doc"/>
+        <dgm:pt modelId="1"/>
+        <dgm:pt modelId="2"/>
+        <dgm:pt modelId="3"/>
+        <dgm:pt modelId="4"/>
+      </dgm:ptLst>
+      <dgm:cxnLst>
+        <dgm:cxn modelId="5" srcId="0" destId="1" srcOrd="0" destOrd="0"/>
+        <dgm:cxn modelId="6" srcId="0" destId="2" srcOrd="1" destOrd="0"/>
+        <dgm:cxn modelId="7" srcId="0" destId="3" srcOrd="2" destOrd="0"/>
+        <dgm:cxn modelId="8" srcId="0" destId="4" srcOrd="3" destOrd="0"/>
+      </dgm:cxnLst>
+      <dgm:bg/>
+      <dgm:whole/>
+    </dgm:dataModel>
+  </dgm:clrData>
+  <dgm:layoutNode name="linear">
+    <dgm:varLst>
+      <dgm:animLvl val="lvl"/>
+      <dgm:resizeHandles val="exact"/>
+    </dgm:varLst>
+    <dgm:alg type="lin">
+      <dgm:param type="linDir" val="fromT"/>
+      <dgm:param type="vertAlign" val="mid"/>
+    </dgm:alg>
+    <dgm:shape xmlns:r="http://schemas.openxmlformats.org/officeDocument/2006/relationships" r:blip="">
+      <dgm:adjLst/>
+    </dgm:shape>
+    <dgm:presOf/>
+    <dgm:constrLst>
+      <dgm:constr type="w" for="ch" forName="parentText" refType="w"/>
+      <dgm:constr type="h" for="ch" forName="parentText" refType="primFontSz" refFor="ch" refForName="parentText" fact="0.52"/>
+      <dgm:constr type="w" for="ch" forName="childText" refType="w"/>
+      <dgm:constr type="h" for="ch" forName="childText" refType="primFontSz" refFor="ch" refForName="parentText" fact="0.46"/>
+      <dgm:constr type="h" for="ch" forName="parentText" op="equ"/>
+      <dgm:constr type="primFontSz" for="ch" forName="parentText" op="equ" val="65"/>
+      <dgm:constr type="primFontSz" for="ch" forName="childText" refType="primFontSz" refFor="ch" refForName="parentText" op="equ"/>
+      <dgm:constr type="h" for="ch" forName="spacer" refType="primFontSz" refFor="ch" refForName="parentText" fact="0.08"/>
+    </dgm:constrLst>
+    <dgm:ruleLst>
+      <dgm:rule type="primFontSz" for="ch" forName="parentText" val="5" fact="NaN" max="NaN"/>
+    </dgm:ruleLst>
+    <dgm:forEach name="Name0" axis="ch" ptType="node">
+      <dgm:layoutNode name="parentText" styleLbl="node1">
+        <dgm:varLst>
+          <dgm:chMax val="0"/>
+          <dgm:bulletEnabled val="1"/>
+        </dgm:varLst>
+        <dgm:alg type="tx">
+          <dgm:param type="parTxLTRAlign" val="l"/>
+          <dgm:param type="parTxRTLAlign" val="r"/>
+        </dgm:alg>
+        <dgm:shape xmlns:r="http://schemas.openxmlformats.org/officeDocument/2006/relationships" type="roundRect" r:blip="">
+          <dgm:adjLst/>
+        </dgm:shape>
+        <dgm:presOf axis="self"/>
+        <dgm:constrLst>
+          <dgm:constr type="tMarg" refType="primFontSz" fact="0.3"/>
+          <dgm:constr type="bMarg" refType="primFontSz" fact="0.3"/>
+          <dgm:constr type="lMarg" refType="primFontSz" fact="0.3"/>
+          <dgm:constr type="rMarg" refType="primFontSz" fact="0.3"/>
+        </dgm:constrLst>
+        <dgm:ruleLst>
+          <dgm:rule type="h" val="INF" fact="NaN" max="NaN"/>
+        </dgm:ruleLst>
+      </dgm:layoutNode>
+      <dgm:choose name="Name1">
+        <dgm:if name="Name2" axis="ch" ptType="node" func="cnt" op="gte" val="1">
+          <dgm:layoutNode name="childText" styleLbl="revTx">
+            <dgm:varLst>
+              <dgm:bulletEnabled val="1"/>
+            </dgm:varLst>
+            <dgm:alg type="tx">
+              <dgm:param type="stBulletLvl" val="1"/>
+              <dgm:param type="lnSpAfChP" val="20"/>
+            </dgm:alg>
+            <dgm:shape xmlns:r="http://schemas.openxmlformats.org/officeDocument/2006/relationships" type="rect" r:blip="">
+              <dgm:adjLst/>
+            </dgm:shape>
+            <dgm:presOf axis="des" ptType="node"/>
+            <dgm:constrLst>
+              <dgm:constr type="tMarg" refType="primFontSz" fact="0.1"/>
+              <dgm:constr type="bMarg" refType="primFontSz" fact="0.1"/>
+              <dgm:constr type="lMarg" refType="w" fact="0.09"/>
+            </dgm:constrLst>
+            <dgm:ruleLst>
+              <dgm:rule type="h" val="INF" fact="NaN" max="NaN"/>
+            </dgm:ruleLst>
+          </dgm:layoutNode>
+        </dgm:if>
+        <dgm:else name="Name3">
+          <dgm:choose name="Name4">
+            <dgm:if name="Name5" axis="par ch" ptType="doc node" func="cnt" op="gte" val="2">
+              <dgm:forEach name="Name6" axis="followSib" ptType="sibTrans" cnt="1">
+                <dgm:layoutNode name="spacer">
+                  <dgm:alg type="sp"/>
+                  <dgm:shape xmlns:r="http://schemas.openxmlformats.org/officeDocument/2006/relationships" r:blip="">
+                    <dgm:adjLst/>
+                  </dgm:shape>
+                  <dgm:presOf/>
+                  <dgm:constrLst/>
+                  <dgm:ruleLst/>
+                </dgm:layoutNode>
+              </dgm:forEach>
+            </dgm:if>
+            <dgm:else name="Name7"/>
+          </dgm:choose>
+        </dgm:else>
+      </dgm:choose>
+    </dgm:forEach>
+  </dgm:layoutNode>
+</dgm:layoutDef>
+</file>
+
 <file path=ppt/diagrams/quickStyle1.xml><?xml version="1.0" encoding="utf-8"?>
+<dgm:styleDef xmlns:dgm="http://schemas.openxmlformats.org/drawingml/2006/diagram" xmlns:a="http://schemas.openxmlformats.org/drawingml/2006/main" uniqueId="urn:microsoft.com/office/officeart/2005/8/quickstyle/simple1">
+  <dgm:title val=""/>
+  <dgm:desc val=""/>
+  <dgm:catLst>
+    <dgm:cat type="simple" pri="10100"/>
+  </dgm:catLst>
+  <dgm:scene3d>
+    <a:camera prst="orthographicFront"/>
+    <a:lightRig rig="threePt" dir="t"/>
+  </dgm:scene3d>
+  <dgm:styleLbl name="node0">
+    <dgm:scene3d>
+      <a:camera prst="orthographicFront"/>
+      <a:lightRig rig="threePt" dir="t"/>
+    </dgm:scene3d>
+    <dgm:sp3d/>
+    <dgm:txPr/>
+    <dgm:style>
+      <a:lnRef idx="2">
+        <a:scrgbClr r="0" g="0" b="0"/>
+      </a:lnRef>
+      <a:fillRef idx="1">
+        <a:scrgbClr r="0" g="0" b="0"/>
+      </a:fillRef>
+      <a:effectRef idx="0">
+        <a:scrgbClr r="0" g="0" b="0"/>
+      </a:effectRef>
+      <a:fontRef idx="minor">
+        <a:schemeClr val="lt1"/>
+      </a:fontRef>
+    </dgm:style>
+  </dgm:styleLbl>
+  <dgm:styleLbl name="lnNode1">
+    <dgm:scene3d>
+      <a:camera prst="orthographicFront"/>
+      <a:lightRig rig="threePt" dir="t"/>
+    </dgm:scene3d>
+    <dgm:sp3d/>
+    <dgm:txPr/>
+    <dgm:style>
+      <a:lnRef idx="2">
+        <a:scrgbClr r="0" g="0" b="0"/>
+      </a:lnRef>
+      <a:fillRef idx="1">
+        <a:scrgbClr r="0" g="0" b="0"/>
+      </a:fillRef>
+      <a:effectRef idx="0">
+        <a:scrgbClr r="0" g="0" b="0"/>
+      </a:effectRef>
+      <a:fontRef idx="minor">
+        <a:schemeClr val="lt1"/>
+      </a:fontRef>
+    </dgm:style>
+  </dgm:styleLbl>
+  <dgm:styleLbl name="vennNode1">
+    <dgm:scene3d>
+      <a:camera prst="orthographicFront"/>
+      <a:lightRig rig="threePt" dir="t"/>
+    </dgm:scene3d>
+    <dgm:sp3d/>
+    <dgm:txPr/>
+    <dgm:style>
+      <a:lnRef idx="2">
+        <a:scrgbClr r="0" g="0" b="0"/>
+      </a:lnRef>
+      <a:fillRef idx="1">
+        <a:scrgbClr r="0" g="0" b="0"/>
+      </a:fillRef>
+      <a:effectRef idx="0">
+        <a:scrgbClr r="0" g="0" b="0"/>
+      </a:effectRef>
+      <a:fontRef idx="minor">
+        <a:schemeClr val="tx1"/>
+      </a:fontRef>
+    </dgm:style>
+  </dgm:styleLbl>
+  <dgm:styleLbl name="alignNode1">
+    <dgm:scene3d>
+      <a:camera prst="orthographicFront"/>
+      <a:lightRig rig="threePt" dir="t"/>
+    </dgm:scene3d>
+    <dgm:sp3d/>
+    <dgm:txPr/>
+    <dgm:style>
+      <a:lnRef idx="2">
+        <a:scrgbClr r="0" g="0" b="0"/>
+      </a:lnRef>
+      <a:fillRef idx="1">
+        <a:scrgbClr r="0" g="0" b="0"/>
+      </a:fillRef>
+      <a:effectRef idx="0">
+        <a:scrgbClr r="0" g="0" b="0"/>
+      </a:effectRef>
+      <a:fontRef idx="minor">
+        <a:schemeClr val="lt1"/>
+      </a:fontRef>
+    </dgm:style>
+  </dgm:styleLbl>
+  <dgm:styleLbl name="node1">
+    <dgm:scene3d>
+      <a:camera prst="orthographicFront"/>
+      <a:lightRig rig="threePt" dir="t"/>
+    </dgm:scene3d>
+    <dgm:sp3d/>
+    <dgm:txPr/>
+    <dgm:style>
+      <a:lnRef idx="2">
+        <a:scrgbClr r="0" g="0" b="0"/>
+      </a:lnRef>
+      <a:fillRef idx="1">
+        <a:scrgbClr r="0" g="0" b="0"/>
+      </a:fillRef>
+      <a:effectRef idx="0">
+        <a:scrgbClr r="0" g="0" b="0"/>
+      </a:effectRef>
+      <a:fontRef idx="minor">
+        <a:schemeClr val="lt1"/>
+      </a:fontRef>
+    </dgm:style>
+  </dgm:styleLbl>
+  <dgm:styleLbl name="node2">
+    <dgm:scene3d>
+      <a:camera prst="orthographicFront"/>
+      <a:lightRig rig="threePt" dir="t"/>
+    </dgm:scene3d>
+    <dgm:sp3d/>
+    <dgm:txPr/>
+    <dgm:style>
+      <a:lnRef idx="2">
+        <a:scrgbClr r="0" g="0" b="0"/>
+      </a:lnRef>
+      <a:fillRef idx="1">
+        <a:scrgbClr r="0" g="0" b="0"/>
+      </a:fillRef>
+      <a:effectRef idx="0">
+        <a:scrgbClr r="0" g="0" b="0"/>
+      </a:effectRef>
+      <a:fontRef idx="minor">
+        <a:schemeClr val="lt1"/>
+      </a:fontRef>
+    </dgm:style>
+  </dgm:styleLbl>
+  <dgm:styleLbl name="node3">
+    <dgm:scene3d>
+      <a:camera prst="orthographicFront"/>
+      <a:lightRig rig="threePt" dir="t"/>
+    </dgm:scene3d>
+    <dgm:sp3d/>
+    <dgm:txPr/>
+    <dgm:style>
+      <a:lnRef idx="2">
+        <a:scrgbClr r="0" g="0" b="0"/>
+      </a:lnRef>
+      <a:fillRef idx="1">
+        <a:scrgbClr r="0" g="0" b="0"/>
+      </a:fillRef>
+      <a:effectRef idx="0">
+        <a:scrgbClr r="0" g="0" b="0"/>
+      </a:effectRef>
+      <a:fontRef idx="minor">
+        <a:schemeClr val="lt1"/>
+      </a:fontRef>
+    </dgm:style>
+  </dgm:styleLbl>
+  <dgm:styleLbl name="node4">
+    <dgm:scene3d>
+      <a:camera prst="orthographicFront"/>
+      <a:lightRig rig="threePt" dir="t"/>
+    </dgm:scene3d>
+    <dgm:sp3d/>
+    <dgm:txPr/>
+    <dgm:style>
+      <a:lnRef idx="2">
+        <a:scrgbClr r="0" g="0" b="0"/>
+      </a:lnRef>
+      <a:fillRef idx="1">
+        <a:scrgbClr r="0" g="0" b="0"/>
+      </a:fillRef>
+      <a:effectRef idx="0">
+        <a:scrgbClr r="0" g="0" b="0"/>
+      </a:effectRef>
+      <a:fontRef idx="minor">
+        <a:schemeClr val="lt1"/>
+      </a:fontRef>
+    </dgm:style>
+  </dgm:styleLbl>
+  <dgm:styleLbl name="fgImgPlace1">
+    <dgm:scene3d>
+      <a:camera prst="orthographicFront"/>
+      <a:lightRig rig="threePt" dir="t"/>
+    </dgm:scene3d>
+    <dgm:sp3d/>
+    <dgm:txPr/>
+    <dgm:style>
+      <a:lnRef idx="2">
+        <a:scrgbClr r="0" g="0" b="0"/>
+      </a:lnRef>
+      <a:fillRef idx="1">
+        <a:scrgbClr r="0" g="0" b="0"/>
+      </a:fillRef>
+      <a:effectRef idx="0">
+        <a:scrgbClr r="0" g="0" b="0"/>
+      </a:effectRef>
+      <a:fontRef idx="minor"/>
+    </dgm:style>
+  </dgm:styleLbl>
+  <dgm:styleLbl name="alignImgPlace1">
+    <dgm:scene3d>
+      <a:camera prst="orthographicFront"/>
+      <a:lightRig rig="threePt" dir="t"/>
+    </dgm:scene3d>
+    <dgm:sp3d/>
+    <dgm:txPr/>
+    <dgm:style>
+      <a:lnRef idx="2">
+        <a:scrgbClr r="0" g="0" b="0"/>
+      </a:lnRef>
+      <a:fillRef idx="1">
+        <a:scrgbClr r="0" g="0" b="0"/>
+      </a:fillRef>
+      <a:effectRef idx="0">
+        <a:scrgbClr r="0" g="0" b="0"/>
+      </a:effectRef>
+      <a:fontRef idx="minor"/>
+    </dgm:style>
+  </dgm:styleLbl>
+  <dgm:styleLbl name="bgImgPlace1">
+    <dgm:scene3d>
+      <a:camera prst="orthographicFront"/>
+      <a:lightRig rig="threePt" dir="t"/>
+    </dgm:scene3d>
+    <dgm:sp3d/>
+    <dgm:txPr/>
+    <dgm:style>
+      <a:lnRef idx="2">
+        <a:scrgbClr r="0" g="0" b="0"/>
+      </a:lnRef>
+      <a:fillRef idx="1">
+        <a:scrgbClr r="0" g="0" b="0"/>
+      </a:fillRef>
+      <a:effectRef idx="0">
+        <a:scrgbClr r="0" g="0" b="0"/>
+      </a:effectRef>
+      <a:fontRef idx="minor"/>
+    </dgm:style>
+  </dgm:styleLbl>
+  <dgm:styleLbl name="sibTrans2D1">
+    <dgm:scene3d>
+      <a:camera prst="orthographicFront"/>
+      <a:lightRig rig="threePt" dir="t"/>
+    </dgm:scene3d>
+    <dgm:sp3d/>
+    <dgm:txPr/>
+    <dgm:style>
+      <a:lnRef idx="0">
+        <a:scrgbClr r="0" g="0" b="0"/>
+      </a:lnRef>
+      <a:fillRef idx="1">
+        <a:scrgbClr r="0" g="0" b="0"/>
+      </a:fillRef>
+      <a:effectRef idx="0">
+        <a:scrgbClr r="0" g="0" b="0"/>
+      </a:effectRef>
+      <a:fontRef idx="minor">
+        <a:schemeClr val="lt1"/>
+      </a:fontRef>
+    </dgm:style>
+  </dgm:styleLbl>
+  <dgm:styleLbl name="fgSibTrans2D1">
+    <dgm:scene3d>
+      <a:camera prst="orthographicFront"/>
+      <a:lightRig rig="threePt" dir="t"/>
+    </dgm:scene3d>
+    <dgm:sp3d/>
+    <dgm:txPr/>
+    <dgm:style>
+      <a:lnRef idx="0">
+        <a:scrgbClr r="0" g="0" b="0"/>
+      </a:lnRef>
+      <a:fillRef idx="1">
+        <a:scrgbClr r="0" g="0" b="0"/>
+      </a:fillRef>
+      <a:effectRef idx="0">
+        <a:scrgbClr r="0" g="0" b="0"/>
+      </a:effectRef>
+      <a:fontRef idx="minor">
+        <a:schemeClr val="lt1"/>
+      </a:fontRef>
+    </dgm:style>
+  </dgm:styleLbl>
+  <dgm:styleLbl name="bgSibTrans2D1">
+    <dgm:scene3d>
+      <a:camera prst="orthographicFront"/>
+      <a:lightRig rig="threePt" dir="t"/>
+    </dgm:scene3d>
+    <dgm:sp3d/>
+    <dgm:txPr/>
+    <dgm:style>
+      <a:lnRef idx="0">
+        <a:scrgbClr r="0" g="0" b="0"/>
+      </a:lnRef>
+      <a:fillRef idx="1">
+        <a:scrgbClr r="0" g="0" b="0"/>
+      </a:fillRef>
+      <a:effectRef idx="0">
+        <a:scrgbClr r="0" g="0" b="0"/>
+      </a:effectRef>
+      <a:fontRef idx="minor">
+        <a:schemeClr val="lt1"/>
+      </a:fontRef>
+    </dgm:style>
+  </dgm:styleLbl>
+  <dgm:styleLbl name="sibTrans1D1">
+    <dgm:scene3d>
+      <a:camera prst="orthographicFront"/>
+      <a:lightRig rig="threePt" dir="t"/>
+    </dgm:scene3d>
+    <dgm:sp3d/>
+    <dgm:txPr/>
+    <dgm:style>
+      <a:lnRef idx="1">
+        <a:scrgbClr r="0" g="0" b="0"/>
+      </a:lnRef>
+      <a:fillRef idx="0">
+        <a:scrgbClr r="0" g="0" b="0"/>
+      </a:fillRef>
+      <a:effectRef idx="0">
+        <a:scrgbClr r="0" g="0" b="0"/>
+      </a:effectRef>
+      <a:fontRef idx="minor"/>
+    </dgm:style>
+  </dgm:styleLbl>
+  <dgm:styleLbl name="callout">
+    <dgm:scene3d>
+      <a:camera prst="orthographicFront"/>
+      <a:lightRig rig="threePt" dir="t"/>
+    </dgm:scene3d>
+    <dgm:sp3d/>
+    <dgm:txPr/>
+    <dgm:style>
+      <a:lnRef idx="2">
+        <a:scrgbClr r="0" g="0" b="0"/>
+      </a:lnRef>
+      <a:fillRef idx="1">
+        <a:scrgbClr r="0" g="0" b="0"/>
+      </a:fillRef>
+      <a:effectRef idx="0">
+        <a:scrgbClr r="0" g="0" b="0"/>
+      </a:effectRef>
+      <a:fontRef idx="minor"/>
+    </dgm:style>
+  </dgm:styleLbl>
+  <dgm:styleLbl name="asst0">
+    <dgm:scene3d>
+      <a:camera prst="orthographicFront"/>
+      <a:lightRig rig="threePt" dir="t"/>
+    </dgm:scene3d>
+    <dgm:sp3d/>
+    <dgm:txPr/>
+    <dgm:style>
+      <a:lnRef idx="2">
+        <a:scrgbClr r="0" g="0" b="0"/>
+      </a:lnRef>
+      <a:fillRef idx="1">
+        <a:scrgbClr r="0" g="0" b="0"/>
+      </a:fillRef>
+      <a:effectRef idx="0">
+        <a:scrgbClr r="0" g="0" b="0"/>
+      </a:effectRef>
+      <a:fontRef idx="minor">
+        <a:schemeClr val="lt1"/>
+      </a:fontRef>
+    </dgm:style>
+  </dgm:styleLbl>
+  <dgm:styleLbl name="asst1">
+    <dgm:scene3d>
+      <a:camera prst="orthographicFront"/>
+      <a:lightRig rig="threePt" dir="t"/>
+    </dgm:scene3d>
+    <dgm:sp3d/>
+    <dgm:txPr/>
+    <dgm:style>
+      <a:lnRef idx="2">
+        <a:scrgbClr r="0" g="0" b="0"/>
+      </a:lnRef>
+      <a:fillRef idx="1">
+        <a:scrgbClr r="0" g="0" b="0"/>
+      </a:fillRef>
+      <a:effectRef idx="0">
+        <a:scrgbClr r="0" g="0" b="0"/>
+      </a:effectRef>
+      <a:fontRef idx="minor">
+        <a:schemeClr val="lt1"/>
+      </a:fontRef>
+    </dgm:style>
+  </dgm:styleLbl>
+  <dgm:styleLbl name="asst2">
+    <dgm:scene3d>
+      <a:camera prst="orthographicFront"/>
+      <a:lightRig rig="threePt" dir="t"/>
+    </dgm:scene3d>
+    <dgm:sp3d/>
+    <dgm:txPr/>
+    <dgm:style>
+      <a:lnRef idx="2">
+        <a:scrgbClr r="0" g="0" b="0"/>
+      </a:lnRef>
+      <a:fillRef idx="1">
+        <a:scrgbClr r="0" g="0" b="0"/>
+      </a:fillRef>
+      <a:effectRef idx="0">
+        <a:scrgbClr r="0" g="0" b="0"/>
+      </a:effectRef>
+      <a:fontRef idx="minor">
+        <a:schemeClr val="lt1"/>
+      </a:fontRef>
+    </dgm:style>
+  </dgm:styleLbl>
+  <dgm:styleLbl name="asst3">
+    <dgm:scene3d>
+      <a:camera prst="orthographicFront"/>
+      <a:lightRig rig="threePt" dir="t"/>
+    </dgm:scene3d>
+    <dgm:sp3d/>
+    <dgm:txPr/>
+    <dgm:style>
+      <a:lnRef idx="2">
+        <a:scrgbClr r="0" g="0" b="0"/>
+      </a:lnRef>
+      <a:fillRef idx="1">
+        <a:scrgbClr r="0" g="0" b="0"/>
+      </a:fillRef>
+      <a:effectRef idx="0">
+        <a:scrgbClr r="0" g="0" b="0"/>
+      </a:effectRef>
+      <a:fontRef idx="minor">
+        <a:schemeClr val="lt1"/>
+      </a:fontRef>
+    </dgm:style>
+  </dgm:styleLbl>
+  <dgm:styleLbl name="asst4">
+    <dgm:scene3d>
+      <a:camera prst="orthographicFront"/>
+      <a:lightRig rig="threePt" dir="t"/>
+    </dgm:scene3d>
+    <dgm:sp3d/>
+    <dgm:txPr/>
+    <dgm:style>
+      <a:lnRef idx="2">
+        <a:scrgbClr r="0" g="0" b="0"/>
+      </a:lnRef>
+      <a:fillRef idx="1">
+        <a:scrgbClr r="0" g="0" b="0"/>
+      </a:fillRef>
+      <a:effectRef idx="0">
+        <a:scrgbClr r="0" g="0" b="0"/>
+      </a:effectRef>
+      <a:fontRef idx="minor">
+        <a:schemeClr val="lt1"/>
+      </a:fontRef>
+    </dgm:style>
+  </dgm:styleLbl>
+  <dgm:styleLbl name="parChTrans2D1">
+    <dgm:scene3d>
+      <a:camera prst="orthographicFront"/>
+      <a:lightRig rig="threePt" dir="t"/>
+    </dgm:scene3d>
+    <dgm:sp3d/>
+    <dgm:txPr/>
+    <dgm:style>
+      <a:lnRef idx="2">
+        <a:scrgbClr r="0" g="0" b="0"/>
+      </a:lnRef>
+      <a:fillRef idx="1">
+        <a:scrgbClr r="0" g="0" b="0"/>
+      </a:fillRef>
+      <a:effectRef idx="0">
+        <a:scrgbClr r="0" g="0" b="0"/>
+      </a:effectRef>
+      <a:fontRef idx="minor">
+        <a:schemeClr val="lt1"/>
+      </a:fontRef>
+    </dgm:style>
+  </dgm:styleLbl>
+  <dgm:styleLbl name="parChTrans2D2">
+    <dgm:scene3d>
+      <a:camera prst="orthographicFront"/>
+      <a:lightRig rig="threePt" dir="t"/>
+    </dgm:scene3d>
+    <dgm:sp3d/>
+    <dgm:txPr/>
+    <dgm:style>
+      <a:lnRef idx="2">
+        <a:scrgbClr r="0" g="0" b="0"/>
+      </a:lnRef>
+      <a:fillRef idx="1">
+        <a:scrgbClr r="0" g="0" b="0"/>
+      </a:fillRef>
+      <a:effectRef idx="0">
+        <a:scrgbClr r="0" g="0" b="0"/>
+      </a:effectRef>
+      <a:fontRef idx="minor">
+        <a:schemeClr val="lt1"/>
+      </a:fontRef>
+    </dgm:style>
+  </dgm:styleLbl>
+  <dgm:styleLbl name="parChTrans2D3">
+    <dgm:scene3d>
+      <a:camera prst="orthographicFront"/>
+      <a:lightRig rig="threePt" dir="t"/>
+    </dgm:scene3d>
+    <dgm:sp3d/>
+    <dgm:txPr/>
+    <dgm:style>
+      <a:lnRef idx="2">
+        <a:scrgbClr r="0" g="0" b="0"/>
+      </a:lnRef>
+      <a:fillRef idx="1">
+        <a:scrgbClr r="0" g="0" b="0"/>
+      </a:fillRef>
+      <a:effectRef idx="0">
+        <a:scrgbClr r="0" g="0" b="0"/>
+      </a:effectRef>
+      <a:fontRef idx="minor">
+        <a:schemeClr val="lt1"/>
+      </a:fontRef>
+    </dgm:style>
+  </dgm:styleLbl>
+  <dgm:styleLbl name="parChTrans2D4">
+    <dgm:scene3d>
+      <a:camera prst="orthographicFront"/>
+      <a:lightRig rig="threePt" dir="t"/>
+    </dgm:scene3d>
+    <dgm:sp3d/>
+    <dgm:txPr/>
+    <dgm:style>
+      <a:lnRef idx="2">
+        <a:scrgbClr r="0" g="0" b="0"/>
+      </a:lnRef>
+      <a:fillRef idx="1">
+        <a:scrgbClr r="0" g="0" b="0"/>
+      </a:fillRef>
+      <a:effectRef idx="0">
+        <a:scrgbClr r="0" g="0" b="0"/>
+      </a:effectRef>
+      <a:fontRef idx="minor">
+        <a:schemeClr val="lt1"/>
+      </a:fontRef>
+    </dgm:style>
+  </dgm:styleLbl>
+  <dgm:styleLbl name="parChTrans1D1">
+    <dgm:scene3d>
+      <a:camera prst="orthographicFront"/>
+      <a:lightRig rig="threePt" dir="t"/>
+    </dgm:scene3d>
+    <dgm:sp3d/>
+    <dgm:txPr/>
+    <dgm:style>
+      <a:lnRef idx="2">
+        <a:scrgbClr r="0" g="0" b="0"/>
+      </a:lnRef>
+      <a:fillRef idx="0">
+        <a:scrgbClr r="0" g="0" b="0"/>
+      </a:fillRef>
+      <a:effectRef idx="0">
+        <a:scrgbClr r="0" g="0" b="0"/>
+      </a:effectRef>
+      <a:fontRef idx="minor"/>
+    </dgm:style>
+  </dgm:styleLbl>
+  <dgm:styleLbl name="parChTrans1D2">
+    <dgm:scene3d>
+      <a:camera prst="orthographicFront"/>
+      <a:lightRig rig="threePt" dir="t"/>
+    </dgm:scene3d>
+    <dgm:sp3d/>
+    <dgm:txPr/>
+    <dgm:style>
+      <a:lnRef idx="2">
+        <a:scrgbClr r="0" g="0" b="0"/>
+      </a:lnRef>
+      <a:fillRef idx="0">
+        <a:scrgbClr r="0" g="0" b="0"/>
+      </a:fillRef>
+      <a:effectRef idx="0">
+        <a:scrgbClr r="0" g="0" b="0"/>
+      </a:effectRef>
+      <a:fontRef idx="minor"/>
+    </dgm:style>
+  </dgm:styleLbl>
+  <dgm:styleLbl name="parChTrans1D3">
+    <dgm:scene3d>
+      <a:camera prst="orthographicFront"/>
+      <a:lightRig rig="threePt" dir="t"/>
+    </dgm:scene3d>
+    <dgm:sp3d/>
+    <dgm:txPr/>
+    <dgm:style>
+      <a:lnRef idx="2">
+        <a:scrgbClr r="0" g="0" b="0"/>
+      </a:lnRef>
+      <a:fillRef idx="0">
+        <a:scrgbClr r="0" g="0" b="0"/>
+      </a:fillRef>
+      <a:effectRef idx="0">
+        <a:scrgbClr r="0" g="0" b="0"/>
+      </a:effectRef>
+      <a:fontRef idx="minor"/>
+    </dgm:style>
+  </dgm:styleLbl>
+  <dgm:styleLbl name="parChTrans1D4">
+    <dgm:scene3d>
+      <a:camera prst="orthographicFront"/>
+      <a:lightRig rig="threePt" dir="t"/>
+    </dgm:scene3d>
+    <dgm:sp3d/>
+    <dgm:txPr/>
+    <dgm:style>
+      <a:lnRef idx="2">
+        <a:scrgbClr r="0" g="0" b="0"/>
+      </a:lnRef>
+      <a:fillRef idx="0">
+        <a:scrgbClr r="0" g="0" b="0"/>
+      </a:fillRef>
+      <a:effectRef idx="0">
+        <a:scrgbClr r="0" g="0" b="0"/>
+      </a:effectRef>
+      <a:fontRef idx="minor"/>
+    </dgm:style>
+  </dgm:styleLbl>
+  <dgm:styleLbl name="fgAcc1">
+    <dgm:scene3d>
+      <a:camera prst="orthographicFront"/>
+      <a:lightRig rig="threePt" dir="t"/>
+    </dgm:scene3d>
+    <dgm:sp3d/>
+    <dgm:txPr/>
+    <dgm:style>
+      <a:lnRef idx="2">
+        <a:scrgbClr r="0" g="0" b="0"/>
+      </a:lnRef>
+      <a:fillRef idx="1">
+        <a:scrgbClr r="0" g="0" b="0"/>
+      </a:fillRef>
+      <a:effectRef idx="0">
+        <a:scrgbClr r="0" g="0" b="0"/>
+      </a:effectRef>
+      <a:fontRef idx="minor"/>
+    </dgm:style>
+  </dgm:styleLbl>
+  <dgm:styleLbl name="conFgAcc1">
+    <dgm:scene3d>
+      <a:camera prst="orthographicFront"/>
+      <a:lightRig rig="threePt" dir="t"/>
+    </dgm:scene3d>
+    <dgm:sp3d/>
+    <dgm:txPr/>
+    <dgm:style>
+      <a:lnRef idx="2">
+        <a:scrgbClr r="0" g="0" b="0"/>
+      </a:lnRef>
+      <a:fillRef idx="1">
+        <a:scrgbClr r="0" g="0" b="0"/>
+      </a:fillRef>
+      <a:effectRef idx="0">
+        <a:scrgbClr r="0" g="0" b="0"/>
+      </a:effectRef>
+      <a:fontRef idx="minor"/>
+    </dgm:style>
+  </dgm:styleLbl>
+  <dgm:styleLbl name="alignAcc1">
+    <dgm:scene3d>
+      <a:camera prst="orthographicFront"/>
+      <a:lightRig rig="threePt" dir="t"/>
+    </dgm:scene3d>
+    <dgm:sp3d/>
+    <dgm:txPr/>
+    <dgm:style>
+      <a:lnRef idx="2">
+        <a:scrgbClr r="0" g="0" b="0"/>
+      </a:lnRef>
+      <a:fillRef idx="1">
+        <a:scrgbClr r="0" g="0" b="0"/>
+      </a:fillRef>
+      <a:effectRef idx="0">
+        <a:scrgbClr r="0" g="0" b="0"/>
+      </a:effectRef>
+      <a:fontRef idx="minor"/>
+    </dgm:style>
+  </dgm:styleLbl>
+  <dgm:styleLbl name="trAlignAcc1">
+    <dgm:scene3d>
+      <a:camera prst="orthographicFront"/>
+      <a:lightRig rig="threePt" dir="t"/>
+    </dgm:scene3d>
+    <dgm:sp3d/>
+    <dgm:txPr/>
+    <dgm:style>
+      <a:lnRef idx="1">
+        <a:scrgbClr r="0" g="0" b="0"/>
+      </a:lnRef>
+      <a:fillRef idx="1">
+        <a:scrgbClr r="0" g="0" b="0"/>
+      </a:fillRef>
+      <a:effectRef idx="0">
+        <a:scrgbClr r="0" g="0" b="0"/>
+      </a:effectRef>
+      <a:fontRef idx="minor"/>
+    </dgm:style>
+  </dgm:styleLbl>
+  <dgm:styleLbl name="bgAcc1">
+    <dgm:scene3d>
+      <a:camera prst="orthographicFront"/>
+      <a:lightRig rig="threePt" dir="t"/>
+    </dgm:scene3d>
+    <dgm:sp3d/>
+    <dgm:txPr/>
+    <dgm:style>
+      <a:lnRef idx="2">
+        <a:scrgbClr r="0" g="0" b="0"/>
+      </a:lnRef>
+      <a:fillRef idx="1">
+        <a:scrgbClr r="0" g="0" b="0"/>
+      </a:fillRef>
+      <a:effectRef idx="0">
+        <a:scrgbClr r="0" g="0" b="0"/>
+      </a:effectRef>
+      <a:fontRef idx="minor"/>
+    </dgm:style>
+  </dgm:styleLbl>
+  <dgm:styleLbl name="solidFgAcc1">
+    <dgm:scene3d>
+      <a:camera prst="orthographicFront"/>
+      <a:lightRig rig="threePt" dir="t"/>
+    </dgm:scene3d>
+    <dgm:sp3d/>
+    <dgm:txPr/>
+    <dgm:style>
+      <a:lnRef idx="2">
+        <a:scrgbClr r="0" g="0" b="0"/>
+      </a:lnRef>
+      <a:fillRef idx="1">
+        <a:scrgbClr r="0" g="0" b="0"/>
+      </a:fillRef>
+      <a:effectRef idx="0">
+        <a:scrgbClr r="0" g="0" b="0"/>
+      </a:effectRef>
+      <a:fontRef idx="minor"/>
+    </dgm:style>
+  </dgm:styleLbl>
+  <dgm:styleLbl name="solidAlignAcc1">
+    <dgm:scene3d>
+      <a:camera prst="orthographicFront"/>
+      <a:lightRig rig="threePt" dir="t"/>
+    </dgm:scene3d>
+    <dgm:sp3d/>
+    <dgm:txPr/>
+    <dgm:style>
+      <a:lnRef idx="2">
+        <a:scrgbClr r="0" g="0" b="0"/>
+      </a:lnRef>
+      <a:fillRef idx="1">
+        <a:scrgbClr r="0" g="0" b="0"/>
+      </a:fillRef>
+      <a:effectRef idx="0">
+        <a:scrgbClr r="0" g="0" b="0"/>
+      </a:effectRef>
+      <a:fontRef idx="minor"/>
+    </dgm:style>
+  </dgm:styleLbl>
+  <dgm:styleLbl name="solidBgAcc1">
+    <dgm:scene3d>
+      <a:camera prst="orthographicFront"/>
+      <a:lightRig rig="threePt" dir="t"/>
+    </dgm:scene3d>
+    <dgm:sp3d/>
+    <dgm:txPr/>
+    <dgm:style>
+      <a:lnRef idx="2">
+        <a:scrgbClr r="0" g="0" b="0"/>
+      </a:lnRef>
+      <a:fillRef idx="1">
+        <a:scrgbClr r="0" g="0" b="0"/>
+      </a:fillRef>
+      <a:effectRef idx="0">
+        <a:scrgbClr r="0" g="0" b="0"/>
+      </a:effectRef>
+      <a:fontRef idx="minor"/>
+    </dgm:style>
+  </dgm:styleLbl>
+  <dgm:styleLbl name="fgAccFollowNode1">
+    <dgm:scene3d>
+      <a:camera prst="orthographicFront"/>
+      <a:lightRig rig="threePt" dir="t"/>
+    </dgm:scene3d>
+    <dgm:sp3d/>
+    <dgm:txPr/>
+    <dgm:style>
+      <a:lnRef idx="2">
+        <a:scrgbClr r="0" g="0" b="0"/>
+      </a:lnRef>
+      <a:fillRef idx="1">
+        <a:scrgbClr r="0" g="0" b="0"/>
+      </a:fillRef>
+      <a:effectRef idx="0">
+        <a:scrgbClr r="0" g="0" b="0"/>
+      </a:effectRef>
+      <a:fontRef idx="minor"/>
+    </dgm:style>
+  </dgm:styleLbl>
+  <dgm:styleLbl name="alignAccFollowNode1">
+    <dgm:scene3d>
+      <a:camera prst="orthographicFront"/>
+      <a:lightRig rig="threePt" dir="t"/>
+    </dgm:scene3d>
+    <dgm:sp3d/>
+    <dgm:txPr/>
+    <dgm:style>
+      <a:lnRef idx="2">
+        <a:scrgbClr r="0" g="0" b="0"/>
+      </a:lnRef>
+      <a:fillRef idx="1">
+        <a:scrgbClr r="0" g="0" b="0"/>
+      </a:fillRef>
+      <a:effectRef idx="0">
+        <a:scrgbClr r="0" g="0" b="0"/>
+      </a:effectRef>
+      <a:fontRef idx="minor"/>
+    </dgm:style>
+  </dgm:styleLbl>
+  <dgm:styleLbl name="bgAccFollowNode1">
+    <dgm:scene3d>
+      <a:camera prst="orthographicFront"/>
+      <a:lightRig rig="threePt" dir="t"/>
+    </dgm:scene3d>
+    <dgm:sp3d/>
+    <dgm:txPr/>
+    <dgm:style>
+      <a:lnRef idx="2">
+        <a:scrgbClr r="0" g="0" b="0"/>
+      </a:lnRef>
+      <a:fillRef idx="1">
+        <a:scrgbClr r="0" g="0" b="0"/>
+      </a:fillRef>
+      <a:effectRef idx="0">
+        <a:scrgbClr r="0" g="0" b="0"/>
+      </a:effectRef>
+      <a:fontRef idx="minor"/>
+    </dgm:style>
+  </dgm:styleLbl>
+  <dgm:styleLbl name="fgAcc0">
+    <dgm:scene3d>
+      <a:camera prst="orthographicFront"/>
+      <a:lightRig rig="threePt" dir="t"/>
+    </dgm:scene3d>
+    <dgm:sp3d/>
+    <dgm:txPr/>
+    <dgm:style>
+      <a:lnRef idx="2">
+        <a:scrgbClr r="0" g="0" b="0"/>
+      </a:lnRef>
+      <a:fillRef idx="1">
+        <a:scrgbClr r="0" g="0" b="0"/>
+      </a:fillRef>
+      <a:effectRef idx="0">
+        <a:scrgbClr r="0" g="0" b="0"/>
+      </a:effectRef>
+      <a:fontRef idx="minor"/>
+    </dgm:style>
+  </dgm:styleLbl>
+  <dgm:styleLbl name="fgAcc2">
+    <dgm:scene3d>
+      <a:camera prst="orthographicFront"/>
+      <a:lightRig rig="threePt" dir="t"/>
+    </dgm:scene3d>
+    <dgm:sp3d/>
+    <dgm:txPr/>
+    <dgm:style>
+      <a:lnRef idx="2">
+        <a:scrgbClr r="0" g="0" b="0"/>
+      </a:lnRef>
+      <a:fillRef idx="1">
+        <a:scrgbClr r="0" g="0" b="0"/>
+      </a:fillRef>
+      <a:effectRef idx="0">
+        <a:scrgbClr r="0" g="0" b="0"/>
+      </a:effectRef>
+      <a:fontRef idx="minor"/>
+    </dgm:style>
+  </dgm:styleLbl>
+  <dgm:styleLbl name="fgAcc3">
+    <dgm:scene3d>
+      <a:camera prst="orthographicFront"/>
+      <a:lightRig rig="threePt" dir="t"/>
+    </dgm:scene3d>
+    <dgm:sp3d/>
+    <dgm:txPr/>
+    <dgm:style>
+      <a:lnRef idx="2">
+        <a:scrgbClr r="0" g="0" b="0"/>
+      </a:lnRef>
+      <a:fillRef idx="1">
+        <a:scrgbClr r="0" g="0" b="0"/>
+      </a:fillRef>
+      <a:effectRef idx="0">
+        <a:scrgbClr r="0" g="0" b="0"/>
+      </a:effectRef>
+      <a:fontRef idx="minor"/>
+    </dgm:style>
+  </dgm:styleLbl>
+  <dgm:styleLbl name="fgAcc4">
+    <dgm:scene3d>
+      <a:camera prst="orthographicFront"/>
+      <a:lightRig rig="threePt" dir="t"/>
+    </dgm:scene3d>
+    <dgm:sp3d/>
+    <dgm:txPr/>
+    <dgm:style>
+      <a:lnRef idx="2">
+        <a:scrgbClr r="0" g="0" b="0"/>
+      </a:lnRef>
+      <a:fillRef idx="1">
+        <a:scrgbClr r="0" g="0" b="0"/>
+      </a:fillRef>
+      <a:effectRef idx="0">
+        <a:scrgbClr r="0" g="0" b="0"/>
+      </a:effectRef>
+      <a:fontRef idx="minor"/>
+    </dgm:style>
+  </dgm:styleLbl>
+  <dgm:styleLbl name="bgShp">
+    <dgm:scene3d>
+      <a:camera prst="orthographicFront"/>
+      <a:lightRig rig="threePt" dir="t"/>
+    </dgm:scene3d>
+    <dgm:sp3d/>
+    <dgm:txPr/>
+    <dgm:style>
+      <a:lnRef idx="0">
+        <a:scrgbClr r="0" g="0" b="0"/>
+      </a:lnRef>
+      <a:fillRef idx="1">
+        <a:scrgbClr r="0" g="0" b="0"/>
+      </a:fillRef>
+      <a:effectRef idx="0">
+        <a:scrgbClr r="0" g="0" b="0"/>
+      </a:effectRef>
+      <a:fontRef idx="minor"/>
+    </dgm:style>
+  </dgm:styleLbl>
+  <dgm:styleLbl name="dkBgShp">
+    <dgm:scene3d>
+      <a:camera prst="orthographicFront"/>
+      <a:lightRig rig="threePt" dir="t"/>
+    </dgm:scene3d>
+    <dgm:sp3d/>
+    <dgm:txPr/>
+    <dgm:style>
+      <a:lnRef idx="0">
+        <a:scrgbClr r="0" g="0" b="0"/>
+      </a:lnRef>
+      <a:fillRef idx="1">
+        <a:scrgbClr r="0" g="0" b="0"/>
+      </a:fillRef>
+      <a:effectRef idx="0">
+        <a:scrgbClr r="0" g="0" b="0"/>
+      </a:effectRef>
+      <a:fontRef idx="minor"/>
+    </dgm:style>
+  </dgm:styleLbl>
+  <dgm:styleLbl name="trBgShp">
+    <dgm:scene3d>
+      <a:camera prst="orthographicFront"/>
+      <a:lightRig rig="threePt" dir="t"/>
+    </dgm:scene3d>
+    <dgm:sp3d/>
+    <dgm:txPr/>
+    <dgm:style>
+      <a:lnRef idx="0">
+        <a:scrgbClr r="0" g="0" b="0"/>
+      </a:lnRef>
+      <a:fillRef idx="1">
+        <a:scrgbClr r="0" g="0" b="0"/>
+      </a:fillRef>
+      <a:effectRef idx="0">
+        <a:scrgbClr r="0" g="0" b="0"/>
+      </a:effectRef>
+      <a:fontRef idx="minor"/>
+    </dgm:style>
+  </dgm:styleLbl>
+  <dgm:styleLbl name="fgShp">
+    <dgm:scene3d>
+      <a:camera prst="orthographicFront"/>
+      <a:lightRig rig="threePt" dir="t"/>
+    </dgm:scene3d>
+    <dgm:sp3d/>
+    <dgm:txPr/>
+    <dgm:style>
+      <a:lnRef idx="2">
+        <a:scrgbClr r="0" g="0" b="0"/>
+      </a:lnRef>
+      <a:fillRef idx="1">
+        <a:scrgbClr r="0" g="0" b="0"/>
+      </a:fillRef>
+      <a:effectRef idx="0">
+        <a:scrgbClr r="0" g="0" b="0"/>
+      </a:effectRef>
+      <a:fontRef idx="minor"/>
+    </dgm:style>
+  </dgm:styleLbl>
+  <dgm:styleLbl name="revTx">
+    <dgm:scene3d>
+      <a:camera prst="orthographicFront"/>
+      <a:lightRig rig="threePt" dir="t"/>
+    </dgm:scene3d>
+    <dgm:sp3d/>
+    <dgm:txPr/>
+    <dgm:style>
+      <a:lnRef idx="0">
+        <a:scrgbClr r="0" g="0" b="0"/>
+      </a:lnRef>
+      <a:fillRef idx="0">
+        <a:scrgbClr r="0" g="0" b="0"/>
+      </a:fillRef>
+      <a:effectRef idx="0">
+        <a:scrgbClr r="0" g="0" b="0"/>
+      </a:effectRef>
+      <a:fontRef idx="minor"/>
+    </dgm:style>
+  </dgm:styleLbl>
+</dgm:styleDef>
+</file>
+
+<file path=ppt/diagrams/quickStyle2.xml><?xml version="1.0" encoding="utf-8"?>
 <dgm:styleDef xmlns:dgm="http://schemas.openxmlformats.org/drawingml/2006/diagram" xmlns:a="http://schemas.openxmlformats.org/drawingml/2006/main" uniqueId="urn:microsoft.com/office/officeart/2005/8/quickstyle/simple1">
   <dgm:title val=""/>
   <dgm:desc val=""/>
@@ -5313,6 +8374,261 @@
         <p:cNvPr id="1" name="">
           <a:extLst>
             <a:ext uri="{FF2B5EF4-FFF2-40B4-BE49-F238E27FC236}">
+              <a16:creationId xmlns:a16="http://schemas.microsoft.com/office/drawing/2014/main" id="{AC73C583-AE3A-3392-DE77-BD9A9C8CD370}"/>
+            </a:ext>
+          </a:extLst>
+        </p:cNvPr>
+        <p:cNvGrpSpPr/>
+        <p:nvPr/>
+      </p:nvGrpSpPr>
+      <p:grpSpPr>
+        <a:xfrm>
+          <a:off x="0" y="0"/>
+          <a:ext cx="0" cy="0"/>
+          <a:chOff x="0" y="0"/>
+          <a:chExt cx="0" cy="0"/>
+        </a:xfrm>
+      </p:grpSpPr>
+      <p:sp>
+        <p:nvSpPr>
+          <p:cNvPr id="2" name="Folienbildplatzhalter 1">
+            <a:extLst>
+              <a:ext uri="{FF2B5EF4-FFF2-40B4-BE49-F238E27FC236}">
+                <a16:creationId xmlns:a16="http://schemas.microsoft.com/office/drawing/2014/main" id="{77B67F90-E688-5A4F-2306-EAC511B9012C}"/>
+              </a:ext>
+            </a:extLst>
+          </p:cNvPr>
+          <p:cNvSpPr>
+            <a:spLocks noGrp="1" noRot="1" noChangeAspect="1"/>
+          </p:cNvSpPr>
+          <p:nvPr>
+            <p:ph type="sldImg"/>
+          </p:nvPr>
+        </p:nvSpPr>
+        <p:spPr/>
+        <p:txBody>
+          <a:bodyPr/>
+          <a:lstStyle/>
+          <a:p>
+            <a:endParaRPr lang="de-AT"/>
+          </a:p>
+        </p:txBody>
+      </p:sp>
+      <p:sp>
+        <p:nvSpPr>
+          <p:cNvPr id="3" name="Notizenplatzhalter 2">
+            <a:extLst>
+              <a:ext uri="{FF2B5EF4-FFF2-40B4-BE49-F238E27FC236}">
+                <a16:creationId xmlns:a16="http://schemas.microsoft.com/office/drawing/2014/main" id="{B0618AD7-9BC2-5416-3C55-10ABAD14409A}"/>
+              </a:ext>
+            </a:extLst>
+          </p:cNvPr>
+          <p:cNvSpPr>
+            <a:spLocks noGrp="1"/>
+          </p:cNvSpPr>
+          <p:nvPr>
+            <p:ph type="body" idx="1"/>
+          </p:nvPr>
+        </p:nvSpPr>
+        <p:spPr/>
+        <p:txBody>
+          <a:bodyPr/>
+          <a:lstStyle/>
+          <a:p>
+            <a:r>
+              <a:rPr lang="de-AT" sz="1200" b="0" i="0" kern="1200" dirty="0">
+                <a:solidFill>
+                  <a:schemeClr val="tx1"/>
+                </a:solidFill>
+                <a:effectLst/>
+                <a:latin typeface="+mn-lt"/>
+                <a:ea typeface="+mn-ea"/>
+                <a:cs typeface="+mn-cs"/>
+              </a:rPr>
+              <a:t>Gehen wir nun genauer auf den Chat ein.</a:t>
+            </a:r>
+          </a:p>
+          <a:p>
+            <a:pPr marL="0" marR="0" lvl="0" indent="0" algn="l" defTabSz="914400" rtl="0" eaLnBrk="1" fontAlgn="auto" latinLnBrk="0" hangingPunct="1">
+              <a:lnSpc>
+                <a:spcPct val="100000"/>
+              </a:lnSpc>
+              <a:spcBef>
+                <a:spcPts val="0"/>
+              </a:spcBef>
+              <a:spcAft>
+                <a:spcPts val="0"/>
+              </a:spcAft>
+              <a:buClrTx/>
+              <a:buSzTx/>
+              <a:buFontTx/>
+              <a:buNone/>
+              <a:tabLst/>
+              <a:defRPr/>
+            </a:pPr>
+            <a:endParaRPr lang="de-AT" sz="1200" b="0" i="0" kern="1200" dirty="0">
+              <a:solidFill>
+                <a:schemeClr val="tx1"/>
+              </a:solidFill>
+              <a:effectLst/>
+              <a:latin typeface="+mn-lt"/>
+              <a:ea typeface="+mn-ea"/>
+              <a:cs typeface="+mn-cs"/>
+            </a:endParaRPr>
+          </a:p>
+          <a:p>
+            <a:pPr marL="0" marR="0" lvl="0" indent="0" algn="l" defTabSz="914400" rtl="0" eaLnBrk="1" fontAlgn="auto" latinLnBrk="0" hangingPunct="1">
+              <a:lnSpc>
+                <a:spcPct val="100000"/>
+              </a:lnSpc>
+              <a:spcBef>
+                <a:spcPts val="0"/>
+              </a:spcBef>
+              <a:spcAft>
+                <a:spcPts val="0"/>
+              </a:spcAft>
+              <a:buClrTx/>
+              <a:buSzTx/>
+              <a:buFontTx/>
+              <a:buNone/>
+              <a:tabLst/>
+              <a:defRPr/>
+            </a:pPr>
+            <a:r>
+              <a:rPr lang="de-AT" sz="1200" b="0" i="0" kern="1200" dirty="0">
+                <a:solidFill>
+                  <a:schemeClr val="tx1"/>
+                </a:solidFill>
+                <a:effectLst/>
+                <a:latin typeface="+mn-lt"/>
+                <a:ea typeface="+mn-ea"/>
+                <a:cs typeface="+mn-cs"/>
+              </a:rPr>
+              <a:t>Das sich das Model auskennt über welche Karteikarten</a:t>
+            </a:r>
+          </a:p>
+          <a:p>
+            <a:pPr marL="0" marR="0" lvl="0" indent="0" algn="l" defTabSz="914400" rtl="0" eaLnBrk="1" fontAlgn="auto" latinLnBrk="0" hangingPunct="1">
+              <a:lnSpc>
+                <a:spcPct val="100000"/>
+              </a:lnSpc>
+              <a:spcBef>
+                <a:spcPts val="0"/>
+              </a:spcBef>
+              <a:spcAft>
+                <a:spcPts val="0"/>
+              </a:spcAft>
+              <a:buClrTx/>
+              <a:buSzTx/>
+              <a:buFontTx/>
+              <a:buNone/>
+              <a:tabLst/>
+              <a:defRPr/>
+            </a:pPr>
+            <a:r>
+              <a:rPr lang="de-AT" sz="1200" b="0" i="0" kern="1200" dirty="0">
+                <a:solidFill>
+                  <a:schemeClr val="tx1"/>
+                </a:solidFill>
+                <a:effectLst/>
+                <a:latin typeface="+mn-lt"/>
+                <a:ea typeface="+mn-ea"/>
+                <a:cs typeface="+mn-cs"/>
+              </a:rPr>
+              <a:t>Man spricht (Kontext) verwendet USki RAG … Retrieval-</a:t>
+            </a:r>
+            <a:r>
+              <a:rPr lang="de-AT" sz="1200" b="0" i="0" kern="1200" dirty="0" err="1">
+                <a:solidFill>
+                  <a:schemeClr val="tx1"/>
+                </a:solidFill>
+                <a:effectLst/>
+                <a:latin typeface="+mn-lt"/>
+                <a:ea typeface="+mn-ea"/>
+                <a:cs typeface="+mn-cs"/>
+              </a:rPr>
+              <a:t>Augmented</a:t>
+            </a:r>
+            <a:r>
+              <a:rPr lang="de-AT" sz="1200" b="0" i="0" kern="1200" dirty="0">
+                <a:solidFill>
+                  <a:schemeClr val="tx1"/>
+                </a:solidFill>
+                <a:effectLst/>
+                <a:latin typeface="+mn-lt"/>
+                <a:ea typeface="+mn-ea"/>
+                <a:cs typeface="+mn-cs"/>
+              </a:rPr>
+              <a:t> Generation</a:t>
+            </a:r>
+            <a:endParaRPr lang="de-AT" dirty="0"/>
+          </a:p>
+          <a:p>
+            <a:r>
+              <a:rPr lang="de-AT" sz="1200" b="0" i="0" kern="1200" dirty="0">
+                <a:solidFill>
+                  <a:schemeClr val="tx1"/>
+                </a:solidFill>
+                <a:effectLst/>
+                <a:latin typeface="+mn-lt"/>
+                <a:ea typeface="+mn-ea"/>
+                <a:cs typeface="+mn-cs"/>
+              </a:rPr>
+              <a:t>Auf Deutsch: „Abrufgestützte Generation“</a:t>
+            </a:r>
+          </a:p>
+        </p:txBody>
+      </p:sp>
+      <p:sp>
+        <p:nvSpPr>
+          <p:cNvPr id="4" name="Foliennummernplatzhalter 3">
+            <a:extLst>
+              <a:ext uri="{FF2B5EF4-FFF2-40B4-BE49-F238E27FC236}">
+                <a16:creationId xmlns:a16="http://schemas.microsoft.com/office/drawing/2014/main" id="{6BD0A78D-6714-BEA4-14B7-4B8455950EC5}"/>
+              </a:ext>
+            </a:extLst>
+          </p:cNvPr>
+          <p:cNvSpPr>
+            <a:spLocks noGrp="1"/>
+          </p:cNvSpPr>
+          <p:nvPr>
+            <p:ph type="sldNum" sz="quarter" idx="5"/>
+          </p:nvPr>
+        </p:nvSpPr>
+        <p:spPr/>
+        <p:txBody>
+          <a:bodyPr/>
+          <a:lstStyle/>
+          <a:p>
+            <a:fld id="{652AAAB7-E5B9-4DC1-A9E7-22B3020BB7D5}" type="slidenum">
+              <a:rPr lang="de-AT" smtClean="0"/>
+              <a:t>10</a:t>
+            </a:fld>
+            <a:endParaRPr lang="de-AT"/>
+          </a:p>
+        </p:txBody>
+      </p:sp>
+    </p:spTree>
+    <p:extLst>
+      <p:ext uri="{BB962C8B-B14F-4D97-AF65-F5344CB8AC3E}">
+        <p14:creationId xmlns:p14="http://schemas.microsoft.com/office/powerpoint/2010/main" val="407716091"/>
+      </p:ext>
+    </p:extLst>
+  </p:cSld>
+  <p:clrMapOvr>
+    <a:masterClrMapping/>
+  </p:clrMapOvr>
+</p:notes>
+</file>
+
+<file path=ppt/notesSlides/notesSlide11.xml><?xml version="1.0" encoding="utf-8"?>
+<p:notes xmlns:a="http://schemas.openxmlformats.org/drawingml/2006/main" xmlns:r="http://schemas.openxmlformats.org/officeDocument/2006/relationships" xmlns:p="http://schemas.openxmlformats.org/presentationml/2006/main">
+  <p:cSld>
+    <p:spTree>
+      <p:nvGrpSpPr>
+        <p:cNvPr id="1" name="">
+          <a:extLst>
+            <a:ext uri="{FF2B5EF4-FFF2-40B4-BE49-F238E27FC236}">
               <a16:creationId xmlns:a16="http://schemas.microsoft.com/office/drawing/2014/main" id="{7E756984-BD25-621D-FB56-6CD54DF62AF8}"/>
             </a:ext>
           </a:extLst>
@@ -5425,7 +8741,7 @@
           <a:p>
             <a:fld id="{652AAAB7-E5B9-4DC1-A9E7-22B3020BB7D5}" type="slidenum">
               <a:rPr lang="de-AT" smtClean="0"/>
-              <a:t>10</a:t>
+              <a:t>11</a:t>
             </a:fld>
             <a:endParaRPr lang="de-AT"/>
           </a:p>
@@ -6109,7 +9425,7 @@
               <a:defRPr/>
             </a:pPr>
             <a:r>
-              <a:rPr lang="de-AT" sz="1200" b="0" i="0" kern="1200" dirty="0">
+              <a:rPr lang="de-DE" sz="1200" b="1" i="0" kern="1200" dirty="0">
                 <a:solidFill>
                   <a:schemeClr val="tx1"/>
                 </a:solidFill>
@@ -6118,7 +9434,115 @@
                 <a:ea typeface="+mn-ea"/>
                 <a:cs typeface="+mn-cs"/>
               </a:rPr>
-              <a:t>Supabase weil</a:t>
+              <a:t>Supabase</a:t>
+            </a:r>
+            <a:r>
+              <a:rPr lang="de-DE" sz="1200" b="0" i="0" kern="1200" dirty="0">
+                <a:solidFill>
+                  <a:schemeClr val="tx1"/>
+                </a:solidFill>
+                <a:effectLst/>
+                <a:latin typeface="+mn-lt"/>
+                <a:ea typeface="+mn-ea"/>
+                <a:cs typeface="+mn-cs"/>
+              </a:rPr>
+              <a:t>, weil </a:t>
+            </a:r>
+            <a:r>
+              <a:rPr lang="de-DE" sz="1200" b="1" i="0" kern="1200" dirty="0">
+                <a:solidFill>
+                  <a:schemeClr val="tx1"/>
+                </a:solidFill>
+                <a:effectLst/>
+                <a:latin typeface="+mn-lt"/>
+                <a:ea typeface="+mn-ea"/>
+                <a:cs typeface="+mn-cs"/>
+              </a:rPr>
+              <a:t>PostgreSQL</a:t>
+            </a:r>
+            <a:r>
+              <a:rPr lang="de-DE" sz="1200" b="0" i="0" kern="1200" dirty="0">
+                <a:solidFill>
+                  <a:schemeClr val="tx1"/>
+                </a:solidFill>
+                <a:effectLst/>
+                <a:latin typeface="+mn-lt"/>
+                <a:ea typeface="+mn-ea"/>
+                <a:cs typeface="+mn-cs"/>
+              </a:rPr>
+              <a:t> mit </a:t>
+            </a:r>
+            <a:r>
+              <a:rPr lang="de-DE" sz="1200" b="1" i="0" kern="1200" dirty="0" err="1">
+                <a:solidFill>
+                  <a:schemeClr val="tx1"/>
+                </a:solidFill>
+                <a:effectLst/>
+                <a:latin typeface="+mn-lt"/>
+                <a:ea typeface="+mn-ea"/>
+                <a:cs typeface="+mn-cs"/>
+              </a:rPr>
+              <a:t>pgvector</a:t>
+            </a:r>
+            <a:r>
+              <a:rPr lang="de-DE" sz="1200" b="0" i="0" kern="1200" dirty="0">
+                <a:solidFill>
+                  <a:schemeClr val="tx1"/>
+                </a:solidFill>
+                <a:effectLst/>
+                <a:latin typeface="+mn-lt"/>
+                <a:ea typeface="+mn-ea"/>
+                <a:cs typeface="+mn-cs"/>
+              </a:rPr>
+              <a:t>: zerlegt </a:t>
+            </a:r>
+            <a:r>
+              <a:rPr lang="de-DE" sz="1200" b="1" i="0" kern="1200" dirty="0">
+                <a:solidFill>
+                  <a:schemeClr val="tx1"/>
+                </a:solidFill>
+                <a:effectLst/>
+                <a:latin typeface="+mn-lt"/>
+                <a:ea typeface="+mn-ea"/>
+                <a:cs typeface="+mn-cs"/>
+              </a:rPr>
+              <a:t>Tabellen-Inhalte</a:t>
+            </a:r>
+            <a:r>
+              <a:rPr lang="de-DE" sz="1200" b="0" i="0" kern="1200" dirty="0">
+                <a:solidFill>
+                  <a:schemeClr val="tx1"/>
+                </a:solidFill>
+                <a:effectLst/>
+                <a:latin typeface="+mn-lt"/>
+                <a:ea typeface="+mn-ea"/>
+                <a:cs typeface="+mn-cs"/>
+              </a:rPr>
+              <a:t> in </a:t>
+            </a:r>
+            <a:r>
+              <a:rPr lang="de-DE" sz="1200" b="1" i="0" kern="1200" dirty="0">
+                <a:solidFill>
+                  <a:schemeClr val="tx1"/>
+                </a:solidFill>
+                <a:effectLst/>
+                <a:latin typeface="+mn-lt"/>
+                <a:ea typeface="+mn-ea"/>
+                <a:cs typeface="+mn-cs"/>
+              </a:rPr>
+              <a:t>Vektoren</a:t>
+            </a:r>
+            <a:r>
+              <a:rPr lang="de-DE" sz="1200" b="0" i="0" kern="1200" dirty="0">
+                <a:solidFill>
+                  <a:schemeClr val="tx1"/>
+                </a:solidFill>
+                <a:effectLst/>
+                <a:latin typeface="+mn-lt"/>
+                <a:ea typeface="+mn-ea"/>
+                <a:cs typeface="+mn-cs"/>
+              </a:rPr>
+              <a:t> (Zahlen),</a:t>
             </a:r>
           </a:p>
           <a:p>
@@ -6139,7 +9563,86 @@
               <a:tabLst/>
               <a:defRPr/>
             </a:pPr>
-            <a:endParaRPr lang="de-AT" sz="1200" b="0" i="0" kern="1200" dirty="0">
+            <a:r>
+              <a:rPr lang="de-DE" sz="1200" b="0" i="0" kern="1200" dirty="0">
+                <a:solidFill>
+                  <a:schemeClr val="tx1"/>
+                </a:solidFill>
+                <a:effectLst/>
+                <a:latin typeface="+mn-lt"/>
+                <a:ea typeface="+mn-ea"/>
+                <a:cs typeface="+mn-cs"/>
+              </a:rPr>
+              <a:t>damit die </a:t>
+            </a:r>
+            <a:r>
+              <a:rPr lang="de-DE" sz="1200" b="1" i="0" kern="1200" dirty="0">
+                <a:solidFill>
+                  <a:schemeClr val="tx1"/>
+                </a:solidFill>
+                <a:effectLst/>
+                <a:latin typeface="+mn-lt"/>
+                <a:ea typeface="+mn-ea"/>
+                <a:cs typeface="+mn-cs"/>
+              </a:rPr>
+              <a:t>KI</a:t>
+            </a:r>
+            <a:r>
+              <a:rPr lang="de-DE" sz="1200" b="0" i="0" kern="1200" dirty="0">
+                <a:solidFill>
+                  <a:schemeClr val="tx1"/>
+                </a:solidFill>
+                <a:effectLst/>
+                <a:latin typeface="+mn-lt"/>
+                <a:ea typeface="+mn-ea"/>
+                <a:cs typeface="+mn-cs"/>
+              </a:rPr>
+              <a:t> ihre </a:t>
+            </a:r>
+            <a:r>
+              <a:rPr lang="de-DE" sz="1200" b="1" i="0" kern="1200" dirty="0">
+                <a:solidFill>
+                  <a:schemeClr val="tx1"/>
+                </a:solidFill>
+                <a:effectLst/>
+                <a:latin typeface="+mn-lt"/>
+                <a:ea typeface="+mn-ea"/>
+                <a:cs typeface="+mn-cs"/>
+              </a:rPr>
+              <a:t>Bedeutung</a:t>
+            </a:r>
+            <a:r>
+              <a:rPr lang="de-DE" sz="1200" b="0" i="0" kern="1200" dirty="0">
+                <a:solidFill>
+                  <a:schemeClr val="tx1"/>
+                </a:solidFill>
+                <a:effectLst/>
+                <a:latin typeface="+mn-lt"/>
+                <a:ea typeface="+mn-ea"/>
+                <a:cs typeface="+mn-cs"/>
+              </a:rPr>
+              <a:t> versteht und durchsuchen kann.</a:t>
+            </a:r>
+          </a:p>
+          <a:p>
+            <a:pPr marL="0" marR="0" lvl="0" indent="0" algn="l" defTabSz="914400" rtl="0" eaLnBrk="1" fontAlgn="auto" latinLnBrk="0" hangingPunct="1">
+              <a:lnSpc>
+                <a:spcPct val="100000"/>
+              </a:lnSpc>
+              <a:spcBef>
+                <a:spcPts val="0"/>
+              </a:spcBef>
+              <a:spcAft>
+                <a:spcPts val="0"/>
+              </a:spcAft>
+              <a:buClrTx/>
+              <a:buSzTx/>
+              <a:buFontTx/>
+              <a:buNone/>
+              <a:tabLst/>
+              <a:defRPr/>
+            </a:pPr>
+            <a:endParaRPr lang="de-DE" sz="1200" b="0" i="0" kern="1200" dirty="0">
               <a:solidFill>
                 <a:schemeClr val="tx1"/>
               </a:solidFill>
@@ -6168,7 +9671,7 @@
               <a:defRPr/>
             </a:pPr>
             <a:r>
-              <a:rPr lang="de-AT" sz="1200" b="0" i="0" kern="1200" dirty="0">
+              <a:rPr lang="de-DE" sz="1200" b="0" i="0" kern="1200" dirty="0">
                 <a:solidFill>
                   <a:schemeClr val="tx1"/>
                 </a:solidFill>
@@ -6177,10 +9680,10 @@
                 <a:ea typeface="+mn-ea"/>
                 <a:cs typeface="+mn-cs"/>
               </a:rPr>
-              <a:t>PostgreSQL, </a:t>
-            </a:r>
-            <a:r>
-              <a:rPr lang="de-AT" sz="1200" b="0" i="0" kern="1200" dirty="0" err="1">
+              <a:t>Bringt zudem eine einfache </a:t>
+            </a:r>
+            <a:r>
+              <a:rPr lang="de-DE" sz="1200" b="1" i="0" kern="1200" dirty="0">
                 <a:solidFill>
                   <a:schemeClr val="tx1"/>
                 </a:solidFill>
@@ -6189,10 +9692,10 @@
                 <a:ea typeface="+mn-ea"/>
                 <a:cs typeface="+mn-cs"/>
               </a:rPr>
-              <a:t>pgvector</a:t>
-            </a:r>
-            <a:r>
-              <a:rPr lang="de-AT" sz="1200" b="0" i="0" kern="1200" dirty="0">
+              <a:t>Authentifizierungs-Einbindung</a:t>
+            </a:r>
+            <a:r>
+              <a:rPr lang="de-DE" sz="1200" b="0" i="0" kern="1200" dirty="0">
                 <a:solidFill>
                   <a:schemeClr val="tx1"/>
                 </a:solidFill>
@@ -6201,55 +9704,7 @@
                 <a:ea typeface="+mn-ea"/>
                 <a:cs typeface="+mn-cs"/>
               </a:rPr>
-              <a:t> um </a:t>
-            </a:r>
-            <a:r>
-              <a:rPr lang="de-AT" sz="1200" b="0" i="0" kern="1200" dirty="0" err="1">
-                <a:solidFill>
-                  <a:schemeClr val="tx1"/>
-                </a:solidFill>
-                <a:effectLst/>
-                <a:latin typeface="+mn-lt"/>
-                <a:ea typeface="+mn-ea"/>
-                <a:cs typeface="+mn-cs"/>
-              </a:rPr>
-              <a:t>tabellen</a:t>
-            </a:r>
-            <a:r>
-              <a:rPr lang="de-AT" sz="1200" b="0" i="0" kern="1200" dirty="0">
-                <a:solidFill>
-                  <a:schemeClr val="tx1"/>
-                </a:solidFill>
-                <a:effectLst/>
-                <a:latin typeface="+mn-lt"/>
-                <a:ea typeface="+mn-ea"/>
-                <a:cs typeface="+mn-cs"/>
-              </a:rPr>
-              <a:t> in </a:t>
-            </a:r>
-            <a:r>
-              <a:rPr lang="de-AT" sz="1200" b="0" i="0" kern="1200" dirty="0" err="1">
-                <a:solidFill>
-                  <a:schemeClr val="tx1"/>
-                </a:solidFill>
-                <a:effectLst/>
-                <a:latin typeface="+mn-lt"/>
-                <a:ea typeface="+mn-ea"/>
-                <a:cs typeface="+mn-cs"/>
-              </a:rPr>
-              <a:t>vektoren</a:t>
-            </a:r>
-            <a:r>
-              <a:rPr lang="de-AT" sz="1200" b="0" i="0" kern="1200" dirty="0">
-                <a:solidFill>
-                  <a:schemeClr val="tx1"/>
-                </a:solidFill>
-                <a:effectLst/>
-                <a:latin typeface="+mn-lt"/>
-                <a:ea typeface="+mn-ea"/>
-                <a:cs typeface="+mn-cs"/>
-              </a:rPr>
-              <a:t> zu zerlegen damit die KI diese verstehet,</a:t>
+              <a:t> mit.</a:t>
             </a:r>
           </a:p>
           <a:p>
@@ -6270,114 +9725,15 @@
               <a:tabLst/>
               <a:defRPr/>
             </a:pPr>
-            <a:r>
-              <a:rPr lang="de-AT" sz="1200" b="0" i="0" kern="1200" dirty="0">
-                <a:solidFill>
-                  <a:schemeClr val="tx1"/>
-                </a:solidFill>
-                <a:effectLst/>
-                <a:latin typeface="+mn-lt"/>
-                <a:ea typeface="+mn-ea"/>
-                <a:cs typeface="+mn-cs"/>
-              </a:rPr>
-              <a:t>Einfache </a:t>
-            </a:r>
-            <a:r>
-              <a:rPr lang="de-AT" sz="1200" b="0" i="0" kern="1200" dirty="0" err="1">
-                <a:solidFill>
-                  <a:schemeClr val="tx1"/>
-                </a:solidFill>
-                <a:effectLst/>
-                <a:latin typeface="+mn-lt"/>
-                <a:ea typeface="+mn-ea"/>
-                <a:cs typeface="+mn-cs"/>
-              </a:rPr>
-              <a:t>Authenentifizerungseinbindung</a:t>
-            </a:r>
-            <a:r>
-              <a:rPr lang="de-AT" sz="1200" b="0" i="0" kern="1200" dirty="0">
-                <a:solidFill>
-                  <a:schemeClr val="tx1"/>
-                </a:solidFill>
-                <a:effectLst/>
-                <a:latin typeface="+mn-lt"/>
-                <a:ea typeface="+mn-ea"/>
-                <a:cs typeface="+mn-cs"/>
-              </a:rPr>
-              <a:t>, die lokale </a:t>
-            </a:r>
-            <a:r>
-              <a:rPr lang="de-AT" sz="1200" b="0" i="0" kern="1200" dirty="0" err="1">
-                <a:solidFill>
-                  <a:schemeClr val="tx1"/>
-                </a:solidFill>
-                <a:effectLst/>
-                <a:latin typeface="+mn-lt"/>
-                <a:ea typeface="+mn-ea"/>
-                <a:cs typeface="+mn-cs"/>
-              </a:rPr>
-              <a:t>version</a:t>
-            </a:r>
-            <a:r>
-              <a:rPr lang="de-AT" sz="1200" b="0" i="0" kern="1200" dirty="0">
-                <a:solidFill>
-                  <a:schemeClr val="tx1"/>
-                </a:solidFill>
-                <a:effectLst/>
-                <a:latin typeface="+mn-lt"/>
-                <a:ea typeface="+mn-ea"/>
-                <a:cs typeface="+mn-cs"/>
-              </a:rPr>
-              <a:t> hat </a:t>
-            </a:r>
-            <a:r>
-              <a:rPr lang="de-AT" sz="1200" b="0" i="0" kern="1200" dirty="0" err="1">
-                <a:solidFill>
-                  <a:schemeClr val="tx1"/>
-                </a:solidFill>
-                <a:effectLst/>
-                <a:latin typeface="+mn-lt"/>
-                <a:ea typeface="+mn-ea"/>
-                <a:cs typeface="+mn-cs"/>
-              </a:rPr>
-              <a:t>mailpit</a:t>
-            </a:r>
-            <a:r>
-              <a:rPr lang="de-AT" sz="1200" b="0" i="0" kern="1200" dirty="0">
-                <a:solidFill>
-                  <a:schemeClr val="tx1"/>
-                </a:solidFill>
-                <a:effectLst/>
-                <a:latin typeface="+mn-lt"/>
-                <a:ea typeface="+mn-ea"/>
-                <a:cs typeface="+mn-cs"/>
-              </a:rPr>
-              <a:t> SMTP </a:t>
-            </a:r>
-            <a:r>
-              <a:rPr lang="de-AT" sz="1200" b="0" i="0" kern="1200" dirty="0" err="1">
-                <a:solidFill>
-                  <a:schemeClr val="tx1"/>
-                </a:solidFill>
-                <a:effectLst/>
-                <a:latin typeface="+mn-lt"/>
-                <a:ea typeface="+mn-ea"/>
-                <a:cs typeface="+mn-cs"/>
-              </a:rPr>
-              <a:t>server</a:t>
-            </a:r>
-            <a:r>
-              <a:rPr lang="de-AT" sz="1200" b="0" i="0" kern="1200" dirty="0">
-                <a:solidFill>
-                  <a:schemeClr val="tx1"/>
-                </a:solidFill>
-                <a:effectLst/>
-                <a:latin typeface="+mn-lt"/>
-                <a:ea typeface="+mn-ea"/>
-                <a:cs typeface="+mn-cs"/>
-              </a:rPr>
-              <a:t>,</a:t>
-            </a:r>
+            <a:endParaRPr lang="de-DE" sz="1200" b="0" i="0" kern="1200" dirty="0">
+              <a:solidFill>
+                <a:schemeClr val="tx1"/>
+              </a:solidFill>
+              <a:effectLst/>
+              <a:latin typeface="+mn-lt"/>
+              <a:ea typeface="+mn-ea"/>
+              <a:cs typeface="+mn-cs"/>
+            </a:endParaRPr>
           </a:p>
           <a:p>
             <a:pPr marL="0" marR="0" lvl="0" indent="0" algn="l" defTabSz="914400" rtl="0" eaLnBrk="1" fontAlgn="auto" latinLnBrk="0" hangingPunct="1">
@@ -6398,7 +9754,7 @@
               <a:defRPr/>
             </a:pPr>
             <a:r>
-              <a:rPr lang="de-AT" sz="1200" b="0" i="0" kern="1200" dirty="0">
+              <a:rPr lang="de-DE" sz="1200" b="1" i="0" kern="1200" dirty="0">
                 <a:solidFill>
                   <a:schemeClr val="tx1"/>
                 </a:solidFill>
@@ -6407,10 +9763,10 @@
                 <a:ea typeface="+mn-ea"/>
                 <a:cs typeface="+mn-cs"/>
               </a:rPr>
-              <a:t>Cloud </a:t>
-            </a:r>
-            <a:r>
-              <a:rPr lang="de-AT" sz="1200" b="0" i="0" kern="1200" dirty="0" err="1">
+              <a:t>Lokale</a:t>
+            </a:r>
+            <a:r>
+              <a:rPr lang="de-DE" sz="1200" b="0" i="0" kern="1200" dirty="0">
                 <a:solidFill>
                   <a:schemeClr val="tx1"/>
                 </a:solidFill>
@@ -6419,10 +9775,10 @@
                 <a:ea typeface="+mn-ea"/>
                 <a:cs typeface="+mn-cs"/>
               </a:rPr>
-              <a:t>version</a:t>
-            </a:r>
-            <a:r>
-              <a:rPr lang="de-AT" sz="1200" b="0" i="0" kern="1200" dirty="0">
+              <a:t> Version: nutzt </a:t>
+            </a:r>
+            <a:r>
+              <a:rPr lang="de-DE" sz="1200" b="1" i="0" kern="1200" dirty="0" err="1">
                 <a:solidFill>
                   <a:schemeClr val="tx1"/>
                 </a:solidFill>
@@ -6431,10 +9787,10 @@
                 <a:ea typeface="+mn-ea"/>
                 <a:cs typeface="+mn-cs"/>
               </a:rPr>
-              <a:t> kann Eigenen SMTP ich versende Resend </a:t>
-            </a:r>
-            <a:r>
-              <a:rPr lang="de-AT" sz="1200" b="0" i="0" kern="1200" dirty="0" err="1">
+              <a:t>Mailpit</a:t>
+            </a:r>
+            <a:r>
+              <a:rPr lang="de-DE" sz="1200" b="0" i="0" kern="1200" dirty="0">
                 <a:solidFill>
                   <a:schemeClr val="tx1"/>
                 </a:solidFill>
@@ -6443,10 +9799,29 @@
                 <a:ea typeface="+mn-ea"/>
                 <a:cs typeface="+mn-cs"/>
               </a:rPr>
-              <a:t>free</a:t>
-            </a:r>
-            <a:r>
-              <a:rPr lang="de-AT" sz="1200" b="0" i="0" kern="1200" dirty="0">
+              <a:t> als SMTP-Server (Test-Mails).</a:t>
+            </a:r>
+          </a:p>
+          <a:p>
+            <a:pPr marL="0" marR="0" lvl="0" indent="0" algn="l" defTabSz="914400" rtl="0" eaLnBrk="1" fontAlgn="auto" latinLnBrk="0" hangingPunct="1">
+              <a:lnSpc>
+                <a:spcPct val="100000"/>
+              </a:lnSpc>
+              <a:spcBef>
+                <a:spcPts val="0"/>
+              </a:spcBef>
+              <a:spcAft>
+                <a:spcPts val="0"/>
+              </a:spcAft>
+              <a:buClrTx/>
+              <a:buSzTx/>
+              <a:buFontTx/>
+              <a:buNone/>
+              <a:tabLst/>
+              <a:defRPr/>
+            </a:pPr>
+            <a:r>
+              <a:rPr lang="de-DE" sz="1200" b="1" i="0" kern="1200" dirty="0">
                 <a:solidFill>
                   <a:schemeClr val="tx1"/>
                 </a:solidFill>
@@ -6455,10 +9830,10 @@
                 <a:ea typeface="+mn-ea"/>
                 <a:cs typeface="+mn-cs"/>
               </a:rPr>
-              <a:t> </a:t>
-            </a:r>
-            <a:r>
-              <a:rPr lang="de-AT" sz="1200" b="0" i="0" kern="1200" dirty="0" err="1">
+              <a:t>Cloud-Version</a:t>
+            </a:r>
+            <a:r>
+              <a:rPr lang="de-DE" sz="1200" b="0" i="0" kern="1200" dirty="0">
                 <a:solidFill>
                   <a:schemeClr val="tx1"/>
                 </a:solidFill>
@@ -6467,10 +9842,10 @@
                 <a:ea typeface="+mn-ea"/>
                 <a:cs typeface="+mn-cs"/>
               </a:rPr>
-              <a:t>version</a:t>
-            </a:r>
-            <a:br>
-              <a:rPr lang="de-AT" sz="1200" b="0" i="0" kern="1200" dirty="0">
+              <a:t>: eigener </a:t>
+            </a:r>
+            <a:r>
+              <a:rPr lang="de-DE" sz="1200" b="1" i="0" kern="1200" dirty="0">
                 <a:solidFill>
                   <a:schemeClr val="tx1"/>
                 </a:solidFill>
@@ -6479,9 +9854,10 @@
                 <a:ea typeface="+mn-ea"/>
                 <a:cs typeface="+mn-cs"/>
               </a:rPr>
-            </a:br>
-            <a:br>
-              <a:rPr lang="de-AT" sz="1200" b="0" i="0" kern="1200" dirty="0">
+              <a:t>SMTP</a:t>
+            </a:r>
+            <a:r>
+              <a:rPr lang="de-DE" sz="1200" b="0" i="0" kern="1200" dirty="0">
                 <a:solidFill>
                   <a:schemeClr val="tx1"/>
                 </a:solidFill>
@@ -6490,9 +9866,10 @@
                 <a:ea typeface="+mn-ea"/>
                 <a:cs typeface="+mn-cs"/>
               </a:rPr>
-            </a:br>
-            <a:r>
-              <a:rPr lang="de-AT" sz="1200" b="0" i="0" kern="1200" dirty="0">
+              <a:t> möglich, ich versende über </a:t>
+            </a:r>
+            <a:r>
+              <a:rPr lang="de-DE" sz="1200" b="1" i="0" kern="1200" dirty="0">
                 <a:solidFill>
                   <a:schemeClr val="tx1"/>
                 </a:solidFill>
@@ -6501,8 +9878,124 @@
                 <a:ea typeface="+mn-ea"/>
                 <a:cs typeface="+mn-cs"/>
               </a:rPr>
-              <a:t>Redis dient zur API Limitation</a:t>
-            </a:r>
+              <a:t>Resend</a:t>
+            </a:r>
+            <a:r>
+              <a:rPr lang="de-DE" sz="1200" b="0" i="0" kern="1200" dirty="0">
+                <a:solidFill>
+                  <a:schemeClr val="tx1"/>
+                </a:solidFill>
+                <a:effectLst/>
+                <a:latin typeface="+mn-lt"/>
+                <a:ea typeface="+mn-ea"/>
+                <a:cs typeface="+mn-cs"/>
+              </a:rPr>
+              <a:t> (Free-Version).</a:t>
+            </a:r>
+          </a:p>
+          <a:p>
+            <a:pPr marL="0" marR="0" lvl="0" indent="0" algn="l" defTabSz="914400" rtl="0" eaLnBrk="1" fontAlgn="auto" latinLnBrk="0" hangingPunct="1">
+              <a:lnSpc>
+                <a:spcPct val="100000"/>
+              </a:lnSpc>
+              <a:spcBef>
+                <a:spcPts val="0"/>
+              </a:spcBef>
+              <a:spcAft>
+                <a:spcPts val="0"/>
+              </a:spcAft>
+              <a:buClrTx/>
+              <a:buSzTx/>
+              <a:buFontTx/>
+              <a:buNone/>
+              <a:tabLst/>
+              <a:defRPr/>
+            </a:pPr>
+            <a:endParaRPr lang="de-DE" sz="1200" b="0" i="0" kern="1200" dirty="0">
+              <a:solidFill>
+                <a:schemeClr val="tx1"/>
+              </a:solidFill>
+              <a:effectLst/>
+              <a:latin typeface="+mn-lt"/>
+              <a:ea typeface="+mn-ea"/>
+              <a:cs typeface="+mn-cs"/>
+            </a:endParaRPr>
+          </a:p>
+          <a:p>
+            <a:pPr marL="0" marR="0" lvl="0" indent="0" algn="l" defTabSz="914400" rtl="0" eaLnBrk="1" fontAlgn="auto" latinLnBrk="0" hangingPunct="1">
+              <a:lnSpc>
+                <a:spcPct val="100000"/>
+              </a:lnSpc>
+              <a:spcBef>
+                <a:spcPts val="0"/>
+              </a:spcBef>
+              <a:spcAft>
+                <a:spcPts val="0"/>
+              </a:spcAft>
+              <a:buClrTx/>
+              <a:buSzTx/>
+              <a:buFontTx/>
+              <a:buNone/>
+              <a:tabLst/>
+              <a:defRPr/>
+            </a:pPr>
+            <a:r>
+              <a:rPr lang="de-DE" sz="1200" b="1" i="0" kern="1200" dirty="0">
+                <a:solidFill>
+                  <a:schemeClr val="tx1"/>
+                </a:solidFill>
+                <a:effectLst/>
+                <a:latin typeface="+mn-lt"/>
+                <a:ea typeface="+mn-ea"/>
+                <a:cs typeface="+mn-cs"/>
+              </a:rPr>
+              <a:t>Redis</a:t>
+            </a:r>
+            <a:r>
+              <a:rPr lang="de-DE" sz="1200" b="0" i="0" kern="1200" dirty="0">
+                <a:solidFill>
+                  <a:schemeClr val="tx1"/>
+                </a:solidFill>
+                <a:effectLst/>
+                <a:latin typeface="+mn-lt"/>
+                <a:ea typeface="+mn-ea"/>
+                <a:cs typeface="+mn-cs"/>
+              </a:rPr>
+              <a:t> dient zur </a:t>
+            </a:r>
+            <a:r>
+              <a:rPr lang="de-DE" sz="1200" b="1" i="0" kern="1200" dirty="0">
+                <a:solidFill>
+                  <a:schemeClr val="tx1"/>
+                </a:solidFill>
+                <a:effectLst/>
+                <a:latin typeface="+mn-lt"/>
+                <a:ea typeface="+mn-ea"/>
+                <a:cs typeface="+mn-cs"/>
+              </a:rPr>
+              <a:t>API-Rate-Limitation</a:t>
+            </a:r>
+            <a:r>
+              <a:rPr lang="de-DE" sz="1200" b="0" i="0" kern="1200" dirty="0">
+                <a:solidFill>
+                  <a:schemeClr val="tx1"/>
+                </a:solidFill>
+                <a:effectLst/>
+                <a:latin typeface="+mn-lt"/>
+                <a:ea typeface="+mn-ea"/>
+                <a:cs typeface="+mn-cs"/>
+              </a:rPr>
+              <a:t> (begrenzt Anfragen pro Zeit).</a:t>
+            </a:r>
+            <a:endParaRPr lang="de-AT" sz="1200" b="0" i="0" kern="1200" dirty="0">
+              <a:solidFill>
+                <a:schemeClr val="tx1"/>
+              </a:solidFill>
+              <a:effectLst/>
+              <a:latin typeface="+mn-lt"/>
+              <a:ea typeface="+mn-ea"/>
+              <a:cs typeface="+mn-cs"/>
+            </a:endParaRPr>
           </a:p>
         </p:txBody>
       </p:sp>
@@ -7235,6 +10728,122 @@
         <p:cNvPr id="1" name="">
           <a:extLst>
             <a:ext uri="{FF2B5EF4-FFF2-40B4-BE49-F238E27FC236}">
+              <a16:creationId xmlns:a16="http://schemas.microsoft.com/office/drawing/2014/main" id="{D9A29D9B-681E-64A9-ABD7-8F8987896B63}"/>
+            </a:ext>
+          </a:extLst>
+        </p:cNvPr>
+        <p:cNvGrpSpPr/>
+        <p:nvPr/>
+      </p:nvGrpSpPr>
+      <p:grpSpPr>
+        <a:xfrm>
+          <a:off x="0" y="0"/>
+          <a:ext cx="0" cy="0"/>
+          <a:chOff x="0" y="0"/>
+          <a:chExt cx="0" cy="0"/>
+        </a:xfrm>
+      </p:grpSpPr>
+      <p:sp>
+        <p:nvSpPr>
+          <p:cNvPr id="2" name="Folienbildplatzhalter 1">
+            <a:extLst>
+              <a:ext uri="{FF2B5EF4-FFF2-40B4-BE49-F238E27FC236}">
+                <a16:creationId xmlns:a16="http://schemas.microsoft.com/office/drawing/2014/main" id="{6E6CE8D6-5A4D-A1F5-A5FE-0FBEA1D3CC2B}"/>
+              </a:ext>
+            </a:extLst>
+          </p:cNvPr>
+          <p:cNvSpPr>
+            <a:spLocks noGrp="1" noRot="1" noChangeAspect="1"/>
+          </p:cNvSpPr>
+          <p:nvPr>
+            <p:ph type="sldImg"/>
+          </p:nvPr>
+        </p:nvSpPr>
+        <p:spPr/>
+        <p:txBody>
+          <a:bodyPr/>
+          <a:lstStyle/>
+          <a:p>
+            <a:endParaRPr lang="de-AT"/>
+          </a:p>
+        </p:txBody>
+      </p:sp>
+      <p:sp>
+        <p:nvSpPr>
+          <p:cNvPr id="3" name="Notizenplatzhalter 2">
+            <a:extLst>
+              <a:ext uri="{FF2B5EF4-FFF2-40B4-BE49-F238E27FC236}">
+                <a16:creationId xmlns:a16="http://schemas.microsoft.com/office/drawing/2014/main" id="{14024EFB-F9B9-FE61-F286-F46C8C35C285}"/>
+              </a:ext>
+            </a:extLst>
+          </p:cNvPr>
+          <p:cNvSpPr>
+            <a:spLocks noGrp="1"/>
+          </p:cNvSpPr>
+          <p:nvPr>
+            <p:ph type="body" idx="1"/>
+          </p:nvPr>
+        </p:nvSpPr>
+        <p:spPr/>
+        <p:txBody>
+          <a:bodyPr/>
+          <a:lstStyle/>
+          <a:p>
+            <a:pPr algn="just"/>
+            <a:endParaRPr lang="de-AT" dirty="0"/>
+          </a:p>
+        </p:txBody>
+      </p:sp>
+      <p:sp>
+        <p:nvSpPr>
+          <p:cNvPr id="4" name="Foliennummernplatzhalter 3">
+            <a:extLst>
+              <a:ext uri="{FF2B5EF4-FFF2-40B4-BE49-F238E27FC236}">
+                <a16:creationId xmlns:a16="http://schemas.microsoft.com/office/drawing/2014/main" id="{A7A5F1D5-5578-2799-8967-39FF187B8083}"/>
+              </a:ext>
+            </a:extLst>
+          </p:cNvPr>
+          <p:cNvSpPr>
+            <a:spLocks noGrp="1"/>
+          </p:cNvSpPr>
+          <p:nvPr>
+            <p:ph type="sldNum" sz="quarter" idx="5"/>
+          </p:nvPr>
+        </p:nvSpPr>
+        <p:spPr/>
+        <p:txBody>
+          <a:bodyPr/>
+          <a:lstStyle/>
+          <a:p>
+            <a:fld id="{652AAAB7-E5B9-4DC1-A9E7-22B3020BB7D5}" type="slidenum">
+              <a:rPr lang="de-AT" smtClean="0"/>
+              <a:t>8</a:t>
+            </a:fld>
+            <a:endParaRPr lang="de-AT"/>
+          </a:p>
+        </p:txBody>
+      </p:sp>
+    </p:spTree>
+    <p:extLst>
+      <p:ext uri="{BB962C8B-B14F-4D97-AF65-F5344CB8AC3E}">
+        <p14:creationId xmlns:p14="http://schemas.microsoft.com/office/powerpoint/2010/main" val="3909140820"/>
+      </p:ext>
+    </p:extLst>
+  </p:cSld>
+  <p:clrMapOvr>
+    <a:masterClrMapping/>
+  </p:clrMapOvr>
+</p:notes>
+</file>
+
+<file path=ppt/notesSlides/notesSlide9.xml><?xml version="1.0" encoding="utf-8"?>
+<p:notes xmlns:a="http://schemas.openxmlformats.org/drawingml/2006/main" xmlns:r="http://schemas.openxmlformats.org/officeDocument/2006/relationships" xmlns:p="http://schemas.openxmlformats.org/presentationml/2006/main">
+  <p:cSld>
+    <p:spTree>
+      <p:nvGrpSpPr>
+        <p:cNvPr id="1" name="">
+          <a:extLst>
+            <a:ext uri="{FF2B5EF4-FFF2-40B4-BE49-F238E27FC236}">
               <a16:creationId xmlns:a16="http://schemas.microsoft.com/office/drawing/2014/main" id="{D0883AA7-6307-34D3-9220-BBF63F0353C3}"/>
             </a:ext>
           </a:extLst>
@@ -7323,7 +10932,7 @@
           <a:p>
             <a:fld id="{652AAAB7-E5B9-4DC1-A9E7-22B3020BB7D5}" type="slidenum">
               <a:rPr lang="de-AT" smtClean="0"/>
-              <a:t>8</a:t>
+              <a:t>9</a:t>
             </a:fld>
             <a:endParaRPr lang="de-AT"/>
           </a:p>
@@ -7333,261 +10942,6 @@
     <p:extLst>
       <p:ext uri="{BB962C8B-B14F-4D97-AF65-F5344CB8AC3E}">
         <p14:creationId xmlns:p14="http://schemas.microsoft.com/office/powerpoint/2010/main" val="2014087782"/>
-      </p:ext>
-    </p:extLst>
-  </p:cSld>
-  <p:clrMapOvr>
-    <a:masterClrMapping/>
-  </p:clrMapOvr>
-</p:notes>
-</file>
-
-<file path=ppt/notesSlides/notesSlide9.xml><?xml version="1.0" encoding="utf-8"?>
-<p:notes xmlns:a="http://schemas.openxmlformats.org/drawingml/2006/main" xmlns:r="http://schemas.openxmlformats.org/officeDocument/2006/relationships" xmlns:p="http://schemas.openxmlformats.org/presentationml/2006/main">
-  <p:cSld>
-    <p:spTree>
-      <p:nvGrpSpPr>
-        <p:cNvPr id="1" name="">
-          <a:extLst>
-            <a:ext uri="{FF2B5EF4-FFF2-40B4-BE49-F238E27FC236}">
-              <a16:creationId xmlns:a16="http://schemas.microsoft.com/office/drawing/2014/main" id="{AC73C583-AE3A-3392-DE77-BD9A9C8CD370}"/>
-            </a:ext>
-          </a:extLst>
-        </p:cNvPr>
-        <p:cNvGrpSpPr/>
-        <p:nvPr/>
-      </p:nvGrpSpPr>
-      <p:grpSpPr>
-        <a:xfrm>
-          <a:off x="0" y="0"/>
-          <a:ext cx="0" cy="0"/>
-          <a:chOff x="0" y="0"/>
-          <a:chExt cx="0" cy="0"/>
-        </a:xfrm>
-      </p:grpSpPr>
-      <p:sp>
-        <p:nvSpPr>
-          <p:cNvPr id="2" name="Folienbildplatzhalter 1">
-            <a:extLst>
-              <a:ext uri="{FF2B5EF4-FFF2-40B4-BE49-F238E27FC236}">
-                <a16:creationId xmlns:a16="http://schemas.microsoft.com/office/drawing/2014/main" id="{77B67F90-E688-5A4F-2306-EAC511B9012C}"/>
-              </a:ext>
-            </a:extLst>
-          </p:cNvPr>
-          <p:cNvSpPr>
-            <a:spLocks noGrp="1" noRot="1" noChangeAspect="1"/>
-          </p:cNvSpPr>
-          <p:nvPr>
-            <p:ph type="sldImg"/>
-          </p:nvPr>
-        </p:nvSpPr>
-        <p:spPr/>
-        <p:txBody>
-          <a:bodyPr/>
-          <a:lstStyle/>
-          <a:p>
-            <a:endParaRPr lang="de-AT"/>
-          </a:p>
-        </p:txBody>
-      </p:sp>
-      <p:sp>
-        <p:nvSpPr>
-          <p:cNvPr id="3" name="Notizenplatzhalter 2">
-            <a:extLst>
-              <a:ext uri="{FF2B5EF4-FFF2-40B4-BE49-F238E27FC236}">
-                <a16:creationId xmlns:a16="http://schemas.microsoft.com/office/drawing/2014/main" id="{B0618AD7-9BC2-5416-3C55-10ABAD14409A}"/>
-              </a:ext>
-            </a:extLst>
-          </p:cNvPr>
-          <p:cNvSpPr>
-            <a:spLocks noGrp="1"/>
-          </p:cNvSpPr>
-          <p:nvPr>
-            <p:ph type="body" idx="1"/>
-          </p:nvPr>
-        </p:nvSpPr>
-        <p:spPr/>
-        <p:txBody>
-          <a:bodyPr/>
-          <a:lstStyle/>
-          <a:p>
-            <a:r>
-              <a:rPr lang="de-AT" sz="1200" b="0" i="0" kern="1200" dirty="0">
-                <a:solidFill>
-                  <a:schemeClr val="tx1"/>
-                </a:solidFill>
-                <a:effectLst/>
-                <a:latin typeface="+mn-lt"/>
-                <a:ea typeface="+mn-ea"/>
-                <a:cs typeface="+mn-cs"/>
-              </a:rPr>
-              <a:t>Gehen wir nun genauer auf den Chat ein.</a:t>
-            </a:r>
-          </a:p>
-          <a:p>
-            <a:pPr marL="0" marR="0" lvl="0" indent="0" algn="l" defTabSz="914400" rtl="0" eaLnBrk="1" fontAlgn="auto" latinLnBrk="0" hangingPunct="1">
-              <a:lnSpc>
-                <a:spcPct val="100000"/>
-              </a:lnSpc>
-              <a:spcBef>
-                <a:spcPts val="0"/>
-              </a:spcBef>
-              <a:spcAft>
-                <a:spcPts val="0"/>
-              </a:spcAft>
-              <a:buClrTx/>
-              <a:buSzTx/>
-              <a:buFontTx/>
-              <a:buNone/>
-              <a:tabLst/>
-              <a:defRPr/>
-            </a:pPr>
-            <a:endParaRPr lang="de-AT" sz="1200" b="0" i="0" kern="1200" dirty="0">
-              <a:solidFill>
-                <a:schemeClr val="tx1"/>
-              </a:solidFill>
-              <a:effectLst/>
-              <a:latin typeface="+mn-lt"/>
-              <a:ea typeface="+mn-ea"/>
-              <a:cs typeface="+mn-cs"/>
-            </a:endParaRPr>
-          </a:p>
-          <a:p>
-            <a:pPr marL="0" marR="0" lvl="0" indent="0" algn="l" defTabSz="914400" rtl="0" eaLnBrk="1" fontAlgn="auto" latinLnBrk="0" hangingPunct="1">
-              <a:lnSpc>
-                <a:spcPct val="100000"/>
-              </a:lnSpc>
-              <a:spcBef>
-                <a:spcPts val="0"/>
-              </a:spcBef>
-              <a:spcAft>
-                <a:spcPts val="0"/>
-              </a:spcAft>
-              <a:buClrTx/>
-              <a:buSzTx/>
-              <a:buFontTx/>
-              <a:buNone/>
-              <a:tabLst/>
-              <a:defRPr/>
-            </a:pPr>
-            <a:r>
-              <a:rPr lang="de-AT" sz="1200" b="0" i="0" kern="1200" dirty="0">
-                <a:solidFill>
-                  <a:schemeClr val="tx1"/>
-                </a:solidFill>
-                <a:effectLst/>
-                <a:latin typeface="+mn-lt"/>
-                <a:ea typeface="+mn-ea"/>
-                <a:cs typeface="+mn-cs"/>
-              </a:rPr>
-              <a:t>Das sich das Model auskennt über welche Karteikarten</a:t>
-            </a:r>
-          </a:p>
-          <a:p>
-            <a:pPr marL="0" marR="0" lvl="0" indent="0" algn="l" defTabSz="914400" rtl="0" eaLnBrk="1" fontAlgn="auto" latinLnBrk="0" hangingPunct="1">
-              <a:lnSpc>
-                <a:spcPct val="100000"/>
-              </a:lnSpc>
-              <a:spcBef>
-                <a:spcPts val="0"/>
-              </a:spcBef>
-              <a:spcAft>
-                <a:spcPts val="0"/>
-              </a:spcAft>
-              <a:buClrTx/>
-              <a:buSzTx/>
-              <a:buFontTx/>
-              <a:buNone/>
-              <a:tabLst/>
-              <a:defRPr/>
-            </a:pPr>
-            <a:r>
-              <a:rPr lang="de-AT" sz="1200" b="0" i="0" kern="1200" dirty="0">
-                <a:solidFill>
-                  <a:schemeClr val="tx1"/>
-                </a:solidFill>
-                <a:effectLst/>
-                <a:latin typeface="+mn-lt"/>
-                <a:ea typeface="+mn-ea"/>
-                <a:cs typeface="+mn-cs"/>
-              </a:rPr>
-              <a:t>Man spricht (Kontext) verwendet USki RAG … Retrieval-</a:t>
-            </a:r>
-            <a:r>
-              <a:rPr lang="de-AT" sz="1200" b="0" i="0" kern="1200" dirty="0" err="1">
-                <a:solidFill>
-                  <a:schemeClr val="tx1"/>
-                </a:solidFill>
-                <a:effectLst/>
-                <a:latin typeface="+mn-lt"/>
-                <a:ea typeface="+mn-ea"/>
-                <a:cs typeface="+mn-cs"/>
-              </a:rPr>
-              <a:t>Augmented</a:t>
-            </a:r>
-            <a:r>
-              <a:rPr lang="de-AT" sz="1200" b="0" i="0" kern="1200" dirty="0">
-                <a:solidFill>
-                  <a:schemeClr val="tx1"/>
-                </a:solidFill>
-                <a:effectLst/>
-                <a:latin typeface="+mn-lt"/>
-                <a:ea typeface="+mn-ea"/>
-                <a:cs typeface="+mn-cs"/>
-              </a:rPr>
-              <a:t> Generation</a:t>
-            </a:r>
-            <a:endParaRPr lang="de-AT" dirty="0"/>
-          </a:p>
-          <a:p>
-            <a:r>
-              <a:rPr lang="de-AT" sz="1200" b="0" i="0" kern="1200" dirty="0">
-                <a:solidFill>
-                  <a:schemeClr val="tx1"/>
-                </a:solidFill>
-                <a:effectLst/>
-                <a:latin typeface="+mn-lt"/>
-                <a:ea typeface="+mn-ea"/>
-                <a:cs typeface="+mn-cs"/>
-              </a:rPr>
-              <a:t>Auf Deutsch: „Abrufgestützte Generation“</a:t>
-            </a:r>
-          </a:p>
-        </p:txBody>
-      </p:sp>
-      <p:sp>
-        <p:nvSpPr>
-          <p:cNvPr id="4" name="Foliennummernplatzhalter 3">
-            <a:extLst>
-              <a:ext uri="{FF2B5EF4-FFF2-40B4-BE49-F238E27FC236}">
-                <a16:creationId xmlns:a16="http://schemas.microsoft.com/office/drawing/2014/main" id="{6BD0A78D-6714-BEA4-14B7-4B8455950EC5}"/>
-              </a:ext>
-            </a:extLst>
-          </p:cNvPr>
-          <p:cNvSpPr>
-            <a:spLocks noGrp="1"/>
-          </p:cNvSpPr>
-          <p:nvPr>
-            <p:ph type="sldNum" sz="quarter" idx="5"/>
-          </p:nvPr>
-        </p:nvSpPr>
-        <p:spPr/>
-        <p:txBody>
-          <a:bodyPr/>
-          <a:lstStyle/>
-          <a:p>
-            <a:fld id="{652AAAB7-E5B9-4DC1-A9E7-22B3020BB7D5}" type="slidenum">
-              <a:rPr lang="de-AT" smtClean="0"/>
-              <a:t>9</a:t>
-            </a:fld>
-            <a:endParaRPr lang="de-AT"/>
-          </a:p>
-        </p:txBody>
-      </p:sp>
-    </p:spTree>
-    <p:extLst>
-      <p:ext uri="{BB962C8B-B14F-4D97-AF65-F5344CB8AC3E}">
-        <p14:creationId xmlns:p14="http://schemas.microsoft.com/office/powerpoint/2010/main" val="407716091"/>
       </p:ext>
     </p:extLst>
   </p:cSld>
@@ -15961,6 +19315,110 @@
         <p:cNvPr id="1" name="">
           <a:extLst>
             <a:ext uri="{FF2B5EF4-FFF2-40B4-BE49-F238E27FC236}">
+              <a16:creationId xmlns:a16="http://schemas.microsoft.com/office/drawing/2014/main" id="{DC4A6B48-AD61-D1E5-7FC9-01A07CCA282B}"/>
+            </a:ext>
+          </a:extLst>
+        </p:cNvPr>
+        <p:cNvGrpSpPr/>
+        <p:nvPr/>
+      </p:nvGrpSpPr>
+      <p:grpSpPr>
+        <a:xfrm>
+          <a:off x="0" y="0"/>
+          <a:ext cx="0" cy="0"/>
+          <a:chOff x="0" y="0"/>
+          <a:chExt cx="0" cy="0"/>
+        </a:xfrm>
+      </p:grpSpPr>
+      <p:sp>
+        <p:nvSpPr>
+          <p:cNvPr id="2" name="Titel 1">
+            <a:extLst>
+              <a:ext uri="{FF2B5EF4-FFF2-40B4-BE49-F238E27FC236}">
+                <a16:creationId xmlns:a16="http://schemas.microsoft.com/office/drawing/2014/main" id="{4BC1A2EC-D92F-5390-E662-2B547AEC7D64}"/>
+              </a:ext>
+            </a:extLst>
+          </p:cNvPr>
+          <p:cNvSpPr>
+            <a:spLocks noGrp="1"/>
+          </p:cNvSpPr>
+          <p:nvPr>
+            <p:ph type="title"/>
+          </p:nvPr>
+        </p:nvSpPr>
+        <p:spPr/>
+        <p:txBody>
+          <a:bodyPr/>
+          <a:lstStyle/>
+          <a:p>
+            <a:r>
+              <a:rPr lang="de-AT" dirty="0"/>
+              <a:t>Sequence Diagramm - RAG</a:t>
+            </a:r>
+          </a:p>
+        </p:txBody>
+      </p:sp>
+      <p:pic>
+        <p:nvPicPr>
+          <p:cNvPr id="8" name="Inhaltsplatzhalter 7">
+            <a:extLst>
+              <a:ext uri="{FF2B5EF4-FFF2-40B4-BE49-F238E27FC236}">
+                <a16:creationId xmlns:a16="http://schemas.microsoft.com/office/drawing/2014/main" id="{AE7E5E09-6983-00F2-084E-B08B76516595}"/>
+              </a:ext>
+            </a:extLst>
+          </p:cNvPr>
+          <p:cNvPicPr>
+            <a:picLocks noGrp="1" noChangeAspect="1"/>
+          </p:cNvPicPr>
+          <p:nvPr>
+            <p:ph idx="1"/>
+          </p:nvPr>
+        </p:nvPicPr>
+        <p:blipFill>
+          <a:blip r:embed="rId3">
+            <a:extLst>
+              <a:ext uri="{28A0092B-C50C-407E-A947-70E740481C1C}">
+                <a14:useLocalDpi xmlns:a14="http://schemas.microsoft.com/office/drawing/2010/main" val="0"/>
+              </a:ext>
+            </a:extLst>
+          </a:blip>
+          <a:srcRect/>
+          <a:stretch/>
+        </p:blipFill>
+        <p:spPr>
+          <a:xfrm>
+            <a:off x="1885768" y="2087563"/>
+            <a:ext cx="8991964" cy="3979862"/>
+          </a:xfrm>
+          <a:prstGeom prst="rect">
+            <a:avLst/>
+          </a:prstGeom>
+        </p:spPr>
+      </p:pic>
+    </p:spTree>
+    <p:extLst>
+      <p:ext uri="{BB962C8B-B14F-4D97-AF65-F5344CB8AC3E}">
+        <p14:creationId xmlns:p14="http://schemas.microsoft.com/office/powerpoint/2010/main" val="4100904227"/>
+      </p:ext>
+    </p:extLst>
+  </p:cSld>
+  <p:clrMapOvr>
+    <a:masterClrMapping/>
+  </p:clrMapOvr>
+  <p:transition spd="med">
+    <p:pull/>
+  </p:transition>
+</p:sld>
+</file>
+
+<file path=ppt/slides/slide11.xml><?xml version="1.0" encoding="utf-8"?>
+<p:sld xmlns:a="http://schemas.openxmlformats.org/drawingml/2006/main" xmlns:r="http://schemas.openxmlformats.org/officeDocument/2006/relationships" xmlns:p="http://schemas.openxmlformats.org/presentationml/2006/main">
+  <p:cSld>
+    <p:spTree>
+      <p:nvGrpSpPr>
+        <p:cNvPr id="1" name="">
+          <a:extLst>
+            <a:ext uri="{FF2B5EF4-FFF2-40B4-BE49-F238E27FC236}">
               <a16:creationId xmlns:a16="http://schemas.microsoft.com/office/drawing/2014/main" id="{CCC9A286-14C5-DB77-1ADD-FE970D1152DD}"/>
             </a:ext>
           </a:extLst>
@@ -16531,6 +19989,14 @@
 <file path=ppt/slides/slide3.xml><?xml version="1.0" encoding="utf-8"?>
 <p:sld xmlns:a="http://schemas.openxmlformats.org/drawingml/2006/main" xmlns:r="http://schemas.openxmlformats.org/officeDocument/2006/relationships" xmlns:p="http://schemas.openxmlformats.org/presentationml/2006/main">
   <p:cSld>
+    <p:bg>
+      <p:bgPr>
+        <a:solidFill>
+          <a:schemeClr val="bg2"/>
+        </a:solidFill>
+        <a:effectLst/>
+      </p:bgPr>
+    </p:bg>
     <p:spTree>
       <p:nvGrpSpPr>
         <p:cNvPr id="1" name="">
@@ -16551,6 +20017,82 @@
           <a:chExt cx="0" cy="0"/>
         </a:xfrm>
       </p:grpSpPr>
+      <p:sp useBgFill="1">
+        <p:nvSpPr>
+          <p:cNvPr id="37" name="Rectangle 9">
+            <a:extLst>
+              <a:ext uri="{FF2B5EF4-FFF2-40B4-BE49-F238E27FC236}">
+                <a16:creationId xmlns:a16="http://schemas.microsoft.com/office/drawing/2014/main" id="{60B7752B-728D-4CA3-8923-C4F7F77029E3}"/>
+              </a:ext>
+              <a:ext uri="{C183D7F6-B498-43B3-948B-1728B52AA6E4}">
+                <adec:decorative xmlns:adec="http://schemas.microsoft.com/office/drawing/2017/decorative" val="1"/>
+              </a:ext>
+            </a:extLst>
+          </p:cNvPr>
+          <p:cNvSpPr>
+            <a:spLocks noGrp="1" noRot="1" noChangeAspect="1" noMove="1" noResize="1" noEditPoints="1" noAdjustHandles="1" noChangeArrowheads="1" noChangeShapeType="1" noTextEdit="1"/>
+          </p:cNvSpPr>
+          <p:nvPr>
+            <p:extLst>
+              <p:ext uri="{386F3935-93C4-4BCD-93E2-E3B085C9AB24}">
+                <p16:designElem xmlns:p16="http://schemas.microsoft.com/office/powerpoint/2015/main" val="1"/>
+              </p:ext>
+            </p:extLst>
+          </p:nvPr>
+        </p:nvSpPr>
+        <p:spPr>
+          <a:xfrm>
+            <a:off x="0" y="0"/>
+            <a:ext cx="12192000" cy="6858000"/>
+          </a:xfrm>
+          <a:prstGeom prst="rect">
+            <a:avLst/>
+          </a:prstGeom>
+          <a:ln w="12700" cap="flat" cmpd="sng" algn="ctr">
+            <a:noFill/>
+            <a:prstDash val="solid"/>
+            <a:miter lim="800000"/>
+          </a:ln>
+          <a:effectLst/>
+          <a:extLst>
+            <a:ext uri="{91240B29-F687-4F45-9708-019B960494DF}">
+              <a14:hiddenLine xmlns:a14="http://schemas.microsoft.com/office/drawing/2010/main" w="12700" cap="flat" cmpd="sng" algn="ctr">
+                <a:solidFill>
+                  <a:schemeClr val="accent1">
+                    <a:shade val="50000"/>
+                  </a:schemeClr>
+                </a:solidFill>
+                <a:prstDash val="solid"/>
+                <a:miter lim="800000"/>
+              </a14:hiddenLine>
+            </a:ext>
+          </a:extLst>
+        </p:spPr>
+        <p:style>
+          <a:lnRef idx="2">
+            <a:schemeClr val="accent1">
+              <a:shade val="50000"/>
+            </a:schemeClr>
+          </a:lnRef>
+          <a:fillRef idx="1">
+            <a:schemeClr val="accent1"/>
+          </a:fillRef>
+          <a:effectRef idx="0">
+            <a:schemeClr val="accent1"/>
+          </a:effectRef>
+          <a:fontRef idx="minor">
+            <a:schemeClr val="lt1"/>
+          </a:fontRef>
+        </p:style>
+        <p:txBody>
+          <a:bodyPr rtlCol="0" anchor="ctr"/>
+          <a:lstStyle/>
+          <a:p>
+            <a:pPr algn="ctr"/>
+            <a:endParaRPr lang="en-US"/>
+          </a:p>
+        </p:txBody>
+      </p:sp>
       <p:sp>
         <p:nvSpPr>
           <p:cNvPr id="2" name="Titel 1">
@@ -16569,112 +20111,921 @@
         </p:nvSpPr>
         <p:spPr>
           <a:xfrm>
-            <a:off x="550863" y="550800"/>
-            <a:ext cx="7308850" cy="986400"/>
+            <a:off x="550863" y="1520825"/>
+            <a:ext cx="4535487" cy="3779838"/>
           </a:xfrm>
         </p:spPr>
         <p:txBody>
-          <a:bodyPr wrap="square" anchor="ctr">
+          <a:bodyPr anchor="ctr">
             <a:normAutofit/>
           </a:bodyPr>
           <a:lstStyle/>
           <a:p>
             <a:r>
-              <a:rPr lang="de-AT" dirty="0"/>
+              <a:rPr lang="de-AT" sz="6600" dirty="0"/>
               <a:t>Techstack</a:t>
             </a:r>
+            <a:endParaRPr lang="de-AT" sz="6400" dirty="0"/>
+          </a:p>
+        </p:txBody>
+      </p:sp>
+      <p:grpSp>
+        <p:nvGrpSpPr>
+          <p:cNvPr id="38" name="Group 11">
+            <a:extLst>
+              <a:ext uri="{FF2B5EF4-FFF2-40B4-BE49-F238E27FC236}">
+                <a16:creationId xmlns:a16="http://schemas.microsoft.com/office/drawing/2014/main" id="{20205E53-D75C-4F15-A4A3-21DA0826FCE9}"/>
+              </a:ext>
+              <a:ext uri="{C183D7F6-B498-43B3-948B-1728B52AA6E4}">
+                <adec:decorative xmlns:adec="http://schemas.microsoft.com/office/drawing/2017/decorative" val="1"/>
+              </a:ext>
+            </a:extLst>
+          </p:cNvPr>
+          <p:cNvGrpSpPr>
+            <a:grpSpLocks noGrp="1" noUngrp="1" noRot="1" noChangeAspect="1" noMove="1" noResize="1"/>
+          </p:cNvGrpSpPr>
+          <p:nvPr>
+            <p:extLst>
+              <p:ext uri="{386F3935-93C4-4BCD-93E2-E3B085C9AB24}">
+                <p16:designElem xmlns:p16="http://schemas.microsoft.com/office/powerpoint/2015/main" val="1"/>
+              </p:ext>
+            </p:extLst>
+          </p:nvPr>
+        </p:nvGrpSpPr>
+        <p:grpSpPr>
+          <a:xfrm>
+            <a:off x="1132950" y="623661"/>
+            <a:ext cx="667800" cy="631474"/>
+            <a:chOff x="8069541" y="1262702"/>
+            <a:chExt cx="667800" cy="631474"/>
+          </a:xfrm>
+        </p:grpSpPr>
+        <p:sp>
+          <p:nvSpPr>
+            <p:cNvPr id="13" name="Freeform: Shape 12">
+              <a:extLst>
+                <a:ext uri="{FF2B5EF4-FFF2-40B4-BE49-F238E27FC236}">
+                  <a16:creationId xmlns:a16="http://schemas.microsoft.com/office/drawing/2014/main" id="{EB48C7E5-9699-4FB1-9EEE-581C686293C0}"/>
+                </a:ext>
+                <a:ext uri="{C183D7F6-B498-43B3-948B-1728B52AA6E4}">
+                  <adec:decorative xmlns:adec="http://schemas.microsoft.com/office/drawing/2017/decorative" val="1"/>
+                </a:ext>
+              </a:extLst>
+            </p:cNvPr>
+            <p:cNvSpPr>
+              <a:spLocks noChangeAspect="1"/>
+            </p:cNvSpPr>
+            <p:nvPr>
+              <p:extLst>
+                <p:ext uri="{386F3935-93C4-4BCD-93E2-E3B085C9AB24}">
+                  <p16:designElem xmlns:p16="http://schemas.microsoft.com/office/powerpoint/2015/main" val="1"/>
+                </p:ext>
+              </p:extLst>
+            </p:nvPr>
+          </p:nvSpPr>
+          <p:spPr>
+            <a:xfrm rot="18900000">
+              <a:off x="8069541" y="1262702"/>
+              <a:ext cx="540000" cy="631474"/>
+            </a:xfrm>
+            <a:custGeom>
+              <a:avLst/>
+              <a:gdLst>
+                <a:gd name="connsiteX0" fmla="*/ 540000 w 1080000"/>
+                <a:gd name="connsiteY0" fmla="*/ 0 h 1262947"/>
+                <a:gd name="connsiteX1" fmla="*/ 1080000 w 1080000"/>
+                <a:gd name="connsiteY1" fmla="*/ 931034 h 1262947"/>
+                <a:gd name="connsiteX2" fmla="*/ 1064374 w 1080000"/>
+                <a:gd name="connsiteY2" fmla="*/ 931034 h 1262947"/>
+                <a:gd name="connsiteX3" fmla="*/ 1069029 w 1080000"/>
+                <a:gd name="connsiteY3" fmla="*/ 938533 h 1262947"/>
+                <a:gd name="connsiteX4" fmla="*/ 1080000 w 1080000"/>
+                <a:gd name="connsiteY4" fmla="*/ 992947 h 1262947"/>
+                <a:gd name="connsiteX5" fmla="*/ 540000 w 1080000"/>
+                <a:gd name="connsiteY5" fmla="*/ 1262947 h 1262947"/>
+                <a:gd name="connsiteX6" fmla="*/ 0 w 1080000"/>
+                <a:gd name="connsiteY6" fmla="*/ 992947 h 1262947"/>
+                <a:gd name="connsiteX7" fmla="*/ 10971 w 1080000"/>
+                <a:gd name="connsiteY7" fmla="*/ 938533 h 1262947"/>
+                <a:gd name="connsiteX8" fmla="*/ 15626 w 1080000"/>
+                <a:gd name="connsiteY8" fmla="*/ 931034 h 1262947"/>
+                <a:gd name="connsiteX9" fmla="*/ 0 w 1080000"/>
+                <a:gd name="connsiteY9" fmla="*/ 931034 h 1262947"/>
+                <a:gd name="connsiteX0" fmla="*/ 540000 w 1080000"/>
+                <a:gd name="connsiteY0" fmla="*/ 0 h 1262947"/>
+                <a:gd name="connsiteX1" fmla="*/ 1080000 w 1080000"/>
+                <a:gd name="connsiteY1" fmla="*/ 931034 h 1262947"/>
+                <a:gd name="connsiteX2" fmla="*/ 1064374 w 1080000"/>
+                <a:gd name="connsiteY2" fmla="*/ 931034 h 1262947"/>
+                <a:gd name="connsiteX3" fmla="*/ 1069029 w 1080000"/>
+                <a:gd name="connsiteY3" fmla="*/ 938533 h 1262947"/>
+                <a:gd name="connsiteX4" fmla="*/ 1080000 w 1080000"/>
+                <a:gd name="connsiteY4" fmla="*/ 992947 h 1262947"/>
+                <a:gd name="connsiteX5" fmla="*/ 540000 w 1080000"/>
+                <a:gd name="connsiteY5" fmla="*/ 1262947 h 1262947"/>
+                <a:gd name="connsiteX6" fmla="*/ 0 w 1080000"/>
+                <a:gd name="connsiteY6" fmla="*/ 992947 h 1262947"/>
+                <a:gd name="connsiteX7" fmla="*/ 10971 w 1080000"/>
+                <a:gd name="connsiteY7" fmla="*/ 938533 h 1262947"/>
+                <a:gd name="connsiteX8" fmla="*/ 15626 w 1080000"/>
+                <a:gd name="connsiteY8" fmla="*/ 931034 h 1262947"/>
+                <a:gd name="connsiteX9" fmla="*/ 540000 w 1080000"/>
+                <a:gd name="connsiteY9" fmla="*/ 0 h 1262947"/>
+                <a:gd name="connsiteX0" fmla="*/ 540000 w 1080000"/>
+                <a:gd name="connsiteY0" fmla="*/ 0 h 1262947"/>
+                <a:gd name="connsiteX1" fmla="*/ 1064374 w 1080000"/>
+                <a:gd name="connsiteY1" fmla="*/ 931034 h 1262947"/>
+                <a:gd name="connsiteX2" fmla="*/ 1069029 w 1080000"/>
+                <a:gd name="connsiteY2" fmla="*/ 938533 h 1262947"/>
+                <a:gd name="connsiteX3" fmla="*/ 1080000 w 1080000"/>
+                <a:gd name="connsiteY3" fmla="*/ 992947 h 1262947"/>
+                <a:gd name="connsiteX4" fmla="*/ 540000 w 1080000"/>
+                <a:gd name="connsiteY4" fmla="*/ 1262947 h 1262947"/>
+                <a:gd name="connsiteX5" fmla="*/ 0 w 1080000"/>
+                <a:gd name="connsiteY5" fmla="*/ 992947 h 1262947"/>
+                <a:gd name="connsiteX6" fmla="*/ 10971 w 1080000"/>
+                <a:gd name="connsiteY6" fmla="*/ 938533 h 1262947"/>
+                <a:gd name="connsiteX7" fmla="*/ 15626 w 1080000"/>
+                <a:gd name="connsiteY7" fmla="*/ 931034 h 1262947"/>
+                <a:gd name="connsiteX8" fmla="*/ 540000 w 1080000"/>
+                <a:gd name="connsiteY8" fmla="*/ 0 h 1262947"/>
+              </a:gdLst>
+              <a:ahLst/>
+              <a:cxnLst>
+                <a:cxn ang="0">
+                  <a:pos x="connsiteX0" y="connsiteY0"/>
+                </a:cxn>
+                <a:cxn ang="0">
+                  <a:pos x="connsiteX1" y="connsiteY1"/>
+                </a:cxn>
+                <a:cxn ang="0">
+                  <a:pos x="connsiteX2" y="connsiteY2"/>
+                </a:cxn>
+                <a:cxn ang="0">
+                  <a:pos x="connsiteX3" y="connsiteY3"/>
+                </a:cxn>
+                <a:cxn ang="0">
+                  <a:pos x="connsiteX4" y="connsiteY4"/>
+                </a:cxn>
+                <a:cxn ang="0">
+                  <a:pos x="connsiteX5" y="connsiteY5"/>
+                </a:cxn>
+                <a:cxn ang="0">
+                  <a:pos x="connsiteX6" y="connsiteY6"/>
+                </a:cxn>
+                <a:cxn ang="0">
+                  <a:pos x="connsiteX7" y="connsiteY7"/>
+                </a:cxn>
+                <a:cxn ang="0">
+                  <a:pos x="connsiteX8" y="connsiteY8"/>
+                </a:cxn>
+              </a:cxnLst>
+              <a:rect l="l" t="t" r="r" b="b"/>
+              <a:pathLst>
+                <a:path w="1080000" h="1262947">
+                  <a:moveTo>
+                    <a:pt x="540000" y="0"/>
+                  </a:moveTo>
+                  <a:lnTo>
+                    <a:pt x="1064374" y="931034"/>
+                  </a:lnTo>
+                  <a:lnTo>
+                    <a:pt x="1069029" y="938533"/>
+                  </a:lnTo>
+                  <a:cubicBezTo>
+                    <a:pt x="1076223" y="956109"/>
+                    <a:pt x="1080000" y="974307"/>
+                    <a:pt x="1080000" y="992947"/>
+                  </a:cubicBezTo>
+                  <a:cubicBezTo>
+                    <a:pt x="1080000" y="1142064"/>
+                    <a:pt x="838234" y="1262947"/>
+                    <a:pt x="540000" y="1262947"/>
+                  </a:cubicBezTo>
+                  <a:cubicBezTo>
+                    <a:pt x="241766" y="1262947"/>
+                    <a:pt x="0" y="1142064"/>
+                    <a:pt x="0" y="992947"/>
+                  </a:cubicBezTo>
+                  <a:cubicBezTo>
+                    <a:pt x="0" y="974307"/>
+                    <a:pt x="3778" y="956109"/>
+                    <a:pt x="10971" y="938533"/>
+                  </a:cubicBezTo>
+                  <a:lnTo>
+                    <a:pt x="15626" y="931034"/>
+                  </a:lnTo>
+                  <a:lnTo>
+                    <a:pt x="540000" y="0"/>
+                  </a:lnTo>
+                  <a:close/>
+                </a:path>
+              </a:pathLst>
+            </a:custGeom>
+            <a:gradFill>
+              <a:gsLst>
+                <a:gs pos="60000">
+                  <a:schemeClr val="bg2">
+                    <a:lumMod val="90000"/>
+                    <a:lumOff val="10000"/>
+                  </a:schemeClr>
+                </a:gs>
+                <a:gs pos="30000">
+                  <a:schemeClr val="bg2">
+                    <a:lumMod val="90000"/>
+                    <a:lumOff val="10000"/>
+                  </a:schemeClr>
+                </a:gs>
+                <a:gs pos="40000">
+                  <a:schemeClr val="bg2">
+                    <a:lumMod val="75000"/>
+                    <a:lumOff val="25000"/>
+                  </a:schemeClr>
+                </a:gs>
+                <a:gs pos="100000">
+                  <a:schemeClr val="bg2"/>
+                </a:gs>
+              </a:gsLst>
+              <a:lin ang="10200000" scaled="0"/>
+            </a:gradFill>
+            <a:ln>
+              <a:noFill/>
+            </a:ln>
+            <a:effectLst>
+              <a:innerShdw blurRad="127000" dist="50800" dir="4200000">
+                <a:schemeClr val="accent1">
+                  <a:lumMod val="60000"/>
+                  <a:lumOff val="40000"/>
+                  <a:alpha val="20000"/>
+                </a:schemeClr>
+              </a:innerShdw>
+            </a:effectLst>
+          </p:spPr>
+          <p:style>
+            <a:lnRef idx="2">
+              <a:schemeClr val="accent1">
+                <a:shade val="50000"/>
+              </a:schemeClr>
+            </a:lnRef>
+            <a:fillRef idx="1">
+              <a:schemeClr val="accent1"/>
+            </a:fillRef>
+            <a:effectRef idx="0">
+              <a:schemeClr val="accent1"/>
+            </a:effectRef>
+            <a:fontRef idx="minor">
+              <a:schemeClr val="lt1"/>
+            </a:fontRef>
+          </p:style>
+          <p:txBody>
+            <a:bodyPr rot="0" spcFirstLastPara="0" vertOverflow="overflow" horzOverflow="overflow" vert="horz" wrap="square" lIns="91440" tIns="45720" rIns="91440" bIns="45720" numCol="1" spcCol="0" rtlCol="0" fromWordArt="0" anchor="ctr" anchorCtr="0" forceAA="0" compatLnSpc="1">
+              <a:prstTxWarp prst="textNoShape">
+                <a:avLst/>
+              </a:prstTxWarp>
+              <a:noAutofit/>
+            </a:bodyPr>
+            <a:lstStyle/>
+            <a:p>
+              <a:pPr algn="ctr"/>
+              <a:endParaRPr lang="en-US"/>
+            </a:p>
+          </p:txBody>
+        </p:sp>
+        <p:sp>
+          <p:nvSpPr>
+            <p:cNvPr id="39" name="Oval 13">
+              <a:extLst>
+                <a:ext uri="{FF2B5EF4-FFF2-40B4-BE49-F238E27FC236}">
+                  <a16:creationId xmlns:a16="http://schemas.microsoft.com/office/drawing/2014/main" id="{316993F2-7052-4269-8B81-AC271D2D9911}"/>
+                </a:ext>
+                <a:ext uri="{C183D7F6-B498-43B3-948B-1728B52AA6E4}">
+                  <adec:decorative xmlns:adec="http://schemas.microsoft.com/office/drawing/2017/decorative" val="1"/>
+                </a:ext>
+              </a:extLst>
+            </p:cNvPr>
+            <p:cNvSpPr/>
+            <p:nvPr>
+              <p:extLst>
+                <p:ext uri="{386F3935-93C4-4BCD-93E2-E3B085C9AB24}">
+                  <p16:designElem xmlns:p16="http://schemas.microsoft.com/office/powerpoint/2015/main" val="1"/>
+                </p:ext>
+              </p:extLst>
+            </p:nvPr>
+          </p:nvSpPr>
+          <p:spPr>
+            <a:xfrm rot="2700000">
+              <a:off x="8332341" y="1436239"/>
+              <a:ext cx="270000" cy="540000"/>
+            </a:xfrm>
+            <a:prstGeom prst="ellipse">
+              <a:avLst/>
+            </a:prstGeom>
+            <a:solidFill>
+              <a:schemeClr val="bg2">
+                <a:lumMod val="90000"/>
+                <a:lumOff val="10000"/>
+              </a:schemeClr>
+            </a:solidFill>
+            <a:ln>
+              <a:noFill/>
+            </a:ln>
+            <a:effectLst>
+              <a:innerShdw blurRad="1270000" dist="2540000">
+                <a:schemeClr val="accent1">
+                  <a:lumMod val="60000"/>
+                  <a:lumOff val="40000"/>
+                  <a:alpha val="0"/>
+                </a:schemeClr>
+              </a:innerShdw>
+            </a:effectLst>
+          </p:spPr>
+          <p:style>
+            <a:lnRef idx="2">
+              <a:schemeClr val="accent1">
+                <a:shade val="50000"/>
+              </a:schemeClr>
+            </a:lnRef>
+            <a:fillRef idx="1">
+              <a:schemeClr val="accent1"/>
+            </a:fillRef>
+            <a:effectRef idx="0">
+              <a:schemeClr val="accent1"/>
+            </a:effectRef>
+            <a:fontRef idx="minor">
+              <a:schemeClr val="lt1"/>
+            </a:fontRef>
+          </p:style>
+          <p:txBody>
+            <a:bodyPr rot="0" spcFirstLastPara="0" vertOverflow="overflow" horzOverflow="overflow" vert="horz" wrap="square" lIns="91440" tIns="45720" rIns="91440" bIns="45720" numCol="1" spcCol="0" rtlCol="0" fromWordArt="0" anchor="ctr" anchorCtr="0" forceAA="0" compatLnSpc="1">
+              <a:prstTxWarp prst="textNoShape">
+                <a:avLst/>
+              </a:prstTxWarp>
+              <a:noAutofit/>
+            </a:bodyPr>
+            <a:lstStyle/>
+            <a:p>
+              <a:pPr algn="ctr"/>
+              <a:endParaRPr lang="en-US" dirty="0"/>
+            </a:p>
+          </p:txBody>
+        </p:sp>
+      </p:grpSp>
+      <p:sp>
+        <p:nvSpPr>
+          <p:cNvPr id="40" name="Oval 15">
+            <a:extLst>
+              <a:ext uri="{FF2B5EF4-FFF2-40B4-BE49-F238E27FC236}">
+                <a16:creationId xmlns:a16="http://schemas.microsoft.com/office/drawing/2014/main" id="{52D58DC7-20C8-4471-BAA7-B296A2AEC3F6}"/>
+              </a:ext>
+              <a:ext uri="{C183D7F6-B498-43B3-948B-1728B52AA6E4}">
+                <adec:decorative xmlns:adec="http://schemas.microsoft.com/office/drawing/2017/decorative" val="1"/>
+              </a:ext>
+            </a:extLst>
+          </p:cNvPr>
+          <p:cNvSpPr>
+            <a:spLocks noGrp="1" noRot="1" noChangeAspect="1" noMove="1" noResize="1" noEditPoints="1" noAdjustHandles="1" noChangeArrowheads="1" noChangeShapeType="1" noTextEdit="1"/>
+          </p:cNvSpPr>
+          <p:nvPr>
+            <p:extLst>
+              <p:ext uri="{386F3935-93C4-4BCD-93E2-E3B085C9AB24}">
+                <p16:designElem xmlns:p16="http://schemas.microsoft.com/office/powerpoint/2015/main" val="1"/>
+              </p:ext>
+            </p:extLst>
+          </p:nvPr>
+        </p:nvSpPr>
+        <p:spPr>
+          <a:xfrm>
+            <a:off x="482384" y="4977175"/>
+            <a:ext cx="360000" cy="360000"/>
+          </a:xfrm>
+          <a:prstGeom prst="ellipse">
+            <a:avLst/>
+          </a:prstGeom>
+          <a:gradFill flip="none" rotWithShape="1">
+            <a:gsLst>
+              <a:gs pos="100000">
+                <a:schemeClr val="bg2">
+                  <a:lumMod val="50000"/>
+                  <a:lumOff val="50000"/>
+                </a:schemeClr>
+              </a:gs>
+              <a:gs pos="60000">
+                <a:schemeClr val="bg2"/>
+              </a:gs>
+            </a:gsLst>
+            <a:path path="circle">
+              <a:fillToRect l="100000" b="100000"/>
+            </a:path>
+            <a:tileRect t="-100000" r="-100000"/>
+          </a:gradFill>
+          <a:ln>
+            <a:noFill/>
+          </a:ln>
+          <a:effectLst>
+            <a:innerShdw blurRad="127000" dist="63500" dir="2700000">
+              <a:schemeClr val="accent1">
+                <a:lumMod val="60000"/>
+                <a:lumOff val="40000"/>
+                <a:alpha val="20000"/>
+              </a:schemeClr>
+            </a:innerShdw>
+            <a:softEdge rad="0"/>
+          </a:effectLst>
+        </p:spPr>
+        <p:style>
+          <a:lnRef idx="2">
+            <a:schemeClr val="accent1">
+              <a:shade val="50000"/>
+            </a:schemeClr>
+          </a:lnRef>
+          <a:fillRef idx="1">
+            <a:schemeClr val="accent1"/>
+          </a:fillRef>
+          <a:effectRef idx="0">
+            <a:schemeClr val="accent1"/>
+          </a:effectRef>
+          <a:fontRef idx="minor">
+            <a:schemeClr val="lt1"/>
+          </a:fontRef>
+        </p:style>
+        <p:txBody>
+          <a:bodyPr rot="0" spcFirstLastPara="0" vertOverflow="overflow" horzOverflow="overflow" vert="horz" wrap="square" lIns="91440" tIns="45720" rIns="91440" bIns="45720" numCol="1" spcCol="0" rtlCol="0" fromWordArt="0" anchor="ctr" anchorCtr="0" forceAA="0" compatLnSpc="1">
+            <a:prstTxWarp prst="textNoShape">
+              <a:avLst/>
+            </a:prstTxWarp>
+            <a:noAutofit/>
+          </a:bodyPr>
+          <a:lstStyle/>
+          <a:p>
+            <a:pPr algn="ctr"/>
+            <a:endParaRPr lang="en-US"/>
           </a:p>
         </p:txBody>
       </p:sp>
       <p:sp>
         <p:nvSpPr>
-          <p:cNvPr id="4" name="Inhaltsplatzhalter 3">
+          <p:cNvPr id="41" name="Freeform: Shape 17">
             <a:extLst>
               <a:ext uri="{FF2B5EF4-FFF2-40B4-BE49-F238E27FC236}">
-                <a16:creationId xmlns:a16="http://schemas.microsoft.com/office/drawing/2014/main" id="{3FF8607D-81FB-3495-9CC3-CAA5B05571EB}"/>
+                <a16:creationId xmlns:a16="http://schemas.microsoft.com/office/drawing/2014/main" id="{8E4AABAC-100B-437F-86D3-981412859411}"/>
+              </a:ext>
+              <a:ext uri="{C183D7F6-B498-43B3-948B-1728B52AA6E4}">
+                <adec:decorative xmlns:adec="http://schemas.microsoft.com/office/drawing/2017/decorative" val="1"/>
               </a:ext>
             </a:extLst>
           </p:cNvPr>
           <p:cNvSpPr>
-            <a:spLocks noGrp="1"/>
+            <a:spLocks noGrp="1" noRot="1" noChangeAspect="1" noMove="1" noResize="1" noEditPoints="1" noAdjustHandles="1" noChangeArrowheads="1" noChangeShapeType="1" noTextEdit="1"/>
           </p:cNvSpPr>
           <p:nvPr>
-            <p:ph idx="1"/>
+            <p:extLst>
+              <p:ext uri="{386F3935-93C4-4BCD-93E2-E3B085C9AB24}">
+                <p16:designElem xmlns:p16="http://schemas.microsoft.com/office/powerpoint/2015/main" val="1"/>
+              </p:ext>
+            </p:extLst>
           </p:nvPr>
         </p:nvSpPr>
-        <p:spPr/>
+        <p:spPr>
+          <a:xfrm rot="18900000">
+            <a:off x="3261346" y="5733597"/>
+            <a:ext cx="1758388" cy="926985"/>
+          </a:xfrm>
+          <a:custGeom>
+            <a:avLst/>
+            <a:gdLst>
+              <a:gd name="connsiteX0" fmla="*/ 1486881 w 1758388"/>
+              <a:gd name="connsiteY0" fmla="*/ 271508 h 926985"/>
+              <a:gd name="connsiteX1" fmla="*/ 1758388 w 1758388"/>
+              <a:gd name="connsiteY1" fmla="*/ 926985 h 926985"/>
+              <a:gd name="connsiteX2" fmla="*/ 1294895 w 1758388"/>
+              <a:gd name="connsiteY2" fmla="*/ 926985 h 926985"/>
+              <a:gd name="connsiteX3" fmla="*/ 831404 w 1758388"/>
+              <a:gd name="connsiteY3" fmla="*/ 463493 h 926985"/>
+              <a:gd name="connsiteX4" fmla="*/ 377328 w 1758388"/>
+              <a:gd name="connsiteY4" fmla="*/ 833575 h 926985"/>
+              <a:gd name="connsiteX5" fmla="*/ 371585 w 1758388"/>
+              <a:gd name="connsiteY5" fmla="*/ 890552 h 926985"/>
+              <a:gd name="connsiteX6" fmla="*/ 0 w 1758388"/>
+              <a:gd name="connsiteY6" fmla="*/ 518968 h 926985"/>
+              <a:gd name="connsiteX7" fmla="*/ 16301 w 1758388"/>
+              <a:gd name="connsiteY7" fmla="*/ 485129 h 926985"/>
+              <a:gd name="connsiteX8" fmla="*/ 831403 w 1758388"/>
+              <a:gd name="connsiteY8" fmla="*/ 0 h 926985"/>
+              <a:gd name="connsiteX9" fmla="*/ 1486881 w 1758388"/>
+              <a:gd name="connsiteY9" fmla="*/ 271508 h 926985"/>
+            </a:gdLst>
+            <a:ahLst/>
+            <a:cxnLst>
+              <a:cxn ang="0">
+                <a:pos x="connsiteX0" y="connsiteY0"/>
+              </a:cxn>
+              <a:cxn ang="0">
+                <a:pos x="connsiteX1" y="connsiteY1"/>
+              </a:cxn>
+              <a:cxn ang="0">
+                <a:pos x="connsiteX2" y="connsiteY2"/>
+              </a:cxn>
+              <a:cxn ang="0">
+                <a:pos x="connsiteX3" y="connsiteY3"/>
+              </a:cxn>
+              <a:cxn ang="0">
+                <a:pos x="connsiteX4" y="connsiteY4"/>
+              </a:cxn>
+              <a:cxn ang="0">
+                <a:pos x="connsiteX5" y="connsiteY5"/>
+              </a:cxn>
+              <a:cxn ang="0">
+                <a:pos x="connsiteX6" y="connsiteY6"/>
+              </a:cxn>
+              <a:cxn ang="0">
+                <a:pos x="connsiteX7" y="connsiteY7"/>
+              </a:cxn>
+              <a:cxn ang="0">
+                <a:pos x="connsiteX8" y="connsiteY8"/>
+              </a:cxn>
+              <a:cxn ang="0">
+                <a:pos x="connsiteX9" y="connsiteY9"/>
+              </a:cxn>
+            </a:cxnLst>
+            <a:rect l="l" t="t" r="r" b="b"/>
+            <a:pathLst>
+              <a:path w="1758388" h="926985">
+                <a:moveTo>
+                  <a:pt x="1486881" y="271508"/>
+                </a:moveTo>
+                <a:cubicBezTo>
+                  <a:pt x="1654632" y="439259"/>
+                  <a:pt x="1758388" y="671005"/>
+                  <a:pt x="1758388" y="926985"/>
+                </a:cubicBezTo>
+                <a:lnTo>
+                  <a:pt x="1294895" y="926985"/>
+                </a:lnTo>
+                <a:cubicBezTo>
+                  <a:pt x="1294895" y="671005"/>
+                  <a:pt x="1087383" y="463493"/>
+                  <a:pt x="831404" y="463493"/>
+                </a:cubicBezTo>
+                <a:cubicBezTo>
+                  <a:pt x="607421" y="463493"/>
+                  <a:pt x="420547" y="622370"/>
+                  <a:pt x="377328" y="833575"/>
+                </a:cubicBezTo>
+                <a:lnTo>
+                  <a:pt x="371585" y="890552"/>
+                </a:lnTo>
+                <a:lnTo>
+                  <a:pt x="0" y="518968"/>
+                </a:lnTo>
+                <a:lnTo>
+                  <a:pt x="16301" y="485129"/>
+                </a:lnTo>
+                <a:cubicBezTo>
+                  <a:pt x="173276" y="196165"/>
+                  <a:pt x="479432" y="0"/>
+                  <a:pt x="831403" y="0"/>
+                </a:cubicBezTo>
+                <a:cubicBezTo>
+                  <a:pt x="1087383" y="0"/>
+                  <a:pt x="1319129" y="103757"/>
+                  <a:pt x="1486881" y="271508"/>
+                </a:cubicBezTo>
+                <a:close/>
+              </a:path>
+            </a:pathLst>
+          </a:custGeom>
+          <a:solidFill>
+            <a:schemeClr val="bg2"/>
+          </a:solidFill>
+          <a:ln>
+            <a:noFill/>
+          </a:ln>
+          <a:effectLst>
+            <a:innerShdw blurRad="254000" dist="50800" dir="5400000">
+              <a:schemeClr val="accent1">
+                <a:lumMod val="40000"/>
+                <a:lumOff val="60000"/>
+                <a:alpha val="40000"/>
+              </a:schemeClr>
+            </a:innerShdw>
+          </a:effectLst>
+        </p:spPr>
+        <p:style>
+          <a:lnRef idx="2">
+            <a:schemeClr val="accent1">
+              <a:shade val="50000"/>
+            </a:schemeClr>
+          </a:lnRef>
+          <a:fillRef idx="1">
+            <a:schemeClr val="accent1"/>
+          </a:fillRef>
+          <a:effectRef idx="0">
+            <a:schemeClr val="accent1"/>
+          </a:effectRef>
+          <a:fontRef idx="minor">
+            <a:schemeClr val="lt1"/>
+          </a:fontRef>
+        </p:style>
         <p:txBody>
-          <a:bodyPr>
-            <a:normAutofit/>
+          <a:bodyPr wrap="square" rtlCol="0" anchor="ctr">
+            <a:noAutofit/>
           </a:bodyPr>
           <a:lstStyle/>
           <a:p>
-            <a:r>
-              <a:rPr lang="de-AT" sz="3200" dirty="0">
-                <a:solidFill>
-                  <a:schemeClr val="tx1"/>
-                </a:solidFill>
-                <a:latin typeface="+mj-lt"/>
-                <a:ea typeface="+mj-ea"/>
-                <a:cs typeface="+mj-cs"/>
-              </a:rPr>
-              <a:t>Frontend: React Router, TypeScript, Tailwind CSS</a:t>
-            </a:r>
-          </a:p>
-          <a:p>
-            <a:r>
-              <a:rPr lang="de-AT" sz="3200" dirty="0">
-                <a:solidFill>
-                  <a:schemeClr val="tx1"/>
-                </a:solidFill>
-                <a:latin typeface="+mj-lt"/>
-                <a:ea typeface="+mj-ea"/>
-                <a:cs typeface="+mj-cs"/>
-              </a:rPr>
-              <a:t>Backend: Python, FastAPI, Pydantic, Loguru</a:t>
-            </a:r>
-          </a:p>
-          <a:p>
-            <a:r>
-              <a:rPr lang="de-AT" sz="3200" dirty="0">
-                <a:solidFill>
-                  <a:schemeClr val="tx1"/>
-                </a:solidFill>
-                <a:latin typeface="+mj-lt"/>
-                <a:ea typeface="+mj-ea"/>
-                <a:cs typeface="+mj-cs"/>
-              </a:rPr>
-              <a:t>Supabase (Cloud/Lokal) </a:t>
-            </a:r>
-          </a:p>
-          <a:p>
-            <a:r>
-              <a:rPr lang="de-AT" sz="3200" dirty="0">
-                <a:solidFill>
-                  <a:schemeClr val="tx1"/>
-                </a:solidFill>
-                <a:latin typeface="+mj-lt"/>
-                <a:ea typeface="+mj-ea"/>
-                <a:cs typeface="+mj-cs"/>
-              </a:rPr>
-              <a:t>Resend SMTP, Redis</a:t>
-            </a:r>
-          </a:p>
-          <a:p>
-            <a:r>
-              <a:rPr lang="de-AT" sz="3200" dirty="0">
-                <a:solidFill>
-                  <a:schemeClr val="tx1"/>
-                </a:solidFill>
-                <a:latin typeface="+mj-lt"/>
-                <a:ea typeface="+mj-ea"/>
-                <a:cs typeface="+mj-cs"/>
-              </a:rPr>
-              <a:t>Dockerisiert</a:t>
-            </a:r>
+            <a:pPr algn="ctr"/>
+            <a:endParaRPr lang="en-US" dirty="0">
+              <a:solidFill>
+                <a:schemeClr val="tx1"/>
+              </a:solidFill>
+            </a:endParaRPr>
           </a:p>
         </p:txBody>
       </p:sp>
+      <p:sp>
+        <p:nvSpPr>
+          <p:cNvPr id="42" name="Freeform: Shape 19">
+            <a:extLst>
+              <a:ext uri="{FF2B5EF4-FFF2-40B4-BE49-F238E27FC236}">
+                <a16:creationId xmlns:a16="http://schemas.microsoft.com/office/drawing/2014/main" id="{1DFD33E0-4D46-4176-BAE2-6AED15231C59}"/>
+              </a:ext>
+              <a:ext uri="{C183D7F6-B498-43B3-948B-1728B52AA6E4}">
+                <adec:decorative xmlns:adec="http://schemas.microsoft.com/office/drawing/2017/decorative" val="1"/>
+              </a:ext>
+            </a:extLst>
+          </p:cNvPr>
+          <p:cNvSpPr>
+            <a:spLocks noGrp="1" noRot="1" noChangeAspect="1" noMove="1" noResize="1" noEditPoints="1" noAdjustHandles="1" noChangeArrowheads="1" noChangeShapeType="1" noTextEdit="1"/>
+          </p:cNvSpPr>
+          <p:nvPr>
+            <p:extLst>
+              <p:ext uri="{386F3935-93C4-4BCD-93E2-E3B085C9AB24}">
+                <p16:designElem xmlns:p16="http://schemas.microsoft.com/office/powerpoint/2015/main" val="1"/>
+              </p:ext>
+            </p:extLst>
+          </p:nvPr>
+        </p:nvSpPr>
+        <p:spPr>
+          <a:xfrm rot="18900000">
+            <a:off x="3353363" y="5725768"/>
+            <a:ext cx="1728640" cy="1042921"/>
+          </a:xfrm>
+          <a:custGeom>
+            <a:avLst/>
+            <a:gdLst>
+              <a:gd name="connsiteX0" fmla="*/ 1391304 w 1728640"/>
+              <a:gd name="connsiteY0" fmla="*/ 238153 h 1042921"/>
+              <a:gd name="connsiteX1" fmla="*/ 1728640 w 1728640"/>
+              <a:gd name="connsiteY1" fmla="*/ 1042921 h 1042921"/>
+              <a:gd name="connsiteX2" fmla="*/ 1265147 w 1728640"/>
+              <a:gd name="connsiteY2" fmla="*/ 1042921 h 1042921"/>
+              <a:gd name="connsiteX3" fmla="*/ 801655 w 1728640"/>
+              <a:gd name="connsiteY3" fmla="*/ 521461 h 1042921"/>
+              <a:gd name="connsiteX4" fmla="*/ 374587 w 1728640"/>
+              <a:gd name="connsiteY4" fmla="*/ 839945 h 1042921"/>
+              <a:gd name="connsiteX5" fmla="*/ 362576 w 1728640"/>
+              <a:gd name="connsiteY5" fmla="*/ 883477 h 1042921"/>
+              <a:gd name="connsiteX6" fmla="*/ 0 w 1728640"/>
+              <a:gd name="connsiteY6" fmla="*/ 520901 h 1042921"/>
+              <a:gd name="connsiteX7" fmla="*/ 32986 w 1728640"/>
+              <a:gd name="connsiteY7" fmla="*/ 459814 h 1042921"/>
+              <a:gd name="connsiteX8" fmla="*/ 801656 w 1728640"/>
+              <a:gd name="connsiteY8" fmla="*/ 0 h 1042921"/>
+              <a:gd name="connsiteX9" fmla="*/ 1391304 w 1728640"/>
+              <a:gd name="connsiteY9" fmla="*/ 238153 h 1042921"/>
+            </a:gdLst>
+            <a:ahLst/>
+            <a:cxnLst>
+              <a:cxn ang="0">
+                <a:pos x="connsiteX0" y="connsiteY0"/>
+              </a:cxn>
+              <a:cxn ang="0">
+                <a:pos x="connsiteX1" y="connsiteY1"/>
+              </a:cxn>
+              <a:cxn ang="0">
+                <a:pos x="connsiteX2" y="connsiteY2"/>
+              </a:cxn>
+              <a:cxn ang="0">
+                <a:pos x="connsiteX3" y="connsiteY3"/>
+              </a:cxn>
+              <a:cxn ang="0">
+                <a:pos x="connsiteX4" y="connsiteY4"/>
+              </a:cxn>
+              <a:cxn ang="0">
+                <a:pos x="connsiteX5" y="connsiteY5"/>
+              </a:cxn>
+              <a:cxn ang="0">
+                <a:pos x="connsiteX6" y="connsiteY6"/>
+              </a:cxn>
+              <a:cxn ang="0">
+                <a:pos x="connsiteX7" y="connsiteY7"/>
+              </a:cxn>
+              <a:cxn ang="0">
+                <a:pos x="connsiteX8" y="connsiteY8"/>
+              </a:cxn>
+              <a:cxn ang="0">
+                <a:pos x="connsiteX9" y="connsiteY9"/>
+              </a:cxn>
+            </a:cxnLst>
+            <a:rect l="l" t="t" r="r" b="b"/>
+            <a:pathLst>
+              <a:path w="1728640" h="1042921">
+                <a:moveTo>
+                  <a:pt x="1391304" y="238153"/>
+                </a:moveTo>
+                <a:cubicBezTo>
+                  <a:pt x="1597323" y="429440"/>
+                  <a:pt x="1728640" y="718927"/>
+                  <a:pt x="1728640" y="1042921"/>
+                </a:cubicBezTo>
+                <a:lnTo>
+                  <a:pt x="1265147" y="1042921"/>
+                </a:lnTo>
+                <a:cubicBezTo>
+                  <a:pt x="1265147" y="754926"/>
+                  <a:pt x="1057635" y="521461"/>
+                  <a:pt x="801655" y="521461"/>
+                </a:cubicBezTo>
+                <a:cubicBezTo>
+                  <a:pt x="609671" y="521461"/>
+                  <a:pt x="444949" y="652785"/>
+                  <a:pt x="374587" y="839945"/>
+                </a:cubicBezTo>
+                <a:lnTo>
+                  <a:pt x="362576" y="883477"/>
+                </a:lnTo>
+                <a:lnTo>
+                  <a:pt x="0" y="520901"/>
+                </a:lnTo>
+                <a:lnTo>
+                  <a:pt x="32986" y="459814"/>
+                </a:lnTo>
+                <a:cubicBezTo>
+                  <a:pt x="199571" y="182395"/>
+                  <a:pt x="481681" y="0"/>
+                  <a:pt x="801656" y="0"/>
+                </a:cubicBezTo>
+                <a:cubicBezTo>
+                  <a:pt x="1025638" y="0"/>
+                  <a:pt x="1231066" y="89374"/>
+                  <a:pt x="1391304" y="238153"/>
+                </a:cubicBezTo>
+                <a:close/>
+              </a:path>
+            </a:pathLst>
+          </a:custGeom>
+          <a:solidFill>
+            <a:schemeClr val="bg2">
+              <a:lumMod val="50000"/>
+              <a:lumOff val="50000"/>
+              <a:alpha val="40000"/>
+            </a:schemeClr>
+          </a:solidFill>
+          <a:ln>
+            <a:noFill/>
+          </a:ln>
+          <a:effectLst>
+            <a:softEdge rad="190500"/>
+          </a:effectLst>
+        </p:spPr>
+        <p:style>
+          <a:lnRef idx="2">
+            <a:schemeClr val="accent1">
+              <a:shade val="50000"/>
+            </a:schemeClr>
+          </a:lnRef>
+          <a:fillRef idx="1">
+            <a:schemeClr val="accent1"/>
+          </a:fillRef>
+          <a:effectRef idx="0">
+            <a:schemeClr val="accent1"/>
+          </a:effectRef>
+          <a:fontRef idx="minor">
+            <a:schemeClr val="lt1"/>
+          </a:fontRef>
+        </p:style>
+        <p:txBody>
+          <a:bodyPr wrap="square" rtlCol="0" anchor="ctr">
+            <a:noAutofit/>
+          </a:bodyPr>
+          <a:lstStyle/>
+          <a:p>
+            <a:pPr algn="ctr"/>
+            <a:endParaRPr lang="en-US" dirty="0">
+              <a:solidFill>
+                <a:schemeClr val="tx1"/>
+              </a:solidFill>
+            </a:endParaRPr>
+          </a:p>
+        </p:txBody>
+      </p:sp>
+      <p:sp>
+        <p:nvSpPr>
+          <p:cNvPr id="43" name="Oval 21">
+            <a:extLst>
+              <a:ext uri="{FF2B5EF4-FFF2-40B4-BE49-F238E27FC236}">
+                <a16:creationId xmlns:a16="http://schemas.microsoft.com/office/drawing/2014/main" id="{022B5D87-7689-4E7F-B03A-7F803B5DF799}"/>
+              </a:ext>
+              <a:ext uri="{C183D7F6-B498-43B3-948B-1728B52AA6E4}">
+                <adec:decorative xmlns:adec="http://schemas.microsoft.com/office/drawing/2017/decorative" val="1"/>
+              </a:ext>
+            </a:extLst>
+          </p:cNvPr>
+          <p:cNvSpPr>
+            <a:spLocks noGrp="1" noRot="1" noChangeAspect="1" noMove="1" noResize="1" noEditPoints="1" noAdjustHandles="1" noChangeArrowheads="1" noChangeShapeType="1" noTextEdit="1"/>
+          </p:cNvSpPr>
+          <p:nvPr>
+            <p:extLst>
+              <p:ext uri="{386F3935-93C4-4BCD-93E2-E3B085C9AB24}">
+                <p16:designElem xmlns:p16="http://schemas.microsoft.com/office/powerpoint/2015/main" val="1"/>
+              </p:ext>
+            </p:extLst>
+          </p:nvPr>
+        </p:nvSpPr>
+        <p:spPr>
+          <a:xfrm rot="2700000">
+            <a:off x="4872920" y="5836283"/>
+            <a:ext cx="107098" cy="466589"/>
+          </a:xfrm>
+          <a:prstGeom prst="ellipse">
+            <a:avLst/>
+          </a:prstGeom>
+          <a:solidFill>
+            <a:schemeClr val="bg2"/>
+          </a:solidFill>
+          <a:ln>
+            <a:noFill/>
+          </a:ln>
+          <a:effectLst>
+            <a:innerShdw blurRad="63500" dist="2540000">
+              <a:schemeClr val="accent1">
+                <a:lumMod val="40000"/>
+                <a:lumOff val="60000"/>
+                <a:alpha val="20000"/>
+              </a:schemeClr>
+            </a:innerShdw>
+          </a:effectLst>
+        </p:spPr>
+        <p:style>
+          <a:lnRef idx="2">
+            <a:schemeClr val="accent1">
+              <a:shade val="50000"/>
+            </a:schemeClr>
+          </a:lnRef>
+          <a:fillRef idx="1">
+            <a:schemeClr val="accent1"/>
+          </a:fillRef>
+          <a:effectRef idx="0">
+            <a:schemeClr val="accent1"/>
+          </a:effectRef>
+          <a:fontRef idx="minor">
+            <a:schemeClr val="lt1"/>
+          </a:fontRef>
+        </p:style>
+        <p:txBody>
+          <a:bodyPr rot="0" spcFirstLastPara="0" vertOverflow="overflow" horzOverflow="overflow" vert="horz" wrap="square" lIns="91440" tIns="45720" rIns="91440" bIns="45720" numCol="1" spcCol="0" rtlCol="0" fromWordArt="0" anchor="ctr" anchorCtr="0" forceAA="0" compatLnSpc="1">
+            <a:prstTxWarp prst="textNoShape">
+              <a:avLst/>
+            </a:prstTxWarp>
+            <a:noAutofit/>
+          </a:bodyPr>
+          <a:lstStyle/>
+          <a:p>
+            <a:pPr algn="ctr"/>
+            <a:endParaRPr lang="en-US"/>
+          </a:p>
+        </p:txBody>
+      </p:sp>
+      <p:graphicFrame>
+        <p:nvGraphicFramePr>
+          <p:cNvPr id="44" name="Inhaltsplatzhalter 3">
+            <a:extLst>
+              <a:ext uri="{FF2B5EF4-FFF2-40B4-BE49-F238E27FC236}">
+                <a16:creationId xmlns:a16="http://schemas.microsoft.com/office/drawing/2014/main" id="{3F355FAA-1B27-3F6B-6CC6-309A84DB2FE7}"/>
+              </a:ext>
+            </a:extLst>
+          </p:cNvPr>
+          <p:cNvGraphicFramePr>
+            <a:graphicFrameLocks noGrp="1"/>
+          </p:cNvGraphicFramePr>
+          <p:nvPr>
+            <p:ph idx="1"/>
+            <p:extLst>
+              <p:ext uri="{D42A27DB-BD31-4B8C-83A1-F6EECF244321}">
+                <p14:modId xmlns:p14="http://schemas.microsoft.com/office/powerpoint/2010/main" val="2832567208"/>
+              </p:ext>
+            </p:extLst>
+          </p:nvPr>
+        </p:nvGraphicFramePr>
+        <p:xfrm>
+          <a:off x="5267325" y="549275"/>
+          <a:ext cx="6373814" cy="5759450"/>
+        </p:xfrm>
+        <a:graphic>
+          <a:graphicData uri="http://schemas.openxmlformats.org/drawingml/2006/diagram">
+            <dgm:relIds xmlns:dgm="http://schemas.openxmlformats.org/drawingml/2006/diagram" xmlns:r="http://schemas.openxmlformats.org/officeDocument/2006/relationships" r:dm="rId3" r:lo="rId4" r:qs="rId5" r:cs="rId6"/>
+          </a:graphicData>
+        </a:graphic>
+      </p:graphicFrame>
     </p:spTree>
     <p:extLst>
       <p:ext uri="{BB962C8B-B14F-4D97-AF65-F5344CB8AC3E}">
@@ -17103,6 +21454,98 @@
         <p:cNvPr id="1" name="">
           <a:extLst>
             <a:ext uri="{FF2B5EF4-FFF2-40B4-BE49-F238E27FC236}">
+              <a16:creationId xmlns:a16="http://schemas.microsoft.com/office/drawing/2014/main" id="{7BD34E24-8169-3A1D-D4A9-86A72B57E921}"/>
+            </a:ext>
+          </a:extLst>
+        </p:cNvPr>
+        <p:cNvGrpSpPr/>
+        <p:nvPr/>
+      </p:nvGrpSpPr>
+      <p:grpSpPr>
+        <a:xfrm>
+          <a:off x="0" y="0"/>
+          <a:ext cx="0" cy="0"/>
+          <a:chOff x="0" y="0"/>
+          <a:chExt cx="0" cy="0"/>
+        </a:xfrm>
+      </p:grpSpPr>
+      <p:sp>
+        <p:nvSpPr>
+          <p:cNvPr id="2" name="Titel 1">
+            <a:extLst>
+              <a:ext uri="{FF2B5EF4-FFF2-40B4-BE49-F238E27FC236}">
+                <a16:creationId xmlns:a16="http://schemas.microsoft.com/office/drawing/2014/main" id="{3565D9C5-B835-BEFB-0552-ED20D663752E}"/>
+              </a:ext>
+            </a:extLst>
+          </p:cNvPr>
+          <p:cNvSpPr>
+            <a:spLocks noGrp="1"/>
+          </p:cNvSpPr>
+          <p:nvPr>
+            <p:ph type="title"/>
+          </p:nvPr>
+        </p:nvSpPr>
+        <p:spPr/>
+        <p:txBody>
+          <a:bodyPr/>
+          <a:lstStyle/>
+          <a:p>
+            <a:r>
+              <a:rPr lang="de-AT" dirty="0"/>
+              <a:t>Sequence Diagramm - Login</a:t>
+            </a:r>
+          </a:p>
+        </p:txBody>
+      </p:sp>
+      <p:sp>
+        <p:nvSpPr>
+          <p:cNvPr id="4" name="Inhaltsplatzhalter 3">
+            <a:extLst>
+              <a:ext uri="{FF2B5EF4-FFF2-40B4-BE49-F238E27FC236}">
+                <a16:creationId xmlns:a16="http://schemas.microsoft.com/office/drawing/2014/main" id="{1CC5B2BC-57FF-C5D1-C016-91AB7359AB7A}"/>
+              </a:ext>
+            </a:extLst>
+          </p:cNvPr>
+          <p:cNvSpPr>
+            <a:spLocks noGrp="1"/>
+          </p:cNvSpPr>
+          <p:nvPr>
+            <p:ph idx="1"/>
+          </p:nvPr>
+        </p:nvSpPr>
+        <p:spPr/>
+        <p:txBody>
+          <a:bodyPr/>
+          <a:lstStyle/>
+          <a:p>
+            <a:endParaRPr lang="de-AT"/>
+          </a:p>
+        </p:txBody>
+      </p:sp>
+    </p:spTree>
+    <p:extLst>
+      <p:ext uri="{BB962C8B-B14F-4D97-AF65-F5344CB8AC3E}">
+        <p14:creationId xmlns:p14="http://schemas.microsoft.com/office/powerpoint/2010/main" val="3340542771"/>
+      </p:ext>
+    </p:extLst>
+  </p:cSld>
+  <p:clrMapOvr>
+    <a:masterClrMapping/>
+  </p:clrMapOvr>
+  <p:transition spd="med">
+    <p:pull/>
+  </p:transition>
+</p:sld>
+</file>
+
+<file path=ppt/slides/slide9.xml><?xml version="1.0" encoding="utf-8"?>
+<p:sld xmlns:a="http://schemas.openxmlformats.org/drawingml/2006/main" xmlns:r="http://schemas.openxmlformats.org/officeDocument/2006/relationships" xmlns:p="http://schemas.openxmlformats.org/presentationml/2006/main">
+  <p:cSld>
+    <p:spTree>
+      <p:nvGrpSpPr>
+        <p:cNvPr id="1" name="">
+          <a:extLst>
+            <a:ext uri="{FF2B5EF4-FFF2-40B4-BE49-F238E27FC236}">
               <a16:creationId xmlns:a16="http://schemas.microsoft.com/office/drawing/2014/main" id="{60253105-CAE6-EB40-F1DB-841227A528EB}"/>
             </a:ext>
           </a:extLst>
@@ -17182,110 +21625,6 @@
     <p:extLst>
       <p:ext uri="{BB962C8B-B14F-4D97-AF65-F5344CB8AC3E}">
         <p14:creationId xmlns:p14="http://schemas.microsoft.com/office/powerpoint/2010/main" val="3361746550"/>
-      </p:ext>
-    </p:extLst>
-  </p:cSld>
-  <p:clrMapOvr>
-    <a:masterClrMapping/>
-  </p:clrMapOvr>
-  <p:transition spd="med">
-    <p:pull/>
-  </p:transition>
-</p:sld>
-</file>
-
-<file path=ppt/slides/slide9.xml><?xml version="1.0" encoding="utf-8"?>
-<p:sld xmlns:a="http://schemas.openxmlformats.org/drawingml/2006/main" xmlns:r="http://schemas.openxmlformats.org/officeDocument/2006/relationships" xmlns:p="http://schemas.openxmlformats.org/presentationml/2006/main">
-  <p:cSld>
-    <p:spTree>
-      <p:nvGrpSpPr>
-        <p:cNvPr id="1" name="">
-          <a:extLst>
-            <a:ext uri="{FF2B5EF4-FFF2-40B4-BE49-F238E27FC236}">
-              <a16:creationId xmlns:a16="http://schemas.microsoft.com/office/drawing/2014/main" id="{DC4A6B48-AD61-D1E5-7FC9-01A07CCA282B}"/>
-            </a:ext>
-          </a:extLst>
-        </p:cNvPr>
-        <p:cNvGrpSpPr/>
-        <p:nvPr/>
-      </p:nvGrpSpPr>
-      <p:grpSpPr>
-        <a:xfrm>
-          <a:off x="0" y="0"/>
-          <a:ext cx="0" cy="0"/>
-          <a:chOff x="0" y="0"/>
-          <a:chExt cx="0" cy="0"/>
-        </a:xfrm>
-      </p:grpSpPr>
-      <p:sp>
-        <p:nvSpPr>
-          <p:cNvPr id="2" name="Titel 1">
-            <a:extLst>
-              <a:ext uri="{FF2B5EF4-FFF2-40B4-BE49-F238E27FC236}">
-                <a16:creationId xmlns:a16="http://schemas.microsoft.com/office/drawing/2014/main" id="{4BC1A2EC-D92F-5390-E662-2B547AEC7D64}"/>
-              </a:ext>
-            </a:extLst>
-          </p:cNvPr>
-          <p:cNvSpPr>
-            <a:spLocks noGrp="1"/>
-          </p:cNvSpPr>
-          <p:nvPr>
-            <p:ph type="title"/>
-          </p:nvPr>
-        </p:nvSpPr>
-        <p:spPr/>
-        <p:txBody>
-          <a:bodyPr/>
-          <a:lstStyle/>
-          <a:p>
-            <a:r>
-              <a:rPr lang="de-AT" dirty="0"/>
-              <a:t>Sequence Diagramm - RAG</a:t>
-            </a:r>
-          </a:p>
-        </p:txBody>
-      </p:sp>
-      <p:pic>
-        <p:nvPicPr>
-          <p:cNvPr id="8" name="Inhaltsplatzhalter 7">
-            <a:extLst>
-              <a:ext uri="{FF2B5EF4-FFF2-40B4-BE49-F238E27FC236}">
-                <a16:creationId xmlns:a16="http://schemas.microsoft.com/office/drawing/2014/main" id="{AE7E5E09-6983-00F2-084E-B08B76516595}"/>
-              </a:ext>
-            </a:extLst>
-          </p:cNvPr>
-          <p:cNvPicPr>
-            <a:picLocks noGrp="1" noChangeAspect="1"/>
-          </p:cNvPicPr>
-          <p:nvPr>
-            <p:ph idx="1"/>
-          </p:nvPr>
-        </p:nvPicPr>
-        <p:blipFill>
-          <a:blip r:embed="rId3">
-            <a:extLst>
-              <a:ext uri="{28A0092B-C50C-407E-A947-70E740481C1C}">
-                <a14:useLocalDpi xmlns:a14="http://schemas.microsoft.com/office/drawing/2010/main" val="0"/>
-              </a:ext>
-            </a:extLst>
-          </a:blip>
-          <a:srcRect/>
-          <a:stretch/>
-        </p:blipFill>
-        <p:spPr>
-          <a:xfrm>
-            <a:off x="1885768" y="2087563"/>
-            <a:ext cx="8991964" cy="3979862"/>
-          </a:xfrm>
-          <a:prstGeom prst="rect">
-            <a:avLst/>
-          </a:prstGeom>
-        </p:spPr>
-      </p:pic>
-    </p:spTree>
-    <p:extLst>
-      <p:ext uri="{BB962C8B-B14F-4D97-AF65-F5344CB8AC3E}">
-        <p14:creationId xmlns:p14="http://schemas.microsoft.com/office/powerpoint/2010/main" val="4100904227"/>
       </p:ext>
     </p:extLst>
   </p:cSld>
